--- a/Graduate-Paper/Proposal/开题答辩/废弃.pptx
+++ b/Graduate-Paper/Proposal/开题答辩/废弃.pptx
@@ -10,6 +10,11 @@
   <p:sldIdLst>
     <p:sldId id="273" r:id="rId3"/>
     <p:sldId id="274" r:id="rId5"/>
+    <p:sldId id="275" r:id="rId6"/>
+    <p:sldId id="276" r:id="rId7"/>
+    <p:sldId id="277" r:id="rId8"/>
+    <p:sldId id="278" r:id="rId9"/>
+    <p:sldId id="279" r:id="rId10"/>
   </p:sldIdLst>
   <p:sldSz cx="16256000" cy="9144000"/>
   <p:notesSz cx="9144000" cy="16256000"/>
@@ -671,6 +676,400 @@
           </a:p>
           <a:p>
             <a:endParaRPr lang="zh-CN" altLang="en-US" dirty="0"/>
+          </a:p>
+        </p:txBody>
+      </p:sp>
+    </p:spTree>
+  </p:cSld>
+  <p:clrMapOvr>
+    <a:masterClrMapping/>
+  </p:clrMapOvr>
+</p:notes>
+</file>
+
+<file path=ppt/notesSlides/notesSlide3.xml><?xml version="1.0" encoding="utf-8"?>
+<p:notes xmlns:a="http://schemas.openxmlformats.org/drawingml/2006/main" xmlns:r="http://schemas.openxmlformats.org/officeDocument/2006/relationships" xmlns:p="http://schemas.openxmlformats.org/presentationml/2006/main">
+  <p:cSld>
+    <p:spTree>
+      <p:nvGrpSpPr>
+        <p:cNvPr id="1" name=""/>
+        <p:cNvGrpSpPr/>
+        <p:nvPr/>
+      </p:nvGrpSpPr>
+      <p:grpSpPr>
+        <a:xfrm>
+          <a:off x="0" y="0"/>
+          <a:ext cx="0" cy="0"/>
+          <a:chOff x="0" y="0"/>
+          <a:chExt cx="0" cy="0"/>
+        </a:xfrm>
+      </p:grpSpPr>
+      <p:sp>
+        <p:nvSpPr>
+          <p:cNvPr id="2" name="Slide Image Placeholder 1"/>
+          <p:cNvSpPr>
+            <a:spLocks noGrp="1" noRot="1" noChangeAspect="1"/>
+          </p:cNvSpPr>
+          <p:nvPr>
+            <p:ph type="sldImg"/>
+          </p:nvPr>
+        </p:nvSpPr>
+        <p:spPr/>
+      </p:sp>
+      <p:sp>
+        <p:nvSpPr>
+          <p:cNvPr id="3" name="Notes Placeholder 2"/>
+          <p:cNvSpPr>
+            <a:spLocks noGrp="1"/>
+          </p:cNvSpPr>
+          <p:nvPr>
+            <p:ph type="body" idx="1"/>
+          </p:nvPr>
+        </p:nvSpPr>
+        <p:spPr/>
+        <p:txBody>
+          <a:bodyPr/>
+          <a:lstStyle/>
+          <a:p>
+            <a:endParaRPr lang="en-US" dirty="0"/>
+          </a:p>
+        </p:txBody>
+      </p:sp>
+      <p:sp>
+        <p:nvSpPr>
+          <p:cNvPr id="4" name="Slide Number Placeholder 3"/>
+          <p:cNvSpPr>
+            <a:spLocks noGrp="1"/>
+          </p:cNvSpPr>
+          <p:nvPr>
+            <p:ph type="sldNum" sz="quarter" idx="10"/>
+          </p:nvPr>
+        </p:nvSpPr>
+        <p:spPr/>
+        <p:txBody>
+          <a:bodyPr/>
+          <a:lstStyle/>
+          <a:p>
+            <a:fld id="{F7021451-1387-4CA6-816F-3879F97B5CBC}" type="slidenum">
+              <a:rPr lang="en-US"/>
+            </a:fld>
+            <a:endParaRPr lang="en-US"/>
+          </a:p>
+        </p:txBody>
+      </p:sp>
+    </p:spTree>
+  </p:cSld>
+  <p:clrMapOvr>
+    <a:masterClrMapping/>
+  </p:clrMapOvr>
+</p:notes>
+</file>
+
+<file path=ppt/notesSlides/notesSlide4.xml><?xml version="1.0" encoding="utf-8"?>
+<p:notes xmlns:a="http://schemas.openxmlformats.org/drawingml/2006/main" xmlns:r="http://schemas.openxmlformats.org/officeDocument/2006/relationships" xmlns:p="http://schemas.openxmlformats.org/presentationml/2006/main">
+  <p:cSld>
+    <p:spTree>
+      <p:nvGrpSpPr>
+        <p:cNvPr id="1" name=""/>
+        <p:cNvGrpSpPr/>
+        <p:nvPr/>
+      </p:nvGrpSpPr>
+      <p:grpSpPr>
+        <a:xfrm>
+          <a:off x="0" y="0"/>
+          <a:ext cx="0" cy="0"/>
+          <a:chOff x="0" y="0"/>
+          <a:chExt cx="0" cy="0"/>
+        </a:xfrm>
+      </p:grpSpPr>
+      <p:sp>
+        <p:nvSpPr>
+          <p:cNvPr id="2" name="Slide Image Placeholder 1"/>
+          <p:cNvSpPr>
+            <a:spLocks noGrp="1" noRot="1" noChangeAspect="1"/>
+          </p:cNvSpPr>
+          <p:nvPr>
+            <p:ph type="sldImg"/>
+          </p:nvPr>
+        </p:nvSpPr>
+        <p:spPr/>
+      </p:sp>
+      <p:sp>
+        <p:nvSpPr>
+          <p:cNvPr id="3" name="Notes Placeholder 2"/>
+          <p:cNvSpPr>
+            <a:spLocks noGrp="1"/>
+          </p:cNvSpPr>
+          <p:nvPr>
+            <p:ph type="body" idx="1"/>
+          </p:nvPr>
+        </p:nvSpPr>
+        <p:spPr/>
+        <p:txBody>
+          <a:bodyPr/>
+          <a:lstStyle/>
+          <a:p>
+            <a:endParaRPr lang="en-US" dirty="0"/>
+          </a:p>
+        </p:txBody>
+      </p:sp>
+      <p:sp>
+        <p:nvSpPr>
+          <p:cNvPr id="4" name="Slide Number Placeholder 3"/>
+          <p:cNvSpPr>
+            <a:spLocks noGrp="1"/>
+          </p:cNvSpPr>
+          <p:nvPr>
+            <p:ph type="sldNum" sz="quarter" idx="10"/>
+          </p:nvPr>
+        </p:nvSpPr>
+        <p:spPr/>
+        <p:txBody>
+          <a:bodyPr/>
+          <a:lstStyle/>
+          <a:p>
+            <a:fld id="{F7021451-1387-4CA6-816F-3879F97B5CBC}" type="slidenum">
+              <a:rPr lang="en-US"/>
+            </a:fld>
+            <a:endParaRPr lang="en-US"/>
+          </a:p>
+        </p:txBody>
+      </p:sp>
+    </p:spTree>
+  </p:cSld>
+  <p:clrMapOvr>
+    <a:masterClrMapping/>
+  </p:clrMapOvr>
+</p:notes>
+</file>
+
+<file path=ppt/notesSlides/notesSlide5.xml><?xml version="1.0" encoding="utf-8"?>
+<p:notes xmlns:a="http://schemas.openxmlformats.org/drawingml/2006/main" xmlns:r="http://schemas.openxmlformats.org/officeDocument/2006/relationships" xmlns:p="http://schemas.openxmlformats.org/presentationml/2006/main">
+  <p:cSld>
+    <p:spTree>
+      <p:nvGrpSpPr>
+        <p:cNvPr id="1" name=""/>
+        <p:cNvGrpSpPr/>
+        <p:nvPr/>
+      </p:nvGrpSpPr>
+      <p:grpSpPr>
+        <a:xfrm>
+          <a:off x="0" y="0"/>
+          <a:ext cx="0" cy="0"/>
+          <a:chOff x="0" y="0"/>
+          <a:chExt cx="0" cy="0"/>
+        </a:xfrm>
+      </p:grpSpPr>
+      <p:sp>
+        <p:nvSpPr>
+          <p:cNvPr id="2" name="Slide Image Placeholder 1"/>
+          <p:cNvSpPr>
+            <a:spLocks noGrp="1" noRot="1" noChangeAspect="1"/>
+          </p:cNvSpPr>
+          <p:nvPr>
+            <p:ph type="sldImg"/>
+          </p:nvPr>
+        </p:nvSpPr>
+        <p:spPr/>
+      </p:sp>
+      <p:sp>
+        <p:nvSpPr>
+          <p:cNvPr id="3" name="Notes Placeholder 2"/>
+          <p:cNvSpPr>
+            <a:spLocks noGrp="1"/>
+          </p:cNvSpPr>
+          <p:nvPr>
+            <p:ph type="body" idx="1"/>
+          </p:nvPr>
+        </p:nvSpPr>
+        <p:spPr/>
+        <p:txBody>
+          <a:bodyPr/>
+          <a:lstStyle/>
+          <a:p>
+            <a:endParaRPr lang="en-US" dirty="0"/>
+          </a:p>
+        </p:txBody>
+      </p:sp>
+      <p:sp>
+        <p:nvSpPr>
+          <p:cNvPr id="4" name="Slide Number Placeholder 3"/>
+          <p:cNvSpPr>
+            <a:spLocks noGrp="1"/>
+          </p:cNvSpPr>
+          <p:nvPr>
+            <p:ph type="sldNum" sz="quarter" idx="10"/>
+          </p:nvPr>
+        </p:nvSpPr>
+        <p:spPr/>
+        <p:txBody>
+          <a:bodyPr/>
+          <a:lstStyle/>
+          <a:p>
+            <a:fld id="{F7021451-1387-4CA6-816F-3879F97B5CBC}" type="slidenum">
+              <a:rPr lang="en-US"/>
+            </a:fld>
+            <a:endParaRPr lang="en-US"/>
+          </a:p>
+        </p:txBody>
+      </p:sp>
+    </p:spTree>
+  </p:cSld>
+  <p:clrMapOvr>
+    <a:masterClrMapping/>
+  </p:clrMapOvr>
+</p:notes>
+</file>
+
+<file path=ppt/notesSlides/notesSlide6.xml><?xml version="1.0" encoding="utf-8"?>
+<p:notes xmlns:a="http://schemas.openxmlformats.org/drawingml/2006/main" xmlns:r="http://schemas.openxmlformats.org/officeDocument/2006/relationships" xmlns:p="http://schemas.openxmlformats.org/presentationml/2006/main">
+  <p:cSld>
+    <p:spTree>
+      <p:nvGrpSpPr>
+        <p:cNvPr id="1" name=""/>
+        <p:cNvGrpSpPr/>
+        <p:nvPr/>
+      </p:nvGrpSpPr>
+      <p:grpSpPr>
+        <a:xfrm>
+          <a:off x="0" y="0"/>
+          <a:ext cx="0" cy="0"/>
+          <a:chOff x="0" y="0"/>
+          <a:chExt cx="0" cy="0"/>
+        </a:xfrm>
+      </p:grpSpPr>
+      <p:sp>
+        <p:nvSpPr>
+          <p:cNvPr id="2" name="Slide Image Placeholder 1"/>
+          <p:cNvSpPr>
+            <a:spLocks noGrp="1" noRot="1" noChangeAspect="1"/>
+          </p:cNvSpPr>
+          <p:nvPr>
+            <p:ph type="sldImg"/>
+          </p:nvPr>
+        </p:nvSpPr>
+        <p:spPr/>
+      </p:sp>
+      <p:sp>
+        <p:nvSpPr>
+          <p:cNvPr id="3" name="Notes Placeholder 2"/>
+          <p:cNvSpPr>
+            <a:spLocks noGrp="1"/>
+          </p:cNvSpPr>
+          <p:nvPr>
+            <p:ph type="body" idx="1"/>
+          </p:nvPr>
+        </p:nvSpPr>
+        <p:spPr/>
+        <p:txBody>
+          <a:bodyPr/>
+          <a:lstStyle/>
+          <a:p>
+            <a:endParaRPr lang="en-US" dirty="0"/>
+          </a:p>
+        </p:txBody>
+      </p:sp>
+      <p:sp>
+        <p:nvSpPr>
+          <p:cNvPr id="4" name="Slide Number Placeholder 3"/>
+          <p:cNvSpPr>
+            <a:spLocks noGrp="1"/>
+          </p:cNvSpPr>
+          <p:nvPr>
+            <p:ph type="sldNum" sz="quarter" idx="10"/>
+          </p:nvPr>
+        </p:nvSpPr>
+        <p:spPr/>
+        <p:txBody>
+          <a:bodyPr/>
+          <a:lstStyle/>
+          <a:p>
+            <a:fld id="{F7021451-1387-4CA6-816F-3879F97B5CBC}" type="slidenum">
+              <a:rPr lang="en-US"/>
+            </a:fld>
+            <a:endParaRPr lang="en-US"/>
+          </a:p>
+        </p:txBody>
+      </p:sp>
+    </p:spTree>
+  </p:cSld>
+  <p:clrMapOvr>
+    <a:masterClrMapping/>
+  </p:clrMapOvr>
+</p:notes>
+</file>
+
+<file path=ppt/notesSlides/notesSlide7.xml><?xml version="1.0" encoding="utf-8"?>
+<p:notes xmlns:a="http://schemas.openxmlformats.org/drawingml/2006/main" xmlns:r="http://schemas.openxmlformats.org/officeDocument/2006/relationships" xmlns:p="http://schemas.openxmlformats.org/presentationml/2006/main">
+  <p:cSld>
+    <p:spTree>
+      <p:nvGrpSpPr>
+        <p:cNvPr id="1" name=""/>
+        <p:cNvGrpSpPr/>
+        <p:nvPr/>
+      </p:nvGrpSpPr>
+      <p:grpSpPr>
+        <a:xfrm>
+          <a:off x="0" y="0"/>
+          <a:ext cx="0" cy="0"/>
+          <a:chOff x="0" y="0"/>
+          <a:chExt cx="0" cy="0"/>
+        </a:xfrm>
+      </p:grpSpPr>
+      <p:sp>
+        <p:nvSpPr>
+          <p:cNvPr id="2" name="Slide Image Placeholder 1"/>
+          <p:cNvSpPr>
+            <a:spLocks noGrp="1" noRot="1" noChangeAspect="1"/>
+          </p:cNvSpPr>
+          <p:nvPr>
+            <p:ph type="sldImg"/>
+          </p:nvPr>
+        </p:nvSpPr>
+        <p:spPr/>
+      </p:sp>
+      <p:sp>
+        <p:nvSpPr>
+          <p:cNvPr id="3" name="Notes Placeholder 2"/>
+          <p:cNvSpPr>
+            <a:spLocks noGrp="1"/>
+          </p:cNvSpPr>
+          <p:nvPr>
+            <p:ph type="body" idx="1"/>
+          </p:nvPr>
+        </p:nvSpPr>
+        <p:spPr/>
+        <p:txBody>
+          <a:bodyPr/>
+          <a:lstStyle/>
+          <a:p>
+            <a:r>
+              <a:rPr lang="en-US" dirty="0"/>
+              <a:t>下面我将简要介绍我的三项对应的研究内容</a:t>
+            </a:r>
+            <a:endParaRPr lang="en-US" dirty="0"/>
+          </a:p>
+        </p:txBody>
+      </p:sp>
+      <p:sp>
+        <p:nvSpPr>
+          <p:cNvPr id="4" name="Slide Number Placeholder 3"/>
+          <p:cNvSpPr>
+            <a:spLocks noGrp="1"/>
+          </p:cNvSpPr>
+          <p:nvPr>
+            <p:ph type="sldNum" sz="quarter" idx="10"/>
+          </p:nvPr>
+        </p:nvSpPr>
+        <p:spPr/>
+        <p:txBody>
+          <a:bodyPr/>
+          <a:lstStyle/>
+          <a:p>
+            <a:fld id="{F7021451-1387-4CA6-816F-3879F97B5CBC}" type="slidenum">
+              <a:rPr lang="en-US"/>
+            </a:fld>
+            <a:endParaRPr lang="en-US"/>
           </a:p>
         </p:txBody>
       </p:sp>
@@ -3264,6 +3663,6982 @@
 </p:sld>
 </file>
 
+<file path=ppt/slides/slide3.xml><?xml version="1.0" encoding="utf-8"?>
+<p:sld xmlns:a="http://schemas.openxmlformats.org/drawingml/2006/main" xmlns:r="http://schemas.openxmlformats.org/officeDocument/2006/relationships" xmlns:p="http://schemas.openxmlformats.org/presentationml/2006/main">
+  <p:cSld>
+    <p:spTree>
+      <p:nvGrpSpPr>
+        <p:cNvPr id="1" name=""/>
+        <p:cNvGrpSpPr/>
+        <p:nvPr/>
+      </p:nvGrpSpPr>
+      <p:grpSpPr>
+        <a:xfrm>
+          <a:off x="0" y="0"/>
+          <a:ext cx="0" cy="0"/>
+          <a:chOff x="0" y="0"/>
+          <a:chExt cx="0" cy="0"/>
+        </a:xfrm>
+      </p:grpSpPr>
+      <p:sp>
+        <p:nvSpPr>
+          <p:cNvPr id="2" name="Shape 0"/>
+          <p:cNvSpPr/>
+          <p:nvPr/>
+        </p:nvSpPr>
+        <p:spPr>
+          <a:xfrm>
+            <a:off x="2219960" y="0"/>
+            <a:ext cx="2895600" cy="962660"/>
+          </a:xfrm>
+          <a:prstGeom prst="rect">
+            <a:avLst/>
+          </a:prstGeom>
+          <a:solidFill>
+            <a:srgbClr val="F2F2F2"/>
+          </a:solidFill>
+          <a:ln w="12700">
+            <a:solidFill>
+              <a:srgbClr val="F2F2F2"/>
+            </a:solidFill>
+            <a:prstDash val="solid"/>
+          </a:ln>
+        </p:spPr>
+      </p:sp>
+      <p:sp>
+        <p:nvSpPr>
+          <p:cNvPr id="3" name="Shape 1"/>
+          <p:cNvSpPr/>
+          <p:nvPr/>
+        </p:nvSpPr>
+        <p:spPr>
+          <a:xfrm>
+            <a:off x="5162169" y="-889"/>
+            <a:ext cx="2590800" cy="962660"/>
+          </a:xfrm>
+          <a:prstGeom prst="rect">
+            <a:avLst/>
+          </a:prstGeom>
+          <a:solidFill>
+            <a:srgbClr val="04579A"/>
+          </a:solidFill>
+          <a:ln w="12700">
+            <a:solidFill>
+              <a:srgbClr val="04579A"/>
+            </a:solidFill>
+            <a:prstDash val="solid"/>
+          </a:ln>
+        </p:spPr>
+      </p:sp>
+      <p:sp>
+        <p:nvSpPr>
+          <p:cNvPr id="4" name="Shape 2"/>
+          <p:cNvSpPr/>
+          <p:nvPr/>
+        </p:nvSpPr>
+        <p:spPr>
+          <a:xfrm>
+            <a:off x="7816469" y="-889"/>
+            <a:ext cx="4114800" cy="962660"/>
+          </a:xfrm>
+          <a:prstGeom prst="rect">
+            <a:avLst/>
+          </a:prstGeom>
+          <a:solidFill>
+            <a:srgbClr val="F2F2F2"/>
+          </a:solidFill>
+        </p:spPr>
+      </p:sp>
+      <p:sp>
+        <p:nvSpPr>
+          <p:cNvPr id="5" name="Shape 3"/>
+          <p:cNvSpPr/>
+          <p:nvPr/>
+        </p:nvSpPr>
+        <p:spPr>
+          <a:xfrm>
+            <a:off x="11971020" y="0"/>
+            <a:ext cx="4284980" cy="961771"/>
+          </a:xfrm>
+          <a:prstGeom prst="rect">
+            <a:avLst/>
+          </a:prstGeom>
+          <a:solidFill>
+            <a:srgbClr val="F2F2F2"/>
+          </a:solidFill>
+        </p:spPr>
+      </p:sp>
+      <p:sp>
+        <p:nvSpPr>
+          <p:cNvPr id="6" name="Shape 4"/>
+          <p:cNvSpPr/>
+          <p:nvPr/>
+        </p:nvSpPr>
+        <p:spPr>
+          <a:xfrm>
+            <a:off x="2283460" y="203200"/>
+            <a:ext cx="2768600" cy="508000"/>
+          </a:xfrm>
+          <a:prstGeom prst="rect">
+            <a:avLst/>
+          </a:prstGeom>
+          <a:noFill/>
+        </p:spPr>
+      </p:sp>
+      <p:sp>
+        <p:nvSpPr>
+          <p:cNvPr id="7" name="Text 5"/>
+          <p:cNvSpPr/>
+          <p:nvPr/>
+        </p:nvSpPr>
+        <p:spPr>
+          <a:xfrm>
+            <a:off x="2161540" y="142240"/>
+            <a:ext cx="3012440" cy="629920"/>
+          </a:xfrm>
+          <a:prstGeom prst="rect">
+            <a:avLst/>
+          </a:prstGeom>
+          <a:noFill/>
+        </p:spPr>
+        <p:txBody>
+          <a:bodyPr wrap="none" lIns="0" tIns="0" rIns="0" bIns="0" rtlCol="0" anchor="ctr"/>
+          <a:lstStyle/>
+          <a:p>
+            <a:pPr algn="ctr">
+              <a:lnSpc>
+                <a:spcPct val="120000"/>
+              </a:lnSpc>
+            </a:pPr>
+            <a:r>
+              <a:rPr lang="en-US" sz="2000" dirty="0">
+                <a:solidFill>
+                  <a:srgbClr val="333333"/>
+                </a:solidFill>
+                <a:latin typeface="Arial" panose="020B0604020202020204" pitchFamily="34" charset="0"/>
+                <a:ea typeface="Arial" panose="020B0604020202020204" pitchFamily="34" charset="-122"/>
+                <a:cs typeface="Arial" panose="020B0604020202020204" pitchFamily="34" charset="-120"/>
+              </a:rPr>
+              <a:t>选题背景及意义</a:t>
+            </a:r>
+            <a:endParaRPr lang="en-US" sz="2000" dirty="0"/>
+          </a:p>
+        </p:txBody>
+      </p:sp>
+      <p:sp>
+        <p:nvSpPr>
+          <p:cNvPr id="8" name="Shape 6"/>
+          <p:cNvSpPr/>
+          <p:nvPr/>
+        </p:nvSpPr>
+        <p:spPr>
+          <a:xfrm>
+            <a:off x="5225669" y="203200"/>
+            <a:ext cx="2463800" cy="508000"/>
+          </a:xfrm>
+          <a:prstGeom prst="rect">
+            <a:avLst/>
+          </a:prstGeom>
+          <a:noFill/>
+        </p:spPr>
+      </p:sp>
+      <p:sp>
+        <p:nvSpPr>
+          <p:cNvPr id="9" name="Text 7"/>
+          <p:cNvSpPr/>
+          <p:nvPr/>
+        </p:nvSpPr>
+        <p:spPr>
+          <a:xfrm>
+            <a:off x="5103749" y="142240"/>
+            <a:ext cx="2707640" cy="629920"/>
+          </a:xfrm>
+          <a:prstGeom prst="rect">
+            <a:avLst/>
+          </a:prstGeom>
+          <a:noFill/>
+        </p:spPr>
+        <p:txBody>
+          <a:bodyPr wrap="none" lIns="0" tIns="0" rIns="0" bIns="0" rtlCol="0" anchor="ctr"/>
+          <a:lstStyle/>
+          <a:p>
+            <a:pPr algn="ctr">
+              <a:lnSpc>
+                <a:spcPct val="120000"/>
+              </a:lnSpc>
+            </a:pPr>
+            <a:r>
+              <a:rPr lang="en-US" sz="2000" dirty="0">
+                <a:solidFill>
+                  <a:srgbClr val="FFFFFF"/>
+                </a:solidFill>
+                <a:latin typeface="Arial" panose="020B0604020202020204" pitchFamily="34" charset="0"/>
+                <a:ea typeface="Arial" panose="020B0604020202020204" pitchFamily="34" charset="-122"/>
+                <a:cs typeface="Arial" panose="020B0604020202020204" pitchFamily="34" charset="-120"/>
+              </a:rPr>
+              <a:t>国内外研究现状</a:t>
+            </a:r>
+            <a:endParaRPr lang="en-US" sz="2000" dirty="0"/>
+          </a:p>
+        </p:txBody>
+      </p:sp>
+      <p:sp>
+        <p:nvSpPr>
+          <p:cNvPr id="10" name="Shape 8"/>
+          <p:cNvSpPr/>
+          <p:nvPr/>
+        </p:nvSpPr>
+        <p:spPr>
+          <a:xfrm>
+            <a:off x="7879969" y="203200"/>
+            <a:ext cx="3987800" cy="508000"/>
+          </a:xfrm>
+          <a:prstGeom prst="rect">
+            <a:avLst/>
+          </a:prstGeom>
+          <a:noFill/>
+        </p:spPr>
+      </p:sp>
+      <p:sp>
+        <p:nvSpPr>
+          <p:cNvPr id="11" name="Text 9"/>
+          <p:cNvSpPr/>
+          <p:nvPr/>
+        </p:nvSpPr>
+        <p:spPr>
+          <a:xfrm>
+            <a:off x="7758049" y="142240"/>
+            <a:ext cx="4231640" cy="629920"/>
+          </a:xfrm>
+          <a:prstGeom prst="rect">
+            <a:avLst/>
+          </a:prstGeom>
+          <a:noFill/>
+        </p:spPr>
+        <p:txBody>
+          <a:bodyPr wrap="none" lIns="0" tIns="0" rIns="0" bIns="0" rtlCol="0" anchor="ctr"/>
+          <a:lstStyle/>
+          <a:p>
+            <a:pPr algn="ctr">
+              <a:lnSpc>
+                <a:spcPct val="120000"/>
+              </a:lnSpc>
+            </a:pPr>
+            <a:r>
+              <a:rPr lang="en-US" sz="2000" dirty="0">
+                <a:solidFill>
+                  <a:srgbClr val="333333"/>
+                </a:solidFill>
+                <a:latin typeface="Arial" panose="020B0604020202020204" pitchFamily="34" charset="0"/>
+                <a:ea typeface="Arial" panose="020B0604020202020204" pitchFamily="34" charset="-122"/>
+                <a:cs typeface="Arial" panose="020B0604020202020204" pitchFamily="34" charset="-120"/>
+              </a:rPr>
+              <a:t>主要研究内容及预期目标</a:t>
+            </a:r>
+            <a:endParaRPr lang="en-US" sz="2000" dirty="0"/>
+          </a:p>
+        </p:txBody>
+      </p:sp>
+      <p:sp>
+        <p:nvSpPr>
+          <p:cNvPr id="12" name="Shape 10"/>
+          <p:cNvSpPr/>
+          <p:nvPr/>
+        </p:nvSpPr>
+        <p:spPr>
+          <a:xfrm>
+            <a:off x="12034520" y="203200"/>
+            <a:ext cx="4157980" cy="508000"/>
+          </a:xfrm>
+          <a:prstGeom prst="rect">
+            <a:avLst/>
+          </a:prstGeom>
+          <a:noFill/>
+        </p:spPr>
+      </p:sp>
+      <p:sp>
+        <p:nvSpPr>
+          <p:cNvPr id="13" name="Text 11"/>
+          <p:cNvSpPr/>
+          <p:nvPr/>
+        </p:nvSpPr>
+        <p:spPr>
+          <a:xfrm>
+            <a:off x="11912600" y="142240"/>
+            <a:ext cx="4401820" cy="629920"/>
+          </a:xfrm>
+          <a:prstGeom prst="rect">
+            <a:avLst/>
+          </a:prstGeom>
+          <a:noFill/>
+        </p:spPr>
+        <p:txBody>
+          <a:bodyPr wrap="none" lIns="0" tIns="0" rIns="0" bIns="0" rtlCol="0" anchor="ctr"/>
+          <a:lstStyle/>
+          <a:p>
+            <a:pPr algn="ctr">
+              <a:lnSpc>
+                <a:spcPct val="120000"/>
+              </a:lnSpc>
+            </a:pPr>
+            <a:r>
+              <a:rPr lang="en-US" sz="2000" dirty="0">
+                <a:solidFill>
+                  <a:srgbClr val="333333"/>
+                </a:solidFill>
+                <a:latin typeface="Arial" panose="020B0604020202020204" pitchFamily="34" charset="0"/>
+                <a:ea typeface="Arial" panose="020B0604020202020204" pitchFamily="34" charset="-122"/>
+                <a:cs typeface="Arial" panose="020B0604020202020204" pitchFamily="34" charset="-120"/>
+              </a:rPr>
+              <a:t>工作计划与进度安排</a:t>
+            </a:r>
+            <a:endParaRPr lang="en-US" sz="2000" dirty="0"/>
+          </a:p>
+        </p:txBody>
+      </p:sp>
+      <p:pic>
+        <p:nvPicPr>
+          <p:cNvPr id="14" name="Image 0" descr="https://kimi-img.moonshot.cn/pub/slides/okc/flfuysioo4gzm/mnt/agents/output/new_pptd/images/image_2.jpg"/>
+          <p:cNvPicPr>
+            <a:picLocks noChangeAspect="1"/>
+          </p:cNvPicPr>
+          <p:nvPr/>
+        </p:nvPicPr>
+        <p:blipFill>
+          <a:blip r:embed="rId1"/>
+          <a:srcRect l="5060" r="29000"/>
+          <a:stretch>
+            <a:fillRect/>
+          </a:stretch>
+        </p:blipFill>
+        <p:spPr>
+          <a:xfrm>
+            <a:off x="544449" y="140589"/>
+            <a:ext cx="1273429" cy="745871"/>
+          </a:xfrm>
+          <a:prstGeom prst="rect">
+            <a:avLst/>
+          </a:prstGeom>
+        </p:spPr>
+      </p:pic>
+      <p:sp>
+        <p:nvSpPr>
+          <p:cNvPr id="15" name="Shape 12"/>
+          <p:cNvSpPr/>
+          <p:nvPr/>
+        </p:nvSpPr>
+        <p:spPr>
+          <a:xfrm rot="10800000">
+            <a:off x="6379591" y="961771"/>
+            <a:ext cx="389509" cy="304800"/>
+          </a:xfrm>
+          <a:prstGeom prst="triangle">
+            <a:avLst>
+              <a:gd name="adj" fmla="val 50000"/>
+            </a:avLst>
+          </a:prstGeom>
+          <a:solidFill>
+            <a:srgbClr val="04579A"/>
+          </a:solidFill>
+        </p:spPr>
+      </p:sp>
+      <p:sp>
+        <p:nvSpPr>
+          <p:cNvPr id="16" name="Shape 13"/>
+          <p:cNvSpPr/>
+          <p:nvPr/>
+        </p:nvSpPr>
+        <p:spPr>
+          <a:xfrm>
+            <a:off x="762000" y="1333500"/>
+            <a:ext cx="11430000" cy="533400"/>
+          </a:xfrm>
+          <a:prstGeom prst="rect">
+            <a:avLst/>
+          </a:prstGeom>
+          <a:noFill/>
+        </p:spPr>
+      </p:sp>
+      <p:sp>
+        <p:nvSpPr>
+          <p:cNvPr id="17" name="Text 14"/>
+          <p:cNvSpPr/>
+          <p:nvPr/>
+        </p:nvSpPr>
+        <p:spPr>
+          <a:xfrm>
+            <a:off x="640080" y="1272540"/>
+            <a:ext cx="11673840" cy="655320"/>
+          </a:xfrm>
+          <a:prstGeom prst="rect">
+            <a:avLst/>
+          </a:prstGeom>
+          <a:noFill/>
+        </p:spPr>
+        <p:txBody>
+          <a:bodyPr wrap="none" lIns="0" tIns="0" rIns="0" bIns="0" rtlCol="0" anchor="ctr"/>
+          <a:lstStyle/>
+          <a:p>
+            <a:pPr algn="l">
+              <a:lnSpc>
+                <a:spcPct val="120000"/>
+              </a:lnSpc>
+            </a:pPr>
+            <a:r>
+              <a:rPr lang="en-US" sz="2800" b="1" dirty="0">
+                <a:solidFill>
+                  <a:srgbClr val="04579A"/>
+                </a:solidFill>
+                <a:latin typeface="Arial" panose="020B0604020202020204" pitchFamily="34" charset="0"/>
+                <a:ea typeface="Arial" panose="020B0604020202020204" pitchFamily="34" charset="-122"/>
+                <a:cs typeface="Arial" panose="020B0604020202020204" pitchFamily="34" charset="-120"/>
+              </a:rPr>
+              <a:t>传统授权协议研究现状</a:t>
+            </a:r>
+            <a:endParaRPr lang="en-US" sz="2800" dirty="0"/>
+          </a:p>
+        </p:txBody>
+      </p:sp>
+      <p:sp>
+        <p:nvSpPr>
+          <p:cNvPr id="18" name="Shape 15"/>
+          <p:cNvSpPr/>
+          <p:nvPr>
+            <p:custDataLst>
+              <p:tags r:id="rId2"/>
+            </p:custDataLst>
+          </p:nvPr>
+        </p:nvSpPr>
+        <p:spPr>
+          <a:xfrm>
+            <a:off x="1397000" y="2032000"/>
+            <a:ext cx="38100" cy="6413500"/>
+          </a:xfrm>
+          <a:prstGeom prst="rect">
+            <a:avLst/>
+          </a:prstGeom>
+          <a:solidFill>
+            <a:srgbClr val="04579A"/>
+          </a:solidFill>
+        </p:spPr>
+      </p:sp>
+      <p:sp>
+        <p:nvSpPr>
+          <p:cNvPr id="19" name="Shape 16"/>
+          <p:cNvSpPr/>
+          <p:nvPr>
+            <p:custDataLst>
+              <p:tags r:id="rId3"/>
+            </p:custDataLst>
+          </p:nvPr>
+        </p:nvSpPr>
+        <p:spPr>
+          <a:xfrm>
+            <a:off x="1282700" y="2095500"/>
+            <a:ext cx="266700" cy="266700"/>
+          </a:xfrm>
+          <a:prstGeom prst="ellipse">
+            <a:avLst/>
+          </a:prstGeom>
+          <a:solidFill>
+            <a:srgbClr val="04579A"/>
+          </a:solidFill>
+        </p:spPr>
+      </p:sp>
+      <p:sp>
+        <p:nvSpPr>
+          <p:cNvPr id="20" name="Shape 17"/>
+          <p:cNvSpPr/>
+          <p:nvPr/>
+        </p:nvSpPr>
+        <p:spPr>
+          <a:xfrm>
+            <a:off x="508000" y="2070100"/>
+            <a:ext cx="736600" cy="304800"/>
+          </a:xfrm>
+          <a:prstGeom prst="rect">
+            <a:avLst/>
+          </a:prstGeom>
+          <a:noFill/>
+        </p:spPr>
+      </p:sp>
+      <p:sp>
+        <p:nvSpPr>
+          <p:cNvPr id="21" name="Text 18"/>
+          <p:cNvSpPr/>
+          <p:nvPr>
+            <p:custDataLst>
+              <p:tags r:id="rId4"/>
+            </p:custDataLst>
+          </p:nvPr>
+        </p:nvSpPr>
+        <p:spPr>
+          <a:xfrm>
+            <a:off x="259080" y="2009140"/>
+            <a:ext cx="980440" cy="426720"/>
+          </a:xfrm>
+          <a:prstGeom prst="rect">
+            <a:avLst/>
+          </a:prstGeom>
+          <a:noFill/>
+        </p:spPr>
+        <p:txBody>
+          <a:bodyPr wrap="none" lIns="0" tIns="0" rIns="0" bIns="0" rtlCol="0" anchor="ctr"/>
+          <a:lstStyle/>
+          <a:p>
+            <a:pPr algn="r">
+              <a:lnSpc>
+                <a:spcPct val="120000"/>
+              </a:lnSpc>
+            </a:pPr>
+            <a:r>
+              <a:rPr lang="en-US" sz="1400" b="1" dirty="0">
+                <a:solidFill>
+                  <a:srgbClr val="04579A"/>
+                </a:solidFill>
+                <a:latin typeface="Arial" panose="020B0604020202020204" pitchFamily="34" charset="0"/>
+                <a:ea typeface="Arial" panose="020B0604020202020204" pitchFamily="34" charset="-122"/>
+                <a:cs typeface="Arial" panose="020B0604020202020204" pitchFamily="34" charset="-120"/>
+              </a:rPr>
+              <a:t>1970s</a:t>
+            </a:r>
+            <a:endParaRPr lang="en-US" sz="1400" dirty="0"/>
+          </a:p>
+        </p:txBody>
+      </p:sp>
+      <p:sp>
+        <p:nvSpPr>
+          <p:cNvPr id="22" name="Shape 19"/>
+          <p:cNvSpPr/>
+          <p:nvPr/>
+        </p:nvSpPr>
+        <p:spPr>
+          <a:xfrm>
+            <a:off x="1714500" y="2032000"/>
+            <a:ext cx="6858000" cy="787400"/>
+          </a:xfrm>
+          <a:prstGeom prst="rect">
+            <a:avLst/>
+          </a:prstGeom>
+          <a:noFill/>
+        </p:spPr>
+      </p:sp>
+      <p:sp>
+        <p:nvSpPr>
+          <p:cNvPr id="23" name="Text 20"/>
+          <p:cNvSpPr/>
+          <p:nvPr>
+            <p:custDataLst>
+              <p:tags r:id="rId5"/>
+            </p:custDataLst>
+          </p:nvPr>
+        </p:nvSpPr>
+        <p:spPr>
+          <a:xfrm>
+            <a:off x="1592580" y="1971040"/>
+            <a:ext cx="7101840" cy="909320"/>
+          </a:xfrm>
+          <a:prstGeom prst="rect">
+            <a:avLst/>
+          </a:prstGeom>
+          <a:noFill/>
+        </p:spPr>
+        <p:txBody>
+          <a:bodyPr wrap="square" lIns="0" tIns="0" rIns="0" bIns="0" rtlCol="0" anchor="t"/>
+          <a:lstStyle/>
+          <a:p>
+            <a:pPr algn="l">
+              <a:lnSpc>
+                <a:spcPct val="150000"/>
+              </a:lnSpc>
+            </a:pPr>
+            <a:r>
+              <a:rPr lang="en-US" sz="1600" b="1" dirty="0">
+                <a:solidFill>
+                  <a:srgbClr val="333333"/>
+                </a:solidFill>
+                <a:latin typeface="Arial" panose="020B0604020202020204" pitchFamily="34" charset="0"/>
+                <a:ea typeface="Arial" panose="020B0604020202020204" pitchFamily="34" charset="-122"/>
+                <a:cs typeface="Arial" panose="020B0604020202020204" pitchFamily="34" charset="-120"/>
+              </a:rPr>
+              <a:t>BLP [4] / Biba [5]</a:t>
+            </a:r>
+            <a:r>
+              <a:rPr lang="en-US" sz="1600" dirty="0">
+                <a:solidFill>
+                  <a:srgbClr val="333333"/>
+                </a:solidFill>
+                <a:latin typeface="Arial" panose="020B0604020202020204" pitchFamily="34" charset="0"/>
+                <a:ea typeface="Arial" panose="020B0604020202020204" pitchFamily="34" charset="-122"/>
+                <a:cs typeface="Arial" panose="020B0604020202020204" pitchFamily="34" charset="-120"/>
+              </a:rPr>
+              <a:t> — Bell-LaPadula机密性模型与Biba完整性模型</a:t>
+            </a:r>
+            <a:endParaRPr lang="en-US" sz="1600" dirty="0"/>
+          </a:p>
+          <a:p>
+            <a:pPr algn="l">
+              <a:lnSpc>
+                <a:spcPct val="150000"/>
+              </a:lnSpc>
+            </a:pPr>
+            <a:r>
+              <a:rPr lang="en-US" sz="1600" dirty="0">
+                <a:solidFill>
+                  <a:srgbClr val="666666"/>
+                </a:solidFill>
+                <a:latin typeface="Arial" panose="020B0604020202020204" pitchFamily="34" charset="0"/>
+                <a:ea typeface="Arial" panose="020B0604020202020204" pitchFamily="34" charset="-122"/>
+                <a:cs typeface="Arial" panose="020B0604020202020204" pitchFamily="34" charset="-120"/>
+              </a:rPr>
+              <a:t>MAC强制访问控制双支柱</a:t>
+            </a:r>
+            <a:endParaRPr lang="en-US" sz="1600" dirty="0"/>
+          </a:p>
+        </p:txBody>
+      </p:sp>
+      <p:sp>
+        <p:nvSpPr>
+          <p:cNvPr id="24" name="Shape 21"/>
+          <p:cNvSpPr/>
+          <p:nvPr>
+            <p:custDataLst>
+              <p:tags r:id="rId6"/>
+            </p:custDataLst>
+          </p:nvPr>
+        </p:nvSpPr>
+        <p:spPr>
+          <a:xfrm>
+            <a:off x="1262380" y="3149600"/>
+            <a:ext cx="266700" cy="266700"/>
+          </a:xfrm>
+          <a:prstGeom prst="ellipse">
+            <a:avLst/>
+          </a:prstGeom>
+          <a:solidFill>
+            <a:srgbClr val="04579A"/>
+          </a:solidFill>
+        </p:spPr>
+      </p:sp>
+      <p:sp>
+        <p:nvSpPr>
+          <p:cNvPr id="25" name="Shape 22"/>
+          <p:cNvSpPr/>
+          <p:nvPr/>
+        </p:nvSpPr>
+        <p:spPr>
+          <a:xfrm>
+            <a:off x="441960" y="3124200"/>
+            <a:ext cx="635000" cy="304800"/>
+          </a:xfrm>
+          <a:prstGeom prst="rect">
+            <a:avLst/>
+          </a:prstGeom>
+          <a:noFill/>
+        </p:spPr>
+      </p:sp>
+      <p:sp>
+        <p:nvSpPr>
+          <p:cNvPr id="26" name="Text 23"/>
+          <p:cNvSpPr/>
+          <p:nvPr>
+            <p:custDataLst>
+              <p:tags r:id="rId7"/>
+            </p:custDataLst>
+          </p:nvPr>
+        </p:nvSpPr>
+        <p:spPr>
+          <a:xfrm>
+            <a:off x="320040" y="3063240"/>
+            <a:ext cx="878840" cy="426720"/>
+          </a:xfrm>
+          <a:prstGeom prst="rect">
+            <a:avLst/>
+          </a:prstGeom>
+          <a:noFill/>
+        </p:spPr>
+        <p:txBody>
+          <a:bodyPr wrap="none" lIns="0" tIns="0" rIns="0" bIns="0" rtlCol="0" anchor="ctr"/>
+          <a:lstStyle/>
+          <a:p>
+            <a:pPr algn="r">
+              <a:lnSpc>
+                <a:spcPct val="120000"/>
+              </a:lnSpc>
+            </a:pPr>
+            <a:r>
+              <a:rPr lang="en-US" sz="1400" b="1" dirty="0">
+                <a:solidFill>
+                  <a:srgbClr val="04579A"/>
+                </a:solidFill>
+                <a:latin typeface="Arial" panose="020B0604020202020204" pitchFamily="34" charset="0"/>
+                <a:ea typeface="Arial" panose="020B0604020202020204" pitchFamily="34" charset="-122"/>
+                <a:cs typeface="Arial" panose="020B0604020202020204" pitchFamily="34" charset="-120"/>
+              </a:rPr>
+              <a:t>1996</a:t>
+            </a:r>
+            <a:endParaRPr lang="en-US" sz="1400" dirty="0"/>
+          </a:p>
+        </p:txBody>
+      </p:sp>
+      <p:sp>
+        <p:nvSpPr>
+          <p:cNvPr id="27" name="Shape 24"/>
+          <p:cNvSpPr/>
+          <p:nvPr/>
+        </p:nvSpPr>
+        <p:spPr>
+          <a:xfrm>
+            <a:off x="1732280" y="3098800"/>
+            <a:ext cx="6858000" cy="787400"/>
+          </a:xfrm>
+          <a:prstGeom prst="rect">
+            <a:avLst/>
+          </a:prstGeom>
+          <a:noFill/>
+        </p:spPr>
+      </p:sp>
+      <p:sp>
+        <p:nvSpPr>
+          <p:cNvPr id="28" name="Text 25"/>
+          <p:cNvSpPr/>
+          <p:nvPr>
+            <p:custDataLst>
+              <p:tags r:id="rId8"/>
+            </p:custDataLst>
+          </p:nvPr>
+        </p:nvSpPr>
+        <p:spPr>
+          <a:xfrm>
+            <a:off x="1610360" y="3037840"/>
+            <a:ext cx="7101840" cy="909320"/>
+          </a:xfrm>
+          <a:prstGeom prst="rect">
+            <a:avLst/>
+          </a:prstGeom>
+          <a:noFill/>
+        </p:spPr>
+        <p:txBody>
+          <a:bodyPr wrap="square" lIns="0" tIns="0" rIns="0" bIns="0" rtlCol="0" anchor="t"/>
+          <a:lstStyle/>
+          <a:p>
+            <a:pPr algn="l">
+              <a:lnSpc>
+                <a:spcPct val="150000"/>
+              </a:lnSpc>
+            </a:pPr>
+            <a:r>
+              <a:rPr lang="en-US" sz="1600" b="1" dirty="0">
+                <a:solidFill>
+                  <a:srgbClr val="333333"/>
+                </a:solidFill>
+                <a:latin typeface="Arial" panose="020B0604020202020204" pitchFamily="34" charset="0"/>
+                <a:ea typeface="Arial" panose="020B0604020202020204" pitchFamily="34" charset="-122"/>
+                <a:cs typeface="Arial" panose="020B0604020202020204" pitchFamily="34" charset="-120"/>
+              </a:rPr>
+              <a:t>RBAC [9] / NIST RBAC [10]</a:t>
+            </a:r>
+            <a:r>
+              <a:rPr lang="en-US" sz="1600" dirty="0">
+                <a:solidFill>
+                  <a:srgbClr val="333333"/>
+                </a:solidFill>
+                <a:latin typeface="Arial" panose="020B0604020202020204" pitchFamily="34" charset="0"/>
+                <a:ea typeface="Arial" panose="020B0604020202020204" pitchFamily="34" charset="-122"/>
+                <a:cs typeface="Arial" panose="020B0604020202020204" pitchFamily="34" charset="-120"/>
+              </a:rPr>
+              <a:t> — Sandhu角色访问控制模型</a:t>
+            </a:r>
+            <a:endParaRPr lang="en-US" sz="1600" dirty="0"/>
+          </a:p>
+          <a:p>
+            <a:pPr algn="l">
+              <a:lnSpc>
+                <a:spcPct val="150000"/>
+              </a:lnSpc>
+            </a:pPr>
+            <a:r>
+              <a:rPr lang="en-US" sz="1600" dirty="0">
+                <a:solidFill>
+                  <a:srgbClr val="666666"/>
+                </a:solidFill>
+                <a:latin typeface="Arial" panose="020B0604020202020204" pitchFamily="34" charset="0"/>
+                <a:ea typeface="Arial" panose="020B0604020202020204" pitchFamily="34" charset="-122"/>
+                <a:cs typeface="Arial" panose="020B0604020202020204" pitchFamily="34" charset="-120"/>
+              </a:rPr>
+              <a:t>角色抽象简化权限管理</a:t>
+            </a:r>
+            <a:endParaRPr lang="en-US" sz="1600" dirty="0"/>
+          </a:p>
+        </p:txBody>
+      </p:sp>
+      <p:sp>
+        <p:nvSpPr>
+          <p:cNvPr id="29" name="Shape 26"/>
+          <p:cNvSpPr/>
+          <p:nvPr>
+            <p:custDataLst>
+              <p:tags r:id="rId9"/>
+            </p:custDataLst>
+          </p:nvPr>
+        </p:nvSpPr>
+        <p:spPr>
+          <a:xfrm>
+            <a:off x="1244600" y="4114800"/>
+            <a:ext cx="266700" cy="266700"/>
+          </a:xfrm>
+          <a:prstGeom prst="ellipse">
+            <a:avLst/>
+          </a:prstGeom>
+          <a:solidFill>
+            <a:srgbClr val="04579A"/>
+          </a:solidFill>
+        </p:spPr>
+      </p:sp>
+      <p:sp>
+        <p:nvSpPr>
+          <p:cNvPr id="30" name="Shape 27"/>
+          <p:cNvSpPr/>
+          <p:nvPr/>
+        </p:nvSpPr>
+        <p:spPr>
+          <a:xfrm>
+            <a:off x="604520" y="4089400"/>
+            <a:ext cx="635000" cy="304800"/>
+          </a:xfrm>
+          <a:prstGeom prst="rect">
+            <a:avLst/>
+          </a:prstGeom>
+          <a:noFill/>
+        </p:spPr>
+      </p:sp>
+      <p:sp>
+        <p:nvSpPr>
+          <p:cNvPr id="31" name="Text 28"/>
+          <p:cNvSpPr/>
+          <p:nvPr>
+            <p:custDataLst>
+              <p:tags r:id="rId10"/>
+            </p:custDataLst>
+          </p:nvPr>
+        </p:nvSpPr>
+        <p:spPr>
+          <a:xfrm>
+            <a:off x="302260" y="4028440"/>
+            <a:ext cx="878840" cy="426720"/>
+          </a:xfrm>
+          <a:prstGeom prst="rect">
+            <a:avLst/>
+          </a:prstGeom>
+          <a:noFill/>
+        </p:spPr>
+        <p:txBody>
+          <a:bodyPr wrap="none" lIns="0" tIns="0" rIns="0" bIns="0" rtlCol="0" anchor="ctr"/>
+          <a:lstStyle/>
+          <a:p>
+            <a:pPr algn="r">
+              <a:lnSpc>
+                <a:spcPct val="120000"/>
+              </a:lnSpc>
+            </a:pPr>
+            <a:r>
+              <a:rPr lang="en-US" sz="1300" b="1" dirty="0">
+                <a:solidFill>
+                  <a:srgbClr val="04579A"/>
+                </a:solidFill>
+                <a:latin typeface="Arial" panose="020B0604020202020204" pitchFamily="34" charset="0"/>
+                <a:ea typeface="Arial" panose="020B0604020202020204" pitchFamily="34" charset="-122"/>
+                <a:cs typeface="Arial" panose="020B0604020202020204" pitchFamily="34" charset="-120"/>
+              </a:rPr>
+              <a:t>2012</a:t>
+            </a:r>
+            <a:endParaRPr lang="en-US" sz="1300" dirty="0"/>
+          </a:p>
+        </p:txBody>
+      </p:sp>
+      <p:sp>
+        <p:nvSpPr>
+          <p:cNvPr id="32" name="Shape 29"/>
+          <p:cNvSpPr/>
+          <p:nvPr/>
+        </p:nvSpPr>
+        <p:spPr>
+          <a:xfrm>
+            <a:off x="1714500" y="4064000"/>
+            <a:ext cx="6858000" cy="787400"/>
+          </a:xfrm>
+          <a:prstGeom prst="rect">
+            <a:avLst/>
+          </a:prstGeom>
+          <a:noFill/>
+        </p:spPr>
+      </p:sp>
+      <p:sp>
+        <p:nvSpPr>
+          <p:cNvPr id="33" name="Text 30"/>
+          <p:cNvSpPr/>
+          <p:nvPr>
+            <p:custDataLst>
+              <p:tags r:id="rId11"/>
+            </p:custDataLst>
+          </p:nvPr>
+        </p:nvSpPr>
+        <p:spPr>
+          <a:xfrm>
+            <a:off x="1592580" y="4003040"/>
+            <a:ext cx="7101840" cy="909320"/>
+          </a:xfrm>
+          <a:prstGeom prst="rect">
+            <a:avLst/>
+          </a:prstGeom>
+          <a:noFill/>
+        </p:spPr>
+        <p:txBody>
+          <a:bodyPr wrap="square" lIns="0" tIns="0" rIns="0" bIns="0" rtlCol="0" anchor="t"/>
+          <a:lstStyle/>
+          <a:p>
+            <a:pPr algn="l">
+              <a:lnSpc>
+                <a:spcPct val="150000"/>
+              </a:lnSpc>
+            </a:pPr>
+            <a:r>
+              <a:rPr lang="en-US" sz="1600" b="1" dirty="0">
+                <a:solidFill>
+                  <a:srgbClr val="333333"/>
+                </a:solidFill>
+                <a:latin typeface="Arial" panose="020B0604020202020204" pitchFamily="34" charset="0"/>
+                <a:ea typeface="Arial" panose="020B0604020202020204" pitchFamily="34" charset="-122"/>
+                <a:cs typeface="Arial" panose="020B0604020202020204" pitchFamily="34" charset="-120"/>
+              </a:rPr>
+              <a:t>OAuth 2.0 [16]</a:t>
+            </a:r>
+            <a:r>
+              <a:rPr lang="en-US" sz="1600" dirty="0">
+                <a:solidFill>
+                  <a:srgbClr val="333333"/>
+                </a:solidFill>
+                <a:latin typeface="Arial" panose="020B0604020202020204" pitchFamily="34" charset="0"/>
+                <a:ea typeface="Arial" panose="020B0604020202020204" pitchFamily="34" charset="-122"/>
+                <a:cs typeface="Arial" panose="020B0604020202020204" pitchFamily="34" charset="-120"/>
+              </a:rPr>
+              <a:t> — Hardt, RFC 6749 委托授权框架</a:t>
+            </a:r>
+            <a:endParaRPr lang="en-US" sz="1600" dirty="0"/>
+          </a:p>
+          <a:p>
+            <a:pPr algn="l">
+              <a:lnSpc>
+                <a:spcPct val="150000"/>
+              </a:lnSpc>
+            </a:pPr>
+            <a:r>
+              <a:rPr lang="en-US" sz="1600" dirty="0">
+                <a:solidFill>
+                  <a:srgbClr val="666666"/>
+                </a:solidFill>
+                <a:latin typeface="Arial" panose="020B0604020202020204" pitchFamily="34" charset="0"/>
+                <a:ea typeface="Arial" panose="020B0604020202020204" pitchFamily="34" charset="-122"/>
+                <a:cs typeface="Arial" panose="020B0604020202020204" pitchFamily="34" charset="-120"/>
+              </a:rPr>
+              <a:t>Bearer Token粗粒度静态权限，泄露后全权限滥用，违背最小权限原则</a:t>
+            </a:r>
+            <a:endParaRPr lang="en-US" sz="1600" dirty="0"/>
+          </a:p>
+        </p:txBody>
+      </p:sp>
+      <p:sp>
+        <p:nvSpPr>
+          <p:cNvPr id="34" name="Shape 31"/>
+          <p:cNvSpPr/>
+          <p:nvPr>
+            <p:custDataLst>
+              <p:tags r:id="rId12"/>
+            </p:custDataLst>
+          </p:nvPr>
+        </p:nvSpPr>
+        <p:spPr>
+          <a:xfrm>
+            <a:off x="1244600" y="5187315"/>
+            <a:ext cx="266700" cy="266700"/>
+          </a:xfrm>
+          <a:prstGeom prst="ellipse">
+            <a:avLst/>
+          </a:prstGeom>
+          <a:solidFill>
+            <a:srgbClr val="04579A"/>
+          </a:solidFill>
+        </p:spPr>
+      </p:sp>
+      <p:sp>
+        <p:nvSpPr>
+          <p:cNvPr id="35" name="Shape 32"/>
+          <p:cNvSpPr/>
+          <p:nvPr/>
+        </p:nvSpPr>
+        <p:spPr>
+          <a:xfrm>
+            <a:off x="360680" y="5161915"/>
+            <a:ext cx="698500" cy="304800"/>
+          </a:xfrm>
+          <a:prstGeom prst="rect">
+            <a:avLst/>
+          </a:prstGeom>
+          <a:noFill/>
+        </p:spPr>
+      </p:sp>
+      <p:sp>
+        <p:nvSpPr>
+          <p:cNvPr id="36" name="Text 33"/>
+          <p:cNvSpPr/>
+          <p:nvPr>
+            <p:custDataLst>
+              <p:tags r:id="rId13"/>
+            </p:custDataLst>
+          </p:nvPr>
+        </p:nvSpPr>
+        <p:spPr>
+          <a:xfrm>
+            <a:off x="360680" y="5100955"/>
+            <a:ext cx="838200" cy="426720"/>
+          </a:xfrm>
+          <a:prstGeom prst="rect">
+            <a:avLst/>
+          </a:prstGeom>
+          <a:noFill/>
+        </p:spPr>
+        <p:txBody>
+          <a:bodyPr wrap="none" lIns="0" tIns="0" rIns="0" bIns="0" rtlCol="0" anchor="ctr"/>
+          <a:lstStyle/>
+          <a:p>
+            <a:pPr algn="r">
+              <a:lnSpc>
+                <a:spcPct val="120000"/>
+              </a:lnSpc>
+            </a:pPr>
+            <a:r>
+              <a:rPr lang="en-US" sz="1300" b="1" dirty="0">
+                <a:solidFill>
+                  <a:srgbClr val="04579A"/>
+                </a:solidFill>
+                <a:latin typeface="Arial" panose="020B0604020202020204" pitchFamily="34" charset="0"/>
+                <a:ea typeface="Arial" panose="020B0604020202020204" pitchFamily="34" charset="-122"/>
+                <a:cs typeface="Arial" panose="020B0604020202020204" pitchFamily="34" charset="-120"/>
+              </a:rPr>
+              <a:t>2014</a:t>
+            </a:r>
+            <a:endParaRPr lang="en-US" sz="1300" dirty="0"/>
+          </a:p>
+        </p:txBody>
+      </p:sp>
+      <p:sp>
+        <p:nvSpPr>
+          <p:cNvPr id="37" name="Shape 34"/>
+          <p:cNvSpPr/>
+          <p:nvPr/>
+        </p:nvSpPr>
+        <p:spPr>
+          <a:xfrm>
+            <a:off x="1714500" y="5136515"/>
+            <a:ext cx="6858000" cy="787400"/>
+          </a:xfrm>
+          <a:prstGeom prst="rect">
+            <a:avLst/>
+          </a:prstGeom>
+          <a:noFill/>
+        </p:spPr>
+      </p:sp>
+      <p:sp>
+        <p:nvSpPr>
+          <p:cNvPr id="38" name="Text 35"/>
+          <p:cNvSpPr/>
+          <p:nvPr>
+            <p:custDataLst>
+              <p:tags r:id="rId14"/>
+            </p:custDataLst>
+          </p:nvPr>
+        </p:nvSpPr>
+        <p:spPr>
+          <a:xfrm>
+            <a:off x="1592580" y="5075555"/>
+            <a:ext cx="7101840" cy="909320"/>
+          </a:xfrm>
+          <a:prstGeom prst="rect">
+            <a:avLst/>
+          </a:prstGeom>
+          <a:noFill/>
+        </p:spPr>
+        <p:txBody>
+          <a:bodyPr wrap="square" lIns="0" tIns="0" rIns="0" bIns="0" rtlCol="0" anchor="t"/>
+          <a:lstStyle/>
+          <a:p>
+            <a:pPr algn="l">
+              <a:lnSpc>
+                <a:spcPct val="150000"/>
+              </a:lnSpc>
+            </a:pPr>
+            <a:r>
+              <a:rPr lang="en-US" sz="1600" b="1" dirty="0">
+                <a:solidFill>
+                  <a:srgbClr val="333333"/>
+                </a:solidFill>
+                <a:latin typeface="Arial" panose="020B0604020202020204" pitchFamily="34" charset="0"/>
+                <a:ea typeface="Arial" panose="020B0604020202020204" pitchFamily="34" charset="-122"/>
+                <a:cs typeface="Arial" panose="020B0604020202020204" pitchFamily="34" charset="-120"/>
+              </a:rPr>
+              <a:t>Macaroons [31]</a:t>
+            </a:r>
+            <a:r>
+              <a:rPr lang="en-US" sz="1600" dirty="0">
+                <a:solidFill>
+                  <a:srgbClr val="333333"/>
+                </a:solidFill>
+                <a:latin typeface="Arial" panose="020B0604020202020204" pitchFamily="34" charset="0"/>
+                <a:ea typeface="Arial" panose="020B0604020202020204" pitchFamily="34" charset="-122"/>
+                <a:cs typeface="Arial" panose="020B0604020202020204" pitchFamily="34" charset="-120"/>
+              </a:rPr>
+              <a:t> — Birgisson等, NDSS</a:t>
+            </a:r>
+            <a:endParaRPr lang="en-US" sz="1600" dirty="0"/>
+          </a:p>
+          <a:p>
+            <a:pPr algn="l">
+              <a:lnSpc>
+                <a:spcPct val="150000"/>
+              </a:lnSpc>
+            </a:pPr>
+            <a:r>
+              <a:rPr lang="en-US" sz="1600" dirty="0">
+                <a:solidFill>
+                  <a:srgbClr val="666666"/>
+                </a:solidFill>
+                <a:latin typeface="Arial" panose="020B0604020202020204" pitchFamily="34" charset="0"/>
+                <a:ea typeface="Arial" panose="020B0604020202020204" pitchFamily="34" charset="-122"/>
+                <a:cs typeface="Arial" panose="020B0604020202020204" pitchFamily="34" charset="-120"/>
+              </a:rPr>
+              <a:t>嵌套HMAC链实现权限单调衰减与第三方约束，但未解决跨域互操作</a:t>
+            </a:r>
+            <a:r>
+              <a:rPr lang="zh-CN" altLang="en-US" sz="1600" dirty="0">
+                <a:solidFill>
+                  <a:srgbClr val="666666"/>
+                </a:solidFill>
+                <a:latin typeface="Arial" panose="020B0604020202020204" pitchFamily="34" charset="0"/>
+                <a:ea typeface="宋体" panose="02010600030101010101" pitchFamily="2" charset="-122"/>
+                <a:cs typeface="Arial" panose="020B0604020202020204" pitchFamily="34" charset="-120"/>
+              </a:rPr>
+              <a:t>，尽管涉及添加第三方约束，但只能</a:t>
+            </a:r>
+            <a:r>
+              <a:rPr lang="zh-CN" altLang="en-US" sz="1600" dirty="0">
+                <a:solidFill>
+                  <a:srgbClr val="666666"/>
+                </a:solidFill>
+                <a:latin typeface="Arial" panose="020B0604020202020204" pitchFamily="34" charset="0"/>
+                <a:ea typeface="宋体" panose="02010600030101010101" pitchFamily="2" charset="-122"/>
+                <a:cs typeface="Arial" panose="020B0604020202020204" pitchFamily="34" charset="-120"/>
+              </a:rPr>
+              <a:t>添加类似时间、</a:t>
+            </a:r>
+            <a:r>
+              <a:rPr lang="en-US" altLang="zh-CN" sz="1600" dirty="0">
+                <a:solidFill>
+                  <a:srgbClr val="666666"/>
+                </a:solidFill>
+                <a:latin typeface="Arial" panose="020B0604020202020204" pitchFamily="34" charset="0"/>
+                <a:ea typeface="宋体" panose="02010600030101010101" pitchFamily="2" charset="-122"/>
+                <a:cs typeface="Arial" panose="020B0604020202020204" pitchFamily="34" charset="-120"/>
+              </a:rPr>
+              <a:t>IP</a:t>
+            </a:r>
+            <a:r>
+              <a:rPr lang="zh-CN" altLang="en-US" sz="1600" dirty="0">
+                <a:solidFill>
+                  <a:srgbClr val="666666"/>
+                </a:solidFill>
+                <a:latin typeface="Arial" panose="020B0604020202020204" pitchFamily="34" charset="0"/>
+                <a:ea typeface="宋体" panose="02010600030101010101" pitchFamily="2" charset="-122"/>
+                <a:cs typeface="Arial" panose="020B0604020202020204" pitchFamily="34" charset="-120"/>
+              </a:rPr>
+              <a:t>这些静态</a:t>
+            </a:r>
+            <a:r>
+              <a:rPr lang="zh-CN" altLang="en-US" sz="1600" dirty="0">
+                <a:solidFill>
+                  <a:srgbClr val="666666"/>
+                </a:solidFill>
+                <a:latin typeface="Arial" panose="020B0604020202020204" pitchFamily="34" charset="0"/>
+                <a:ea typeface="宋体" panose="02010600030101010101" pitchFamily="2" charset="-122"/>
+                <a:cs typeface="Arial" panose="020B0604020202020204" pitchFamily="34" charset="-120"/>
+              </a:rPr>
+              <a:t>约束</a:t>
+            </a:r>
+            <a:endParaRPr lang="zh-CN" altLang="en-US" sz="1600" dirty="0">
+              <a:solidFill>
+                <a:srgbClr val="666666"/>
+              </a:solidFill>
+              <a:latin typeface="Arial" panose="020B0604020202020204" pitchFamily="34" charset="0"/>
+              <a:ea typeface="宋体" panose="02010600030101010101" pitchFamily="2" charset="-122"/>
+              <a:cs typeface="Arial" panose="020B0604020202020204" pitchFamily="34" charset="-120"/>
+            </a:endParaRPr>
+          </a:p>
+        </p:txBody>
+      </p:sp>
+      <p:sp>
+        <p:nvSpPr>
+          <p:cNvPr id="39" name="Shape 36"/>
+          <p:cNvSpPr/>
+          <p:nvPr>
+            <p:custDataLst>
+              <p:tags r:id="rId15"/>
+            </p:custDataLst>
+          </p:nvPr>
+        </p:nvSpPr>
+        <p:spPr>
+          <a:xfrm>
+            <a:off x="1282700" y="6305550"/>
+            <a:ext cx="266700" cy="266700"/>
+          </a:xfrm>
+          <a:prstGeom prst="ellipse">
+            <a:avLst/>
+          </a:prstGeom>
+          <a:solidFill>
+            <a:srgbClr val="04579A"/>
+          </a:solidFill>
+        </p:spPr>
+      </p:sp>
+      <p:sp>
+        <p:nvSpPr>
+          <p:cNvPr id="40" name="Shape 37"/>
+          <p:cNvSpPr/>
+          <p:nvPr/>
+        </p:nvSpPr>
+        <p:spPr>
+          <a:xfrm>
+            <a:off x="302260" y="6045835"/>
+            <a:ext cx="635000" cy="304800"/>
+          </a:xfrm>
+          <a:prstGeom prst="rect">
+            <a:avLst/>
+          </a:prstGeom>
+          <a:noFill/>
+        </p:spPr>
+      </p:sp>
+      <p:sp>
+        <p:nvSpPr>
+          <p:cNvPr id="41" name="Text 38"/>
+          <p:cNvSpPr/>
+          <p:nvPr>
+            <p:custDataLst>
+              <p:tags r:id="rId16"/>
+            </p:custDataLst>
+          </p:nvPr>
+        </p:nvSpPr>
+        <p:spPr>
+          <a:xfrm>
+            <a:off x="320040" y="6242050"/>
+            <a:ext cx="878840" cy="426720"/>
+          </a:xfrm>
+          <a:prstGeom prst="rect">
+            <a:avLst/>
+          </a:prstGeom>
+          <a:noFill/>
+        </p:spPr>
+        <p:txBody>
+          <a:bodyPr wrap="none" lIns="0" tIns="0" rIns="0" bIns="0" rtlCol="0" anchor="ctr"/>
+          <a:lstStyle/>
+          <a:p>
+            <a:pPr algn="r">
+              <a:lnSpc>
+                <a:spcPct val="120000"/>
+              </a:lnSpc>
+            </a:pPr>
+            <a:r>
+              <a:rPr lang="en-US" sz="1300" b="1" dirty="0">
+                <a:solidFill>
+                  <a:srgbClr val="04579A"/>
+                </a:solidFill>
+                <a:latin typeface="Arial" panose="020B0604020202020204" pitchFamily="34" charset="0"/>
+                <a:ea typeface="Arial" panose="020B0604020202020204" pitchFamily="34" charset="-122"/>
+                <a:cs typeface="Arial" panose="020B0604020202020204" pitchFamily="34" charset="-120"/>
+              </a:rPr>
+              <a:t>2019</a:t>
+            </a:r>
+            <a:endParaRPr lang="en-US" sz="1300" dirty="0"/>
+          </a:p>
+        </p:txBody>
+      </p:sp>
+      <p:sp>
+        <p:nvSpPr>
+          <p:cNvPr id="42" name="Shape 39"/>
+          <p:cNvSpPr/>
+          <p:nvPr/>
+        </p:nvSpPr>
+        <p:spPr>
+          <a:xfrm>
+            <a:off x="1714500" y="6242050"/>
+            <a:ext cx="6858000" cy="787400"/>
+          </a:xfrm>
+          <a:prstGeom prst="rect">
+            <a:avLst/>
+          </a:prstGeom>
+          <a:noFill/>
+        </p:spPr>
+      </p:sp>
+      <p:sp>
+        <p:nvSpPr>
+          <p:cNvPr id="43" name="Text 40"/>
+          <p:cNvSpPr/>
+          <p:nvPr>
+            <p:custDataLst>
+              <p:tags r:id="rId17"/>
+            </p:custDataLst>
+          </p:nvPr>
+        </p:nvSpPr>
+        <p:spPr>
+          <a:xfrm>
+            <a:off x="1592580" y="6181090"/>
+            <a:ext cx="7101840" cy="909320"/>
+          </a:xfrm>
+          <a:prstGeom prst="rect">
+            <a:avLst/>
+          </a:prstGeom>
+          <a:noFill/>
+        </p:spPr>
+        <p:txBody>
+          <a:bodyPr wrap="square" lIns="0" tIns="0" rIns="0" bIns="0" rtlCol="0" anchor="t"/>
+          <a:lstStyle/>
+          <a:p>
+            <a:pPr algn="l">
+              <a:lnSpc>
+                <a:spcPct val="150000"/>
+              </a:lnSpc>
+            </a:pPr>
+            <a:r>
+              <a:rPr lang="en-US" sz="1600" b="1" dirty="0">
+                <a:solidFill>
+                  <a:srgbClr val="333333"/>
+                </a:solidFill>
+                <a:latin typeface="Arial" panose="020B0604020202020204" pitchFamily="34" charset="0"/>
+                <a:ea typeface="Arial" panose="020B0604020202020204" pitchFamily="34" charset="-122"/>
+                <a:cs typeface="Arial" panose="020B0604020202020204" pitchFamily="34" charset="-120"/>
+              </a:rPr>
+              <a:t>WAVE [32]</a:t>
+            </a:r>
+            <a:r>
+              <a:rPr lang="en-US" sz="1600" dirty="0">
+                <a:solidFill>
+                  <a:srgbClr val="333333"/>
+                </a:solidFill>
+                <a:latin typeface="Arial" panose="020B0604020202020204" pitchFamily="34" charset="0"/>
+                <a:ea typeface="Arial" panose="020B0604020202020204" pitchFamily="34" charset="-122"/>
+                <a:cs typeface="Arial" panose="020B0604020202020204" pitchFamily="34" charset="-120"/>
+              </a:rPr>
+              <a:t> — Andersen等, 去中心化授权框架</a:t>
+            </a:r>
+            <a:endParaRPr lang="en-US" sz="1600" dirty="0"/>
+          </a:p>
+          <a:p>
+            <a:pPr algn="l">
+              <a:lnSpc>
+                <a:spcPct val="150000"/>
+              </a:lnSpc>
+            </a:pPr>
+            <a:r>
+              <a:rPr lang="en-US" sz="1600" dirty="0">
+                <a:solidFill>
+                  <a:srgbClr val="666666"/>
+                </a:solidFill>
+                <a:latin typeface="Arial" panose="020B0604020202020204" pitchFamily="34" charset="0"/>
+                <a:ea typeface="Arial" panose="020B0604020202020204" pitchFamily="34" charset="-122"/>
+                <a:cs typeface="Arial" panose="020B0604020202020204" pitchFamily="34" charset="-120"/>
+              </a:rPr>
+              <a:t>传递性委托+Attestation链，但缺乏历史状态与动态上下文表达</a:t>
+            </a:r>
+            <a:endParaRPr lang="en-US" sz="1600" dirty="0"/>
+          </a:p>
+        </p:txBody>
+      </p:sp>
+      <p:sp>
+        <p:nvSpPr>
+          <p:cNvPr id="44" name="Shape 41"/>
+          <p:cNvSpPr/>
+          <p:nvPr>
+            <p:custDataLst>
+              <p:tags r:id="rId18"/>
+            </p:custDataLst>
+          </p:nvPr>
+        </p:nvSpPr>
+        <p:spPr>
+          <a:xfrm>
+            <a:off x="1282700" y="7337425"/>
+            <a:ext cx="266700" cy="266700"/>
+          </a:xfrm>
+          <a:prstGeom prst="ellipse">
+            <a:avLst/>
+          </a:prstGeom>
+          <a:solidFill>
+            <a:srgbClr val="04579A"/>
+          </a:solidFill>
+        </p:spPr>
+      </p:sp>
+      <p:sp>
+        <p:nvSpPr>
+          <p:cNvPr id="45" name="Shape 42"/>
+          <p:cNvSpPr/>
+          <p:nvPr/>
+        </p:nvSpPr>
+        <p:spPr>
+          <a:xfrm>
+            <a:off x="360680" y="7299325"/>
+            <a:ext cx="698500" cy="304800"/>
+          </a:xfrm>
+          <a:prstGeom prst="rect">
+            <a:avLst/>
+          </a:prstGeom>
+          <a:noFill/>
+        </p:spPr>
+      </p:sp>
+      <p:sp>
+        <p:nvSpPr>
+          <p:cNvPr id="46" name="Text 43"/>
+          <p:cNvSpPr/>
+          <p:nvPr>
+            <p:custDataLst>
+              <p:tags r:id="rId19"/>
+            </p:custDataLst>
+          </p:nvPr>
+        </p:nvSpPr>
+        <p:spPr>
+          <a:xfrm>
+            <a:off x="256540" y="7245350"/>
+            <a:ext cx="942340" cy="426720"/>
+          </a:xfrm>
+          <a:prstGeom prst="rect">
+            <a:avLst/>
+          </a:prstGeom>
+          <a:noFill/>
+        </p:spPr>
+        <p:txBody>
+          <a:bodyPr wrap="none" lIns="0" tIns="0" rIns="0" bIns="0" rtlCol="0" anchor="ctr"/>
+          <a:lstStyle/>
+          <a:p>
+            <a:pPr algn="r">
+              <a:lnSpc>
+                <a:spcPct val="120000"/>
+              </a:lnSpc>
+            </a:pPr>
+            <a:r>
+              <a:rPr lang="en-US" sz="1300" b="1" dirty="0">
+                <a:solidFill>
+                  <a:srgbClr val="04579A"/>
+                </a:solidFill>
+                <a:latin typeface="Arial" panose="020B0604020202020204" pitchFamily="34" charset="0"/>
+                <a:ea typeface="Arial" panose="020B0604020202020204" pitchFamily="34" charset="-122"/>
+                <a:cs typeface="Arial" panose="020B0604020202020204" pitchFamily="34" charset="-120"/>
+              </a:rPr>
+              <a:t>2024</a:t>
+            </a:r>
+            <a:endParaRPr lang="en-US" sz="1300" dirty="0"/>
+          </a:p>
+        </p:txBody>
+      </p:sp>
+      <p:sp>
+        <p:nvSpPr>
+          <p:cNvPr id="47" name="Shape 44"/>
+          <p:cNvSpPr/>
+          <p:nvPr/>
+        </p:nvSpPr>
+        <p:spPr>
+          <a:xfrm>
+            <a:off x="1714500" y="7273925"/>
+            <a:ext cx="6858000" cy="787400"/>
+          </a:xfrm>
+          <a:prstGeom prst="rect">
+            <a:avLst/>
+          </a:prstGeom>
+          <a:noFill/>
+        </p:spPr>
+      </p:sp>
+      <p:sp>
+        <p:nvSpPr>
+          <p:cNvPr id="48" name="Text 45"/>
+          <p:cNvSpPr/>
+          <p:nvPr>
+            <p:custDataLst>
+              <p:tags r:id="rId20"/>
+            </p:custDataLst>
+          </p:nvPr>
+        </p:nvSpPr>
+        <p:spPr>
+          <a:xfrm>
+            <a:off x="1592580" y="7212965"/>
+            <a:ext cx="7101840" cy="909320"/>
+          </a:xfrm>
+          <a:prstGeom prst="rect">
+            <a:avLst/>
+          </a:prstGeom>
+          <a:noFill/>
+        </p:spPr>
+        <p:txBody>
+          <a:bodyPr wrap="square" lIns="0" tIns="0" rIns="0" bIns="0" rtlCol="0" anchor="t"/>
+          <a:lstStyle/>
+          <a:p>
+            <a:pPr algn="l">
+              <a:lnSpc>
+                <a:spcPct val="150000"/>
+              </a:lnSpc>
+            </a:pPr>
+            <a:r>
+              <a:rPr lang="en-US" sz="1600" b="1" dirty="0">
+                <a:solidFill>
+                  <a:srgbClr val="333333"/>
+                </a:solidFill>
+                <a:latin typeface="Arial" panose="020B0604020202020204" pitchFamily="34" charset="0"/>
+                <a:ea typeface="Arial" panose="020B0604020202020204" pitchFamily="34" charset="-122"/>
+                <a:cs typeface="Arial" panose="020B0604020202020204" pitchFamily="34" charset="-120"/>
+              </a:rPr>
+              <a:t>StatefulAuth [33]</a:t>
+            </a:r>
+            <a:r>
+              <a:rPr lang="en-US" sz="1600" dirty="0">
+                <a:solidFill>
+                  <a:srgbClr val="333333"/>
+                </a:solidFill>
+                <a:latin typeface="Arial" panose="020B0604020202020204" pitchFamily="34" charset="0"/>
+                <a:ea typeface="Arial" panose="020B0604020202020204" pitchFamily="34" charset="-122"/>
+                <a:cs typeface="Arial" panose="020B0604020202020204" pitchFamily="34" charset="-120"/>
+              </a:rPr>
+              <a:t> — Cao等, USENIX Security</a:t>
+            </a:r>
+            <a:endParaRPr lang="en-US" sz="1600" dirty="0"/>
+          </a:p>
+          <a:p>
+            <a:pPr algn="l">
+              <a:lnSpc>
+                <a:spcPct val="150000"/>
+              </a:lnSpc>
+            </a:pPr>
+            <a:r>
+              <a:rPr lang="en-US" sz="1600" dirty="0">
+                <a:solidFill>
+                  <a:srgbClr val="666666"/>
+                </a:solidFill>
+                <a:latin typeface="Arial" panose="020B0604020202020204" pitchFamily="34" charset="0"/>
+                <a:ea typeface="Arial" panose="020B0604020202020204" pitchFamily="34" charset="-122"/>
+                <a:cs typeface="Arial" panose="020B0604020202020204" pitchFamily="34" charset="-120"/>
+              </a:rPr>
+              <a:t>WebAssembly策略+操作日志动态评估，但权限粒度仍停留在资源/操作类型层面</a:t>
+            </a:r>
+            <a:endParaRPr lang="en-US" sz="1600" dirty="0"/>
+          </a:p>
+        </p:txBody>
+      </p:sp>
+      <p:sp>
+        <p:nvSpPr>
+          <p:cNvPr id="49" name="Shape 46"/>
+          <p:cNvSpPr/>
+          <p:nvPr/>
+        </p:nvSpPr>
+        <p:spPr>
+          <a:xfrm>
+            <a:off x="8890000" y="2032000"/>
+            <a:ext cx="6604000" cy="6413500"/>
+          </a:xfrm>
+          <a:prstGeom prst="roundRect">
+            <a:avLst>
+              <a:gd name="adj" fmla="val 3000"/>
+            </a:avLst>
+          </a:prstGeom>
+          <a:solidFill>
+            <a:srgbClr val="E8F4FD"/>
+          </a:solidFill>
+        </p:spPr>
+      </p:sp>
+      <p:sp>
+        <p:nvSpPr>
+          <p:cNvPr id="50" name="Shape 47"/>
+          <p:cNvSpPr/>
+          <p:nvPr/>
+        </p:nvSpPr>
+        <p:spPr>
+          <a:xfrm>
+            <a:off x="9144000" y="2184400"/>
+            <a:ext cx="6096000" cy="381000"/>
+          </a:xfrm>
+          <a:prstGeom prst="rect">
+            <a:avLst/>
+          </a:prstGeom>
+          <a:noFill/>
+        </p:spPr>
+      </p:sp>
+      <p:sp>
+        <p:nvSpPr>
+          <p:cNvPr id="51" name="Text 48"/>
+          <p:cNvSpPr/>
+          <p:nvPr/>
+        </p:nvSpPr>
+        <p:spPr>
+          <a:xfrm>
+            <a:off x="9022080" y="2123440"/>
+            <a:ext cx="6339840" cy="502920"/>
+          </a:xfrm>
+          <a:prstGeom prst="rect">
+            <a:avLst/>
+          </a:prstGeom>
+          <a:noFill/>
+        </p:spPr>
+        <p:txBody>
+          <a:bodyPr wrap="none" lIns="0" tIns="0" rIns="0" bIns="0" rtlCol="0" anchor="ctr"/>
+          <a:lstStyle/>
+          <a:p>
+            <a:pPr algn="l">
+              <a:lnSpc>
+                <a:spcPct val="120000"/>
+              </a:lnSpc>
+            </a:pPr>
+            <a:r>
+              <a:rPr lang="en-US" sz="1800" b="1" dirty="0">
+                <a:solidFill>
+                  <a:srgbClr val="04579A"/>
+                </a:solidFill>
+                <a:latin typeface="Arial" panose="020B0604020202020204" pitchFamily="34" charset="0"/>
+                <a:ea typeface="Arial" panose="020B0604020202020204" pitchFamily="34" charset="-122"/>
+                <a:cs typeface="Arial" panose="020B0604020202020204" pitchFamily="34" charset="-120"/>
+              </a:rPr>
+              <a:t>发展趋势</a:t>
+            </a:r>
+            <a:endParaRPr lang="en-US" sz="1800" b="1" dirty="0"/>
+          </a:p>
+        </p:txBody>
+      </p:sp>
+      <p:sp>
+        <p:nvSpPr>
+          <p:cNvPr id="52" name="Shape 49"/>
+          <p:cNvSpPr/>
+          <p:nvPr/>
+        </p:nvSpPr>
+        <p:spPr>
+          <a:xfrm>
+            <a:off x="9144000" y="2667000"/>
+            <a:ext cx="6096000" cy="5588000"/>
+          </a:xfrm>
+          <a:prstGeom prst="rect">
+            <a:avLst/>
+          </a:prstGeom>
+          <a:noFill/>
+        </p:spPr>
+      </p:sp>
+      <p:sp>
+        <p:nvSpPr>
+          <p:cNvPr id="53" name="Text 50"/>
+          <p:cNvSpPr/>
+          <p:nvPr/>
+        </p:nvSpPr>
+        <p:spPr>
+          <a:xfrm>
+            <a:off x="9022080" y="2606040"/>
+            <a:ext cx="6339840" cy="5709920"/>
+          </a:xfrm>
+          <a:prstGeom prst="rect">
+            <a:avLst/>
+          </a:prstGeom>
+          <a:noFill/>
+        </p:spPr>
+        <p:txBody>
+          <a:bodyPr wrap="square" lIns="0" tIns="0" rIns="0" bIns="0" rtlCol="0" anchor="t"/>
+          <a:lstStyle/>
+          <a:p>
+            <a:pPr algn="l">
+              <a:lnSpc>
+                <a:spcPct val="170000"/>
+              </a:lnSpc>
+            </a:pPr>
+            <a:r>
+              <a:rPr lang="en-US" b="1" dirty="0">
+                <a:solidFill>
+                  <a:srgbClr val="333333"/>
+                </a:solidFill>
+                <a:latin typeface="Arial" panose="020B0604020202020204" pitchFamily="34" charset="0"/>
+                <a:ea typeface="Arial" panose="020B0604020202020204" pitchFamily="34" charset="-122"/>
+                <a:cs typeface="Arial" panose="020B0604020202020204" pitchFamily="34" charset="-120"/>
+              </a:rPr>
+              <a:t>1. 策略表达标准化</a:t>
+            </a:r>
+            <a:endParaRPr lang="en-US" dirty="0"/>
+          </a:p>
+          <a:p>
+            <a:pPr algn="l">
+              <a:lnSpc>
+                <a:spcPct val="170000"/>
+              </a:lnSpc>
+            </a:pPr>
+            <a:r>
+              <a:rPr lang="en-US" dirty="0">
+                <a:solidFill>
+                  <a:srgbClr val="666666"/>
+                </a:solidFill>
+                <a:latin typeface="Arial" panose="020B0604020202020204" pitchFamily="34" charset="0"/>
+                <a:ea typeface="Arial" panose="020B0604020202020204" pitchFamily="34" charset="-122"/>
+                <a:cs typeface="Arial" panose="020B0604020202020204" pitchFamily="34" charset="-120"/>
+              </a:rPr>
+              <a:t>Biscuit等将Datalog声明式策略嵌入令牌，解决跨服务策略互操作</a:t>
+            </a:r>
+            <a:endParaRPr lang="en-US" dirty="0"/>
+          </a:p>
+          <a:p>
+            <a:pPr algn="l">
+              <a:lnSpc>
+                <a:spcPct val="170000"/>
+              </a:lnSpc>
+              <a:spcBef>
+                <a:spcPts val="1335"/>
+              </a:spcBef>
+            </a:pPr>
+            <a:r>
+              <a:rPr lang="en-US" b="1" dirty="0">
+                <a:solidFill>
+                  <a:srgbClr val="333333"/>
+                </a:solidFill>
+                <a:latin typeface="Arial" panose="020B0604020202020204" pitchFamily="34" charset="0"/>
+                <a:ea typeface="Arial" panose="020B0604020202020204" pitchFamily="34" charset="-122"/>
+                <a:cs typeface="Arial" panose="020B0604020202020204" pitchFamily="34" charset="-120"/>
+              </a:rPr>
+              <a:t>2. 零信任深度融合</a:t>
+            </a:r>
+            <a:endParaRPr lang="en-US" dirty="0"/>
+          </a:p>
+          <a:p>
+            <a:pPr algn="l">
+              <a:lnSpc>
+                <a:spcPct val="170000"/>
+              </a:lnSpc>
+            </a:pPr>
+            <a:r>
+              <a:rPr lang="en-US" dirty="0">
+                <a:solidFill>
+                  <a:srgbClr val="666666"/>
+                </a:solidFill>
+                <a:latin typeface="Arial" panose="020B0604020202020204" pitchFamily="34" charset="0"/>
+                <a:ea typeface="Arial" panose="020B0604020202020204" pitchFamily="34" charset="-122"/>
+                <a:cs typeface="Arial" panose="020B0604020202020204" pitchFamily="34" charset="-120"/>
+              </a:rPr>
+              <a:t>永不信任、持续验证，基于实时上下文与历史行为动态授权 [22]</a:t>
+            </a:r>
+            <a:endParaRPr lang="en-US" dirty="0"/>
+          </a:p>
+          <a:p>
+            <a:pPr algn="l">
+              <a:lnSpc>
+                <a:spcPct val="170000"/>
+              </a:lnSpc>
+              <a:spcBef>
+                <a:spcPts val="1335"/>
+              </a:spcBef>
+            </a:pPr>
+            <a:r>
+              <a:rPr lang="en-US" b="1" dirty="0">
+                <a:solidFill>
+                  <a:srgbClr val="FF0000"/>
+                </a:solidFill>
+                <a:latin typeface="Arial" panose="020B0604020202020204" pitchFamily="34" charset="0"/>
+                <a:ea typeface="Arial" panose="020B0604020202020204" pitchFamily="34" charset="-122"/>
+                <a:cs typeface="Arial" panose="020B0604020202020204" pitchFamily="34" charset="-120"/>
+              </a:rPr>
+              <a:t>3. 局限</a:t>
+            </a:r>
+            <a:endParaRPr lang="en-US" dirty="0">
+              <a:solidFill>
+                <a:srgbClr val="FF0000"/>
+              </a:solidFill>
+            </a:endParaRPr>
+          </a:p>
+          <a:p>
+            <a:pPr algn="l">
+              <a:lnSpc>
+                <a:spcPct val="170000"/>
+              </a:lnSpc>
+            </a:pPr>
+            <a:r>
+              <a:rPr lang="en-US" dirty="0">
+                <a:solidFill>
+                  <a:srgbClr val="EC5F74"/>
+                </a:solidFill>
+                <a:latin typeface="Arial" panose="020B0604020202020204" pitchFamily="34" charset="0"/>
+                <a:ea typeface="Arial" panose="020B0604020202020204" pitchFamily="34" charset="-122"/>
+                <a:cs typeface="Arial" panose="020B0604020202020204" pitchFamily="34" charset="-120"/>
+              </a:rPr>
+              <a:t>权限粒度停留在资源/操作类型层面，未精确到操作参数级</a:t>
+            </a:r>
+            <a:endParaRPr lang="en-US" dirty="0"/>
+          </a:p>
+          <a:p>
+            <a:pPr algn="l">
+              <a:lnSpc>
+                <a:spcPct val="170000"/>
+              </a:lnSpc>
+              <a:spcBef>
+                <a:spcPts val="1335"/>
+              </a:spcBef>
+            </a:pPr>
+            <a:r>
+              <a:rPr lang="en-US" b="1" dirty="0">
+                <a:solidFill>
+                  <a:srgbClr val="333333"/>
+                </a:solidFill>
+                <a:latin typeface="Arial" panose="020B0604020202020204" pitchFamily="34" charset="0"/>
+                <a:ea typeface="Arial" panose="020B0604020202020204" pitchFamily="34" charset="-122"/>
+                <a:cs typeface="Arial" panose="020B0604020202020204" pitchFamily="34" charset="-120"/>
+              </a:rPr>
+              <a:t>4. 前沿方向</a:t>
+            </a:r>
+            <a:endParaRPr lang="en-US" dirty="0"/>
+          </a:p>
+          <a:p>
+            <a:pPr algn="l">
+              <a:lnSpc>
+                <a:spcPct val="170000"/>
+              </a:lnSpc>
+            </a:pPr>
+            <a:r>
+              <a:rPr lang="en-US" dirty="0">
+                <a:solidFill>
+                  <a:srgbClr val="666666"/>
+                </a:solidFill>
+                <a:latin typeface="Arial" panose="020B0604020202020204" pitchFamily="34" charset="0"/>
+                <a:ea typeface="Arial" panose="020B0604020202020204" pitchFamily="34" charset="-122"/>
+                <a:cs typeface="Arial" panose="020B0604020202020204" pitchFamily="34" charset="-120"/>
+              </a:rPr>
+              <a:t>面向AI Agent支持自主代理身份治理、任务级权限委托与细粒度访问控制</a:t>
+            </a:r>
+            <a:endParaRPr lang="en-US" dirty="0"/>
+          </a:p>
+        </p:txBody>
+      </p:sp>
+      <p:sp>
+        <p:nvSpPr>
+          <p:cNvPr id="54" name="Shape 51"/>
+          <p:cNvSpPr/>
+          <p:nvPr/>
+        </p:nvSpPr>
+        <p:spPr>
+          <a:xfrm>
+            <a:off x="15240000" y="8636000"/>
+            <a:ext cx="635000" cy="381000"/>
+          </a:xfrm>
+          <a:prstGeom prst="rect">
+            <a:avLst/>
+          </a:prstGeom>
+          <a:noFill/>
+        </p:spPr>
+      </p:sp>
+      <p:sp>
+        <p:nvSpPr>
+          <p:cNvPr id="55" name="Text 52"/>
+          <p:cNvSpPr/>
+          <p:nvPr/>
+        </p:nvSpPr>
+        <p:spPr>
+          <a:xfrm>
+            <a:off x="15118080" y="8575040"/>
+            <a:ext cx="878840" cy="502920"/>
+          </a:xfrm>
+          <a:prstGeom prst="rect">
+            <a:avLst/>
+          </a:prstGeom>
+          <a:noFill/>
+        </p:spPr>
+        <p:txBody>
+          <a:bodyPr wrap="none" lIns="0" tIns="0" rIns="0" bIns="0" rtlCol="0" anchor="ctr"/>
+          <a:lstStyle/>
+          <a:p>
+            <a:pPr algn="r">
+              <a:lnSpc>
+                <a:spcPct val="120000"/>
+              </a:lnSpc>
+            </a:pPr>
+            <a:r>
+              <a:rPr lang="en-US" sz="1800" dirty="0">
+                <a:solidFill>
+                  <a:srgbClr val="666666"/>
+                </a:solidFill>
+                <a:latin typeface="Arial" panose="020B0604020202020204" pitchFamily="34" charset="0"/>
+                <a:ea typeface="Arial" panose="020B0604020202020204" pitchFamily="34" charset="-122"/>
+                <a:cs typeface="Arial" panose="020B0604020202020204" pitchFamily="34" charset="-120"/>
+              </a:rPr>
+              <a:t>11</a:t>
+            </a:r>
+            <a:endParaRPr lang="en-US" sz="1800" dirty="0"/>
+          </a:p>
+        </p:txBody>
+      </p:sp>
+    </p:spTree>
+  </p:cSld>
+  <p:clrMapOvr>
+    <a:masterClrMapping/>
+  </p:clrMapOvr>
+  <p:transition>
+    <p:fade/>
+  </p:transition>
+</p:sld>
+</file>
+
+<file path=ppt/slides/slide4.xml><?xml version="1.0" encoding="utf-8"?>
+<p:sld xmlns:a="http://schemas.openxmlformats.org/drawingml/2006/main" xmlns:r="http://schemas.openxmlformats.org/officeDocument/2006/relationships" xmlns:p="http://schemas.openxmlformats.org/presentationml/2006/main">
+  <p:cSld>
+    <p:spTree>
+      <p:nvGrpSpPr>
+        <p:cNvPr id="1" name=""/>
+        <p:cNvGrpSpPr/>
+        <p:nvPr/>
+      </p:nvGrpSpPr>
+      <p:grpSpPr>
+        <a:xfrm>
+          <a:off x="0" y="0"/>
+          <a:ext cx="0" cy="0"/>
+          <a:chOff x="0" y="0"/>
+          <a:chExt cx="0" cy="0"/>
+        </a:xfrm>
+      </p:grpSpPr>
+      <p:sp>
+        <p:nvSpPr>
+          <p:cNvPr id="2" name="Shape 0"/>
+          <p:cNvSpPr/>
+          <p:nvPr/>
+        </p:nvSpPr>
+        <p:spPr>
+          <a:xfrm>
+            <a:off x="2219960" y="0"/>
+            <a:ext cx="2895600" cy="962660"/>
+          </a:xfrm>
+          <a:prstGeom prst="rect">
+            <a:avLst/>
+          </a:prstGeom>
+          <a:solidFill>
+            <a:srgbClr val="F2F2F2"/>
+          </a:solidFill>
+          <a:ln w="12700">
+            <a:solidFill>
+              <a:srgbClr val="F2F2F2"/>
+            </a:solidFill>
+            <a:prstDash val="solid"/>
+          </a:ln>
+        </p:spPr>
+      </p:sp>
+      <p:sp>
+        <p:nvSpPr>
+          <p:cNvPr id="3" name="Shape 1"/>
+          <p:cNvSpPr/>
+          <p:nvPr/>
+        </p:nvSpPr>
+        <p:spPr>
+          <a:xfrm>
+            <a:off x="5162169" y="-889"/>
+            <a:ext cx="2590800" cy="962660"/>
+          </a:xfrm>
+          <a:prstGeom prst="rect">
+            <a:avLst/>
+          </a:prstGeom>
+          <a:solidFill>
+            <a:srgbClr val="04579A"/>
+          </a:solidFill>
+          <a:ln w="12700">
+            <a:solidFill>
+              <a:srgbClr val="04579A"/>
+            </a:solidFill>
+            <a:prstDash val="solid"/>
+          </a:ln>
+        </p:spPr>
+      </p:sp>
+      <p:sp>
+        <p:nvSpPr>
+          <p:cNvPr id="4" name="Shape 2"/>
+          <p:cNvSpPr/>
+          <p:nvPr/>
+        </p:nvSpPr>
+        <p:spPr>
+          <a:xfrm>
+            <a:off x="7816469" y="-889"/>
+            <a:ext cx="4114800" cy="962660"/>
+          </a:xfrm>
+          <a:prstGeom prst="rect">
+            <a:avLst/>
+          </a:prstGeom>
+          <a:solidFill>
+            <a:srgbClr val="F2F2F2"/>
+          </a:solidFill>
+        </p:spPr>
+      </p:sp>
+      <p:sp>
+        <p:nvSpPr>
+          <p:cNvPr id="5" name="Shape 3"/>
+          <p:cNvSpPr/>
+          <p:nvPr/>
+        </p:nvSpPr>
+        <p:spPr>
+          <a:xfrm>
+            <a:off x="11971020" y="0"/>
+            <a:ext cx="4284980" cy="961771"/>
+          </a:xfrm>
+          <a:prstGeom prst="rect">
+            <a:avLst/>
+          </a:prstGeom>
+          <a:solidFill>
+            <a:srgbClr val="F2F2F2"/>
+          </a:solidFill>
+        </p:spPr>
+      </p:sp>
+      <p:sp>
+        <p:nvSpPr>
+          <p:cNvPr id="6" name="Shape 4"/>
+          <p:cNvSpPr/>
+          <p:nvPr/>
+        </p:nvSpPr>
+        <p:spPr>
+          <a:xfrm>
+            <a:off x="2283460" y="203200"/>
+            <a:ext cx="2768600" cy="508000"/>
+          </a:xfrm>
+          <a:prstGeom prst="rect">
+            <a:avLst/>
+          </a:prstGeom>
+          <a:noFill/>
+        </p:spPr>
+      </p:sp>
+      <p:sp>
+        <p:nvSpPr>
+          <p:cNvPr id="7" name="Text 5"/>
+          <p:cNvSpPr/>
+          <p:nvPr/>
+        </p:nvSpPr>
+        <p:spPr>
+          <a:xfrm>
+            <a:off x="2161540" y="142240"/>
+            <a:ext cx="3012440" cy="629920"/>
+          </a:xfrm>
+          <a:prstGeom prst="rect">
+            <a:avLst/>
+          </a:prstGeom>
+          <a:noFill/>
+        </p:spPr>
+        <p:txBody>
+          <a:bodyPr wrap="none" lIns="0" tIns="0" rIns="0" bIns="0" rtlCol="0" anchor="ctr"/>
+          <a:lstStyle/>
+          <a:p>
+            <a:pPr algn="ctr">
+              <a:lnSpc>
+                <a:spcPct val="120000"/>
+              </a:lnSpc>
+            </a:pPr>
+            <a:r>
+              <a:rPr lang="en-US" sz="2000" dirty="0">
+                <a:solidFill>
+                  <a:srgbClr val="333333"/>
+                </a:solidFill>
+                <a:latin typeface="Arial" panose="020B0604020202020204" pitchFamily="34" charset="0"/>
+                <a:ea typeface="Arial" panose="020B0604020202020204" pitchFamily="34" charset="-122"/>
+                <a:cs typeface="Arial" panose="020B0604020202020204" pitchFamily="34" charset="-120"/>
+              </a:rPr>
+              <a:t>选题背景及意义</a:t>
+            </a:r>
+            <a:endParaRPr lang="en-US" sz="2000" dirty="0"/>
+          </a:p>
+        </p:txBody>
+      </p:sp>
+      <p:sp>
+        <p:nvSpPr>
+          <p:cNvPr id="8" name="Shape 6"/>
+          <p:cNvSpPr/>
+          <p:nvPr/>
+        </p:nvSpPr>
+        <p:spPr>
+          <a:xfrm>
+            <a:off x="5225669" y="203200"/>
+            <a:ext cx="2463800" cy="508000"/>
+          </a:xfrm>
+          <a:prstGeom prst="rect">
+            <a:avLst/>
+          </a:prstGeom>
+          <a:noFill/>
+        </p:spPr>
+      </p:sp>
+      <p:sp>
+        <p:nvSpPr>
+          <p:cNvPr id="9" name="Text 7"/>
+          <p:cNvSpPr/>
+          <p:nvPr/>
+        </p:nvSpPr>
+        <p:spPr>
+          <a:xfrm>
+            <a:off x="5103749" y="142240"/>
+            <a:ext cx="2707640" cy="629920"/>
+          </a:xfrm>
+          <a:prstGeom prst="rect">
+            <a:avLst/>
+          </a:prstGeom>
+          <a:noFill/>
+        </p:spPr>
+        <p:txBody>
+          <a:bodyPr wrap="none" lIns="0" tIns="0" rIns="0" bIns="0" rtlCol="0" anchor="ctr"/>
+          <a:lstStyle/>
+          <a:p>
+            <a:pPr algn="ctr">
+              <a:lnSpc>
+                <a:spcPct val="120000"/>
+              </a:lnSpc>
+            </a:pPr>
+            <a:r>
+              <a:rPr lang="en-US" sz="2000" dirty="0">
+                <a:solidFill>
+                  <a:srgbClr val="FFFFFF"/>
+                </a:solidFill>
+                <a:latin typeface="Arial" panose="020B0604020202020204" pitchFamily="34" charset="0"/>
+                <a:ea typeface="Arial" panose="020B0604020202020204" pitchFamily="34" charset="-122"/>
+                <a:cs typeface="Arial" panose="020B0604020202020204" pitchFamily="34" charset="-120"/>
+              </a:rPr>
+              <a:t>国内外研究现状</a:t>
+            </a:r>
+            <a:endParaRPr lang="en-US" sz="2000" dirty="0"/>
+          </a:p>
+        </p:txBody>
+      </p:sp>
+      <p:sp>
+        <p:nvSpPr>
+          <p:cNvPr id="10" name="Shape 8"/>
+          <p:cNvSpPr/>
+          <p:nvPr/>
+        </p:nvSpPr>
+        <p:spPr>
+          <a:xfrm>
+            <a:off x="7879969" y="203200"/>
+            <a:ext cx="3987800" cy="508000"/>
+          </a:xfrm>
+          <a:prstGeom prst="rect">
+            <a:avLst/>
+          </a:prstGeom>
+          <a:noFill/>
+        </p:spPr>
+      </p:sp>
+      <p:sp>
+        <p:nvSpPr>
+          <p:cNvPr id="11" name="Text 9"/>
+          <p:cNvSpPr/>
+          <p:nvPr/>
+        </p:nvSpPr>
+        <p:spPr>
+          <a:xfrm>
+            <a:off x="7758049" y="142240"/>
+            <a:ext cx="4231640" cy="629920"/>
+          </a:xfrm>
+          <a:prstGeom prst="rect">
+            <a:avLst/>
+          </a:prstGeom>
+          <a:noFill/>
+        </p:spPr>
+        <p:txBody>
+          <a:bodyPr wrap="none" lIns="0" tIns="0" rIns="0" bIns="0" rtlCol="0" anchor="ctr"/>
+          <a:lstStyle/>
+          <a:p>
+            <a:pPr algn="ctr">
+              <a:lnSpc>
+                <a:spcPct val="120000"/>
+              </a:lnSpc>
+            </a:pPr>
+            <a:r>
+              <a:rPr lang="en-US" sz="2000" dirty="0">
+                <a:solidFill>
+                  <a:srgbClr val="333333"/>
+                </a:solidFill>
+                <a:latin typeface="Arial" panose="020B0604020202020204" pitchFamily="34" charset="0"/>
+                <a:ea typeface="Arial" panose="020B0604020202020204" pitchFamily="34" charset="-122"/>
+                <a:cs typeface="Arial" panose="020B0604020202020204" pitchFamily="34" charset="-120"/>
+              </a:rPr>
+              <a:t>主要研究内容及预期目标</a:t>
+            </a:r>
+            <a:endParaRPr lang="en-US" sz="2000" dirty="0"/>
+          </a:p>
+        </p:txBody>
+      </p:sp>
+      <p:sp>
+        <p:nvSpPr>
+          <p:cNvPr id="12" name="Shape 10"/>
+          <p:cNvSpPr/>
+          <p:nvPr/>
+        </p:nvSpPr>
+        <p:spPr>
+          <a:xfrm>
+            <a:off x="12034520" y="203200"/>
+            <a:ext cx="4157980" cy="508000"/>
+          </a:xfrm>
+          <a:prstGeom prst="rect">
+            <a:avLst/>
+          </a:prstGeom>
+          <a:noFill/>
+        </p:spPr>
+      </p:sp>
+      <p:sp>
+        <p:nvSpPr>
+          <p:cNvPr id="13" name="Text 11"/>
+          <p:cNvSpPr/>
+          <p:nvPr/>
+        </p:nvSpPr>
+        <p:spPr>
+          <a:xfrm>
+            <a:off x="11912600" y="142240"/>
+            <a:ext cx="4401820" cy="629920"/>
+          </a:xfrm>
+          <a:prstGeom prst="rect">
+            <a:avLst/>
+          </a:prstGeom>
+          <a:noFill/>
+        </p:spPr>
+        <p:txBody>
+          <a:bodyPr wrap="none" lIns="0" tIns="0" rIns="0" bIns="0" rtlCol="0" anchor="ctr"/>
+          <a:lstStyle/>
+          <a:p>
+            <a:pPr algn="ctr">
+              <a:lnSpc>
+                <a:spcPct val="120000"/>
+              </a:lnSpc>
+            </a:pPr>
+            <a:r>
+              <a:rPr lang="en-US" sz="2000" dirty="0">
+                <a:solidFill>
+                  <a:srgbClr val="333333"/>
+                </a:solidFill>
+                <a:latin typeface="Arial" panose="020B0604020202020204" pitchFamily="34" charset="0"/>
+                <a:ea typeface="Arial" panose="020B0604020202020204" pitchFamily="34" charset="-122"/>
+                <a:cs typeface="Arial" panose="020B0604020202020204" pitchFamily="34" charset="-120"/>
+              </a:rPr>
+              <a:t>工作计划与进度安排</a:t>
+            </a:r>
+            <a:endParaRPr lang="en-US" sz="2000" dirty="0"/>
+          </a:p>
+        </p:txBody>
+      </p:sp>
+      <p:pic>
+        <p:nvPicPr>
+          <p:cNvPr id="14" name="Image 0" descr="https://kimi-img.moonshot.cn/pub/slides/okc/flfuysioo4gzm/mnt/agents/output/new_pptd/images/image_2.jpg"/>
+          <p:cNvPicPr>
+            <a:picLocks noChangeAspect="1"/>
+          </p:cNvPicPr>
+          <p:nvPr/>
+        </p:nvPicPr>
+        <p:blipFill>
+          <a:blip r:embed="rId1"/>
+          <a:srcRect l="5060" r="29000"/>
+          <a:stretch>
+            <a:fillRect/>
+          </a:stretch>
+        </p:blipFill>
+        <p:spPr>
+          <a:xfrm>
+            <a:off x="544449" y="140589"/>
+            <a:ext cx="1273429" cy="745871"/>
+          </a:xfrm>
+          <a:prstGeom prst="rect">
+            <a:avLst/>
+          </a:prstGeom>
+        </p:spPr>
+      </p:pic>
+      <p:sp>
+        <p:nvSpPr>
+          <p:cNvPr id="15" name="Shape 12"/>
+          <p:cNvSpPr/>
+          <p:nvPr/>
+        </p:nvSpPr>
+        <p:spPr>
+          <a:xfrm rot="10800000">
+            <a:off x="6379591" y="961771"/>
+            <a:ext cx="389509" cy="304800"/>
+          </a:xfrm>
+          <a:prstGeom prst="triangle">
+            <a:avLst>
+              <a:gd name="adj" fmla="val 50000"/>
+            </a:avLst>
+          </a:prstGeom>
+          <a:solidFill>
+            <a:srgbClr val="04579A"/>
+          </a:solidFill>
+        </p:spPr>
+      </p:sp>
+      <p:sp>
+        <p:nvSpPr>
+          <p:cNvPr id="16" name="Shape 13"/>
+          <p:cNvSpPr/>
+          <p:nvPr/>
+        </p:nvSpPr>
+        <p:spPr>
+          <a:xfrm>
+            <a:off x="762000" y="1333500"/>
+            <a:ext cx="11430000" cy="533400"/>
+          </a:xfrm>
+          <a:prstGeom prst="rect">
+            <a:avLst/>
+          </a:prstGeom>
+          <a:noFill/>
+        </p:spPr>
+      </p:sp>
+      <p:sp>
+        <p:nvSpPr>
+          <p:cNvPr id="17" name="Text 14"/>
+          <p:cNvSpPr/>
+          <p:nvPr/>
+        </p:nvSpPr>
+        <p:spPr>
+          <a:xfrm>
+            <a:off x="640080" y="1272540"/>
+            <a:ext cx="11673840" cy="655320"/>
+          </a:xfrm>
+          <a:prstGeom prst="rect">
+            <a:avLst/>
+          </a:prstGeom>
+          <a:noFill/>
+        </p:spPr>
+        <p:txBody>
+          <a:bodyPr wrap="none" lIns="0" tIns="0" rIns="0" bIns="0" rtlCol="0" anchor="ctr"/>
+          <a:lstStyle/>
+          <a:p>
+            <a:pPr algn="l">
+              <a:lnSpc>
+                <a:spcPct val="120000"/>
+              </a:lnSpc>
+            </a:pPr>
+            <a:r>
+              <a:rPr lang="en-US" sz="2800" b="1" dirty="0">
+                <a:solidFill>
+                  <a:srgbClr val="04579A"/>
+                </a:solidFill>
+                <a:latin typeface="Arial" panose="020B0604020202020204" pitchFamily="34" charset="0"/>
+                <a:ea typeface="Arial" panose="020B0604020202020204" pitchFamily="34" charset="-122"/>
+                <a:cs typeface="Arial" panose="020B0604020202020204" pitchFamily="34" charset="-120"/>
+              </a:rPr>
+              <a:t>智能体授权协议研究现状</a:t>
+            </a:r>
+            <a:endParaRPr lang="en-US" sz="2800" dirty="0"/>
+          </a:p>
+        </p:txBody>
+      </p:sp>
+      <p:sp>
+        <p:nvSpPr>
+          <p:cNvPr id="18" name="Shape 15"/>
+          <p:cNvSpPr/>
+          <p:nvPr>
+            <p:custDataLst>
+              <p:tags r:id="rId2"/>
+            </p:custDataLst>
+          </p:nvPr>
+        </p:nvSpPr>
+        <p:spPr>
+          <a:xfrm>
+            <a:off x="762000" y="2006600"/>
+            <a:ext cx="7175500" cy="2032000"/>
+          </a:xfrm>
+          <a:prstGeom prst="roundRect">
+            <a:avLst>
+              <a:gd name="adj" fmla="val 5000"/>
+            </a:avLst>
+          </a:prstGeom>
+          <a:solidFill>
+            <a:srgbClr val="E8F4FD"/>
+          </a:solidFill>
+        </p:spPr>
+      </p:sp>
+      <p:sp>
+        <p:nvSpPr>
+          <p:cNvPr id="19" name="Shape 16"/>
+          <p:cNvSpPr/>
+          <p:nvPr/>
+        </p:nvSpPr>
+        <p:spPr>
+          <a:xfrm>
+            <a:off x="894080" y="2098040"/>
+            <a:ext cx="406400" cy="330200"/>
+          </a:xfrm>
+          <a:prstGeom prst="rect">
+            <a:avLst/>
+          </a:prstGeom>
+          <a:noFill/>
+        </p:spPr>
+      </p:sp>
+      <p:sp>
+        <p:nvSpPr>
+          <p:cNvPr id="20" name="Text 17"/>
+          <p:cNvSpPr/>
+          <p:nvPr>
+            <p:custDataLst>
+              <p:tags r:id="rId3"/>
+            </p:custDataLst>
+          </p:nvPr>
+        </p:nvSpPr>
+        <p:spPr>
+          <a:xfrm>
+            <a:off x="830580" y="2047240"/>
+            <a:ext cx="558800" cy="452120"/>
+          </a:xfrm>
+          <a:prstGeom prst="rect">
+            <a:avLst/>
+          </a:prstGeom>
+          <a:noFill/>
+        </p:spPr>
+        <p:txBody>
+          <a:bodyPr wrap="none" lIns="0" tIns="0" rIns="0" bIns="0" rtlCol="0" anchor="ctr"/>
+          <a:lstStyle/>
+          <a:p>
+            <a:pPr algn="ctr">
+              <a:lnSpc>
+                <a:spcPct val="120000"/>
+              </a:lnSpc>
+            </a:pPr>
+            <a:r>
+              <a:rPr lang="en-US" sz="2000" b="1" dirty="0">
+                <a:solidFill>
+                  <a:schemeClr val="tx1"/>
+                </a:solidFill>
+                <a:latin typeface="Arial" panose="020B0604020202020204" pitchFamily="34" charset="0"/>
+                <a:ea typeface="Arial" panose="020B0604020202020204" pitchFamily="34" charset="-122"/>
+                <a:cs typeface="Arial" panose="020B0604020202020204" pitchFamily="34" charset="-120"/>
+              </a:rPr>
+              <a:t>1</a:t>
+            </a:r>
+            <a:endParaRPr lang="en-US" sz="2000" b="1" dirty="0">
+              <a:solidFill>
+                <a:schemeClr val="tx1"/>
+              </a:solidFill>
+              <a:latin typeface="Arial" panose="020B0604020202020204" pitchFamily="34" charset="0"/>
+              <a:ea typeface="Arial" panose="020B0604020202020204" pitchFamily="34" charset="-122"/>
+              <a:cs typeface="Arial" panose="020B0604020202020204" pitchFamily="34" charset="-120"/>
+            </a:endParaRPr>
+          </a:p>
+        </p:txBody>
+      </p:sp>
+      <p:sp>
+        <p:nvSpPr>
+          <p:cNvPr id="21" name="Shape 18"/>
+          <p:cNvSpPr/>
+          <p:nvPr/>
+        </p:nvSpPr>
+        <p:spPr>
+          <a:xfrm>
+            <a:off x="1371600" y="2108200"/>
+            <a:ext cx="6350000" cy="330200"/>
+          </a:xfrm>
+          <a:prstGeom prst="rect">
+            <a:avLst/>
+          </a:prstGeom>
+          <a:noFill/>
+        </p:spPr>
+      </p:sp>
+      <p:sp>
+        <p:nvSpPr>
+          <p:cNvPr id="22" name="Text 19"/>
+          <p:cNvSpPr/>
+          <p:nvPr>
+            <p:custDataLst>
+              <p:tags r:id="rId4"/>
+            </p:custDataLst>
+          </p:nvPr>
+        </p:nvSpPr>
+        <p:spPr>
+          <a:xfrm>
+            <a:off x="1249680" y="2047240"/>
+            <a:ext cx="6593840" cy="452120"/>
+          </a:xfrm>
+          <a:prstGeom prst="rect">
+            <a:avLst/>
+          </a:prstGeom>
+          <a:noFill/>
+        </p:spPr>
+        <p:txBody>
+          <a:bodyPr wrap="none" lIns="0" tIns="0" rIns="0" bIns="0" rtlCol="0" anchor="ctr"/>
+          <a:lstStyle/>
+          <a:p>
+            <a:pPr algn="l">
+              <a:lnSpc>
+                <a:spcPct val="120000"/>
+              </a:lnSpc>
+            </a:pPr>
+            <a:r>
+              <a:rPr lang="en-US" sz="1600" b="1" dirty="0">
+                <a:solidFill>
+                  <a:schemeClr val="tx1"/>
+                </a:solidFill>
+                <a:latin typeface="Arial" panose="020B0604020202020204" pitchFamily="34" charset="0"/>
+                <a:ea typeface="Arial" panose="020B0604020202020204" pitchFamily="34" charset="-122"/>
+                <a:cs typeface="Arial" panose="020B0604020202020204" pitchFamily="34" charset="-120"/>
+              </a:rPr>
+              <a:t>Chopra等 — 传统授权与智能体的结构性不匹配 </a:t>
+            </a:r>
+            <a:r>
+              <a:rPr lang="en-US" sz="1600" b="1" baseline="30000" dirty="0">
+                <a:solidFill>
+                  <a:schemeClr val="tx1"/>
+                </a:solidFill>
+                <a:latin typeface="Arial" panose="020B0604020202020204" pitchFamily="34" charset="0"/>
+                <a:ea typeface="Arial" panose="020B0604020202020204" pitchFamily="34" charset="-122"/>
+                <a:cs typeface="Arial" panose="020B0604020202020204" pitchFamily="34" charset="-120"/>
+              </a:rPr>
+              <a:t>[34]</a:t>
+            </a:r>
+            <a:endParaRPr lang="en-US" sz="1600" b="1" baseline="30000" dirty="0">
+              <a:solidFill>
+                <a:schemeClr val="tx1"/>
+              </a:solidFill>
+              <a:latin typeface="Arial" panose="020B0604020202020204" pitchFamily="34" charset="0"/>
+              <a:ea typeface="Arial" panose="020B0604020202020204" pitchFamily="34" charset="-122"/>
+              <a:cs typeface="Arial" panose="020B0604020202020204" pitchFamily="34" charset="-120"/>
+            </a:endParaRPr>
+          </a:p>
+        </p:txBody>
+      </p:sp>
+      <p:sp>
+        <p:nvSpPr>
+          <p:cNvPr id="23" name="Shape 20"/>
+          <p:cNvSpPr/>
+          <p:nvPr/>
+        </p:nvSpPr>
+        <p:spPr>
+          <a:xfrm>
+            <a:off x="952500" y="2489200"/>
+            <a:ext cx="6794500" cy="1397000"/>
+          </a:xfrm>
+          <a:prstGeom prst="rect">
+            <a:avLst/>
+          </a:prstGeom>
+          <a:noFill/>
+        </p:spPr>
+      </p:sp>
+      <p:sp>
+        <p:nvSpPr>
+          <p:cNvPr id="24" name="Text 21"/>
+          <p:cNvSpPr/>
+          <p:nvPr>
+            <p:custDataLst>
+              <p:tags r:id="rId5"/>
+            </p:custDataLst>
+          </p:nvPr>
+        </p:nvSpPr>
+        <p:spPr>
+          <a:xfrm>
+            <a:off x="830580" y="2428240"/>
+            <a:ext cx="7038340" cy="1518920"/>
+          </a:xfrm>
+          <a:prstGeom prst="rect">
+            <a:avLst/>
+          </a:prstGeom>
+          <a:noFill/>
+        </p:spPr>
+        <p:txBody>
+          <a:bodyPr wrap="square" lIns="0" tIns="0" rIns="0" bIns="0" rtlCol="0" anchor="t"/>
+          <a:lstStyle/>
+          <a:p>
+            <a:pPr algn="l">
+              <a:lnSpc>
+                <a:spcPct val="160000"/>
+              </a:lnSpc>
+            </a:pPr>
+            <a:r>
+              <a:rPr lang="en-US" sz="1600" b="1" dirty="0">
+                <a:solidFill>
+                  <a:srgbClr val="444444"/>
+                </a:solidFill>
+                <a:latin typeface="Arial" panose="020B0604020202020204" pitchFamily="34" charset="0"/>
+                <a:ea typeface="Arial" panose="020B0604020202020204" pitchFamily="34" charset="-122"/>
+                <a:cs typeface="Arial" panose="020B0604020202020204" pitchFamily="34" charset="-120"/>
+              </a:rPr>
+              <a:t>不足：</a:t>
+            </a:r>
+            <a:r>
+              <a:rPr lang="en-US" sz="1600" dirty="0">
+                <a:solidFill>
+                  <a:srgbClr val="444444"/>
+                </a:solidFill>
+                <a:latin typeface="Arial" panose="020B0604020202020204" pitchFamily="34" charset="0"/>
+                <a:ea typeface="Arial" panose="020B0604020202020204" pitchFamily="34" charset="-122"/>
+                <a:cs typeface="Arial" panose="020B0604020202020204" pitchFamily="34" charset="-120"/>
+              </a:rPr>
+              <a:t>权限粒度过大、无动态策略执行、缺乏自主系统控制</a:t>
+            </a:r>
+            <a:endParaRPr lang="en-US" sz="1600" dirty="0"/>
+          </a:p>
+          <a:p>
+            <a:pPr algn="l">
+              <a:lnSpc>
+                <a:spcPct val="160000"/>
+              </a:lnSpc>
+            </a:pPr>
+            <a:r>
+              <a:rPr lang="en-US" sz="1600" b="1" dirty="0">
+                <a:solidFill>
+                  <a:srgbClr val="444444"/>
+                </a:solidFill>
+                <a:latin typeface="Arial" panose="020B0604020202020204" pitchFamily="34" charset="0"/>
+                <a:ea typeface="Arial" panose="020B0604020202020204" pitchFamily="34" charset="-122"/>
+                <a:cs typeface="Arial" panose="020B0604020202020204" pitchFamily="34" charset="-120"/>
+              </a:rPr>
+              <a:t>方向：</a:t>
+            </a:r>
+            <a:r>
+              <a:rPr lang="en-US" sz="1600" dirty="0">
+                <a:solidFill>
+                  <a:srgbClr val="444444"/>
+                </a:solidFill>
+                <a:latin typeface="Arial" panose="020B0604020202020204" pitchFamily="34" charset="0"/>
+                <a:ea typeface="Arial" panose="020B0604020202020204" pitchFamily="34" charset="-122"/>
+                <a:cs typeface="Arial" panose="020B0604020202020204" pitchFamily="34" charset="-120"/>
+              </a:rPr>
+              <a:t>基于能力的模型 + 实时策略引擎 + 跨服务标准化 + 边缘验证</a:t>
+            </a:r>
+            <a:endParaRPr lang="en-US" sz="1600" dirty="0"/>
+          </a:p>
+          <a:p>
+            <a:pPr algn="l">
+              <a:lnSpc>
+                <a:spcPct val="160000"/>
+              </a:lnSpc>
+            </a:pPr>
+            <a:r>
+              <a:rPr lang="en-US" sz="1600" b="1" dirty="0">
+                <a:solidFill>
+                  <a:srgbClr val="444444"/>
+                </a:solidFill>
+                <a:latin typeface="Arial" panose="020B0604020202020204" pitchFamily="34" charset="0"/>
+                <a:ea typeface="Arial" panose="020B0604020202020204" pitchFamily="34" charset="-122"/>
+                <a:cs typeface="Arial" panose="020B0604020202020204" pitchFamily="34" charset="-120"/>
+              </a:rPr>
+              <a:t>意义：</a:t>
+            </a:r>
+            <a:r>
+              <a:rPr lang="en-US" sz="1600" dirty="0">
+                <a:solidFill>
+                  <a:srgbClr val="444444"/>
+                </a:solidFill>
+                <a:latin typeface="Arial" panose="020B0604020202020204" pitchFamily="34" charset="0"/>
+                <a:ea typeface="Arial" panose="020B0604020202020204" pitchFamily="34" charset="-122"/>
+                <a:cs typeface="Arial" panose="020B0604020202020204" pitchFamily="34" charset="-120"/>
+              </a:rPr>
+              <a:t>首次从系统架构层面揭示传统授权与自主智能体的根本性矛盾</a:t>
+            </a:r>
+            <a:endParaRPr lang="en-US" sz="1600" dirty="0"/>
+          </a:p>
+        </p:txBody>
+      </p:sp>
+      <p:sp>
+        <p:nvSpPr>
+          <p:cNvPr id="25" name="Shape 22"/>
+          <p:cNvSpPr/>
+          <p:nvPr>
+            <p:custDataLst>
+              <p:tags r:id="rId6"/>
+            </p:custDataLst>
+          </p:nvPr>
+        </p:nvSpPr>
+        <p:spPr>
+          <a:xfrm>
+            <a:off x="8318500" y="2006600"/>
+            <a:ext cx="7175500" cy="2032000"/>
+          </a:xfrm>
+          <a:prstGeom prst="roundRect">
+            <a:avLst>
+              <a:gd name="adj" fmla="val 5000"/>
+            </a:avLst>
+          </a:prstGeom>
+          <a:solidFill>
+            <a:srgbClr val="E8F4FD"/>
+          </a:solidFill>
+        </p:spPr>
+      </p:sp>
+      <p:sp>
+        <p:nvSpPr>
+          <p:cNvPr id="26" name="Shape 23"/>
+          <p:cNvSpPr/>
+          <p:nvPr/>
+        </p:nvSpPr>
+        <p:spPr>
+          <a:xfrm>
+            <a:off x="8318500" y="2108200"/>
+            <a:ext cx="406400" cy="330200"/>
+          </a:xfrm>
+          <a:prstGeom prst="rect">
+            <a:avLst/>
+          </a:prstGeom>
+          <a:noFill/>
+        </p:spPr>
+      </p:sp>
+      <p:sp>
+        <p:nvSpPr>
+          <p:cNvPr id="27" name="Text 24"/>
+          <p:cNvSpPr/>
+          <p:nvPr>
+            <p:custDataLst>
+              <p:tags r:id="rId7"/>
+            </p:custDataLst>
+          </p:nvPr>
+        </p:nvSpPr>
+        <p:spPr>
+          <a:xfrm>
+            <a:off x="8387080" y="2047240"/>
+            <a:ext cx="422275" cy="452120"/>
+          </a:xfrm>
+          <a:prstGeom prst="rect">
+            <a:avLst/>
+          </a:prstGeom>
+          <a:noFill/>
+        </p:spPr>
+        <p:txBody>
+          <a:bodyPr wrap="none" lIns="0" tIns="0" rIns="0" bIns="0" rtlCol="0" anchor="ctr"/>
+          <a:lstStyle/>
+          <a:p>
+            <a:pPr algn="ctr">
+              <a:lnSpc>
+                <a:spcPct val="120000"/>
+              </a:lnSpc>
+            </a:pPr>
+            <a:r>
+              <a:rPr lang="en-US" sz="2000" b="1" dirty="0">
+                <a:solidFill>
+                  <a:schemeClr val="tx1"/>
+                </a:solidFill>
+                <a:latin typeface="Arial" panose="020B0604020202020204" pitchFamily="34" charset="0"/>
+                <a:ea typeface="Arial" panose="020B0604020202020204" pitchFamily="34" charset="-122"/>
+                <a:cs typeface="Arial" panose="020B0604020202020204" pitchFamily="34" charset="-120"/>
+              </a:rPr>
+              <a:t>2</a:t>
+            </a:r>
+            <a:endParaRPr lang="en-US" sz="2000" b="1" dirty="0">
+              <a:solidFill>
+                <a:schemeClr val="tx1"/>
+              </a:solidFill>
+              <a:latin typeface="Arial" panose="020B0604020202020204" pitchFamily="34" charset="0"/>
+              <a:ea typeface="Arial" panose="020B0604020202020204" pitchFamily="34" charset="-122"/>
+              <a:cs typeface="Arial" panose="020B0604020202020204" pitchFamily="34" charset="-120"/>
+            </a:endParaRPr>
+          </a:p>
+        </p:txBody>
+      </p:sp>
+      <p:sp>
+        <p:nvSpPr>
+          <p:cNvPr id="28" name="Shape 25"/>
+          <p:cNvSpPr/>
+          <p:nvPr/>
+        </p:nvSpPr>
+        <p:spPr>
+          <a:xfrm>
+            <a:off x="8928100" y="2108200"/>
+            <a:ext cx="6350000" cy="330200"/>
+          </a:xfrm>
+          <a:prstGeom prst="rect">
+            <a:avLst/>
+          </a:prstGeom>
+          <a:noFill/>
+        </p:spPr>
+      </p:sp>
+      <p:sp>
+        <p:nvSpPr>
+          <p:cNvPr id="29" name="Text 26"/>
+          <p:cNvSpPr/>
+          <p:nvPr>
+            <p:custDataLst>
+              <p:tags r:id="rId8"/>
+            </p:custDataLst>
+          </p:nvPr>
+        </p:nvSpPr>
+        <p:spPr>
+          <a:xfrm>
+            <a:off x="8806180" y="2047240"/>
+            <a:ext cx="6593840" cy="452120"/>
+          </a:xfrm>
+          <a:prstGeom prst="rect">
+            <a:avLst/>
+          </a:prstGeom>
+          <a:noFill/>
+        </p:spPr>
+        <p:txBody>
+          <a:bodyPr wrap="none" lIns="0" tIns="0" rIns="0" bIns="0" rtlCol="0" anchor="ctr"/>
+          <a:lstStyle/>
+          <a:p>
+            <a:pPr algn="l">
+              <a:lnSpc>
+                <a:spcPct val="120000"/>
+              </a:lnSpc>
+            </a:pPr>
+            <a:r>
+              <a:rPr lang="en-US" sz="1600" b="1" dirty="0">
+                <a:solidFill>
+                  <a:schemeClr val="tx1"/>
+                </a:solidFill>
+                <a:latin typeface="Arial" panose="020B0604020202020204" pitchFamily="34" charset="0"/>
+                <a:ea typeface="Arial" panose="020B0604020202020204" pitchFamily="34" charset="-122"/>
+                <a:cs typeface="Arial" panose="020B0604020202020204" pitchFamily="34" charset="-120"/>
+              </a:rPr>
+              <a:t>South等 — 可认证可审计委托授权框架</a:t>
+            </a:r>
+            <a:r>
+              <a:rPr lang="en-US" sz="1600" b="1" baseline="30000" dirty="0">
+                <a:solidFill>
+                  <a:schemeClr val="tx1"/>
+                </a:solidFill>
+                <a:latin typeface="Arial" panose="020B0604020202020204" pitchFamily="34" charset="0"/>
+                <a:ea typeface="Arial" panose="020B0604020202020204" pitchFamily="34" charset="-122"/>
+                <a:cs typeface="Arial" panose="020B0604020202020204" pitchFamily="34" charset="-120"/>
+              </a:rPr>
+              <a:t> [35]</a:t>
+            </a:r>
+            <a:endParaRPr lang="en-US" sz="1600" b="1" baseline="30000" dirty="0">
+              <a:solidFill>
+                <a:schemeClr val="tx1"/>
+              </a:solidFill>
+              <a:latin typeface="Arial" panose="020B0604020202020204" pitchFamily="34" charset="0"/>
+              <a:ea typeface="Arial" panose="020B0604020202020204" pitchFamily="34" charset="-122"/>
+              <a:cs typeface="Arial" panose="020B0604020202020204" pitchFamily="34" charset="-120"/>
+            </a:endParaRPr>
+          </a:p>
+        </p:txBody>
+      </p:sp>
+      <p:sp>
+        <p:nvSpPr>
+          <p:cNvPr id="30" name="Shape 27"/>
+          <p:cNvSpPr/>
+          <p:nvPr/>
+        </p:nvSpPr>
+        <p:spPr>
+          <a:xfrm>
+            <a:off x="8509000" y="2489200"/>
+            <a:ext cx="6794500" cy="1397000"/>
+          </a:xfrm>
+          <a:prstGeom prst="rect">
+            <a:avLst/>
+          </a:prstGeom>
+          <a:noFill/>
+        </p:spPr>
+      </p:sp>
+      <p:sp>
+        <p:nvSpPr>
+          <p:cNvPr id="31" name="Text 28"/>
+          <p:cNvSpPr/>
+          <p:nvPr>
+            <p:custDataLst>
+              <p:tags r:id="rId9"/>
+            </p:custDataLst>
+          </p:nvPr>
+        </p:nvSpPr>
+        <p:spPr>
+          <a:xfrm>
+            <a:off x="8387080" y="2428240"/>
+            <a:ext cx="7038340" cy="1518920"/>
+          </a:xfrm>
+          <a:prstGeom prst="rect">
+            <a:avLst/>
+          </a:prstGeom>
+          <a:noFill/>
+        </p:spPr>
+        <p:txBody>
+          <a:bodyPr wrap="square" lIns="0" tIns="0" rIns="0" bIns="0" rtlCol="0" anchor="t"/>
+          <a:lstStyle/>
+          <a:p>
+            <a:pPr algn="l">
+              <a:lnSpc>
+                <a:spcPct val="160000"/>
+              </a:lnSpc>
+            </a:pPr>
+            <a:r>
+              <a:rPr lang="en-US" sz="1600" b="1" dirty="0">
+                <a:solidFill>
+                  <a:srgbClr val="444444"/>
+                </a:solidFill>
+                <a:latin typeface="Arial" panose="020B0604020202020204" pitchFamily="34" charset="0"/>
+                <a:ea typeface="Arial" panose="020B0604020202020204" pitchFamily="34" charset="-122"/>
+                <a:cs typeface="Arial" panose="020B0604020202020204" pitchFamily="34" charset="-120"/>
+              </a:rPr>
+              <a:t>机制：</a:t>
+            </a:r>
+            <a:r>
+              <a:rPr lang="en-US" sz="1600" dirty="0">
+                <a:solidFill>
+                  <a:srgbClr val="444444"/>
+                </a:solidFill>
+                <a:latin typeface="Arial" panose="020B0604020202020204" pitchFamily="34" charset="0"/>
+                <a:ea typeface="Arial" panose="020B0604020202020204" pitchFamily="34" charset="-122"/>
+                <a:cs typeface="Arial" panose="020B0604020202020204" pitchFamily="34" charset="-120"/>
+              </a:rPr>
+              <a:t>Agent-ID Token + Delegation Token + W3C VC</a:t>
+            </a:r>
+            <a:endParaRPr lang="en-US" sz="1600" dirty="0"/>
+          </a:p>
+          <a:p>
+            <a:pPr algn="l">
+              <a:lnSpc>
+                <a:spcPct val="160000"/>
+              </a:lnSpc>
+            </a:pPr>
+            <a:r>
+              <a:rPr lang="en-US" sz="1600" b="1" dirty="0">
+                <a:solidFill>
+                  <a:srgbClr val="444444"/>
+                </a:solidFill>
+                <a:latin typeface="Arial" panose="020B0604020202020204" pitchFamily="34" charset="0"/>
+                <a:ea typeface="Arial" panose="020B0604020202020204" pitchFamily="34" charset="-122"/>
+                <a:cs typeface="Arial" panose="020B0604020202020204" pitchFamily="34" charset="-120"/>
+              </a:rPr>
+              <a:t>创新：</a:t>
+            </a:r>
+            <a:r>
+              <a:rPr lang="en-US" sz="1600" dirty="0">
+                <a:solidFill>
+                  <a:srgbClr val="444444"/>
+                </a:solidFill>
+                <a:latin typeface="Arial" panose="020B0604020202020204" pitchFamily="34" charset="0"/>
+                <a:ea typeface="Arial" panose="020B0604020202020204" pitchFamily="34" charset="-122"/>
+                <a:cs typeface="Arial" panose="020B0604020202020204" pitchFamily="34" charset="-120"/>
+              </a:rPr>
+              <a:t>自然语言权限翻译 + 跨域多智能体相互认证</a:t>
+            </a:r>
+            <a:endParaRPr lang="en-US" sz="1600" dirty="0"/>
+          </a:p>
+          <a:p>
+            <a:pPr algn="l">
+              <a:lnSpc>
+                <a:spcPct val="160000"/>
+              </a:lnSpc>
+            </a:pPr>
+            <a:r>
+              <a:rPr lang="en-US" sz="1600" b="1" dirty="0">
+                <a:solidFill>
+                  <a:srgbClr val="444444"/>
+                </a:solidFill>
+                <a:latin typeface="Arial" panose="020B0604020202020204" pitchFamily="34" charset="0"/>
+                <a:ea typeface="Arial" panose="020B0604020202020204" pitchFamily="34" charset="-122"/>
+                <a:cs typeface="Arial" panose="020B0604020202020204" pitchFamily="34" charset="-120"/>
+              </a:rPr>
+              <a:t>意义：</a:t>
+            </a:r>
+            <a:r>
+              <a:rPr lang="en-US" sz="1600" dirty="0">
+                <a:solidFill>
+                  <a:srgbClr val="444444"/>
+                </a:solidFill>
+                <a:latin typeface="Arial" panose="020B0604020202020204" pitchFamily="34" charset="0"/>
+                <a:ea typeface="Arial" panose="020B0604020202020204" pitchFamily="34" charset="-122"/>
+                <a:cs typeface="Arial" panose="020B0604020202020204" pitchFamily="34" charset="-120"/>
+              </a:rPr>
+              <a:t>首次将Web身份基础设施与智能体委托需求系统性融合</a:t>
+            </a:r>
+            <a:endParaRPr lang="en-US" sz="1600" dirty="0"/>
+          </a:p>
+        </p:txBody>
+      </p:sp>
+      <p:sp>
+        <p:nvSpPr>
+          <p:cNvPr id="39" name="Shape 36"/>
+          <p:cNvSpPr/>
+          <p:nvPr>
+            <p:custDataLst>
+              <p:tags r:id="rId10"/>
+            </p:custDataLst>
+          </p:nvPr>
+        </p:nvSpPr>
+        <p:spPr>
+          <a:xfrm>
+            <a:off x="8318500" y="4254500"/>
+            <a:ext cx="7175500" cy="2032000"/>
+          </a:xfrm>
+          <a:prstGeom prst="roundRect">
+            <a:avLst>
+              <a:gd name="adj" fmla="val 5000"/>
+            </a:avLst>
+          </a:prstGeom>
+          <a:solidFill>
+            <a:srgbClr val="E8F4FD"/>
+          </a:solidFill>
+        </p:spPr>
+      </p:sp>
+      <p:sp>
+        <p:nvSpPr>
+          <p:cNvPr id="40" name="Shape 37"/>
+          <p:cNvSpPr/>
+          <p:nvPr/>
+        </p:nvSpPr>
+        <p:spPr>
+          <a:xfrm>
+            <a:off x="8509000" y="4356100"/>
+            <a:ext cx="406400" cy="330200"/>
+          </a:xfrm>
+          <a:prstGeom prst="rect">
+            <a:avLst/>
+          </a:prstGeom>
+          <a:noFill/>
+        </p:spPr>
+      </p:sp>
+      <p:sp>
+        <p:nvSpPr>
+          <p:cNvPr id="41" name="Text 38"/>
+          <p:cNvSpPr/>
+          <p:nvPr>
+            <p:custDataLst>
+              <p:tags r:id="rId11"/>
+            </p:custDataLst>
+          </p:nvPr>
+        </p:nvSpPr>
+        <p:spPr>
+          <a:xfrm>
+            <a:off x="8387080" y="4295140"/>
+            <a:ext cx="422275" cy="452120"/>
+          </a:xfrm>
+          <a:prstGeom prst="rect">
+            <a:avLst/>
+          </a:prstGeom>
+          <a:noFill/>
+        </p:spPr>
+        <p:txBody>
+          <a:bodyPr wrap="none" lIns="0" tIns="0" rIns="0" bIns="0" rtlCol="0" anchor="ctr"/>
+          <a:lstStyle/>
+          <a:p>
+            <a:pPr algn="ctr">
+              <a:lnSpc>
+                <a:spcPct val="120000"/>
+              </a:lnSpc>
+            </a:pPr>
+            <a:r>
+              <a:rPr lang="en-US" sz="2000" b="1" dirty="0">
+                <a:solidFill>
+                  <a:schemeClr val="tx1"/>
+                </a:solidFill>
+                <a:latin typeface="Arial" panose="020B0604020202020204" pitchFamily="34" charset="0"/>
+                <a:ea typeface="Arial" panose="020B0604020202020204" pitchFamily="34" charset="-122"/>
+                <a:cs typeface="Arial" panose="020B0604020202020204" pitchFamily="34" charset="-120"/>
+              </a:rPr>
+              <a:t>4</a:t>
+            </a:r>
+            <a:endParaRPr lang="en-US" sz="2000" b="1" dirty="0">
+              <a:solidFill>
+                <a:schemeClr val="tx1"/>
+              </a:solidFill>
+              <a:latin typeface="Arial" panose="020B0604020202020204" pitchFamily="34" charset="0"/>
+              <a:ea typeface="Arial" panose="020B0604020202020204" pitchFamily="34" charset="-122"/>
+              <a:cs typeface="Arial" panose="020B0604020202020204" pitchFamily="34" charset="-120"/>
+            </a:endParaRPr>
+          </a:p>
+        </p:txBody>
+      </p:sp>
+      <p:sp>
+        <p:nvSpPr>
+          <p:cNvPr id="42" name="Shape 39"/>
+          <p:cNvSpPr/>
+          <p:nvPr/>
+        </p:nvSpPr>
+        <p:spPr>
+          <a:xfrm>
+            <a:off x="8928100" y="4356100"/>
+            <a:ext cx="6350000" cy="330200"/>
+          </a:xfrm>
+          <a:prstGeom prst="rect">
+            <a:avLst/>
+          </a:prstGeom>
+          <a:noFill/>
+        </p:spPr>
+      </p:sp>
+      <p:sp>
+        <p:nvSpPr>
+          <p:cNvPr id="43" name="Text 40"/>
+          <p:cNvSpPr/>
+          <p:nvPr>
+            <p:custDataLst>
+              <p:tags r:id="rId12"/>
+            </p:custDataLst>
+          </p:nvPr>
+        </p:nvSpPr>
+        <p:spPr>
+          <a:xfrm>
+            <a:off x="8806180" y="4295140"/>
+            <a:ext cx="6593840" cy="452120"/>
+          </a:xfrm>
+          <a:prstGeom prst="rect">
+            <a:avLst/>
+          </a:prstGeom>
+          <a:noFill/>
+        </p:spPr>
+        <p:txBody>
+          <a:bodyPr wrap="none" lIns="0" tIns="0" rIns="0" bIns="0" rtlCol="0" anchor="ctr"/>
+          <a:lstStyle/>
+          <a:p>
+            <a:pPr algn="l">
+              <a:lnSpc>
+                <a:spcPct val="120000"/>
+              </a:lnSpc>
+            </a:pPr>
+            <a:r>
+              <a:rPr lang="en-US" sz="1600" b="1" dirty="0">
+                <a:solidFill>
+                  <a:schemeClr val="tx1"/>
+                </a:solidFill>
+                <a:latin typeface="Arial" panose="020B0604020202020204" pitchFamily="34" charset="0"/>
+                <a:ea typeface="Arial" panose="020B0604020202020204" pitchFamily="34" charset="-122"/>
+                <a:cs typeface="Arial" panose="020B0604020202020204" pitchFamily="34" charset="-120"/>
+              </a:rPr>
+              <a:t>Tallam — 授权传播问题 </a:t>
+            </a:r>
+            <a:r>
+              <a:rPr lang="en-US" sz="1600" b="1" baseline="30000" dirty="0">
+                <a:solidFill>
+                  <a:schemeClr val="tx1"/>
+                </a:solidFill>
+                <a:latin typeface="Arial" panose="020B0604020202020204" pitchFamily="34" charset="0"/>
+                <a:ea typeface="Arial" panose="020B0604020202020204" pitchFamily="34" charset="-122"/>
+                <a:cs typeface="Arial" panose="020B0604020202020204" pitchFamily="34" charset="-120"/>
+              </a:rPr>
+              <a:t>[30]</a:t>
+            </a:r>
+            <a:endParaRPr lang="en-US" sz="1600" b="1" baseline="30000" dirty="0">
+              <a:solidFill>
+                <a:schemeClr val="tx1"/>
+              </a:solidFill>
+              <a:latin typeface="Arial" panose="020B0604020202020204" pitchFamily="34" charset="0"/>
+              <a:ea typeface="Arial" panose="020B0604020202020204" pitchFamily="34" charset="-122"/>
+              <a:cs typeface="Arial" panose="020B0604020202020204" pitchFamily="34" charset="-120"/>
+            </a:endParaRPr>
+          </a:p>
+        </p:txBody>
+      </p:sp>
+      <p:sp>
+        <p:nvSpPr>
+          <p:cNvPr id="44" name="Shape 41"/>
+          <p:cNvSpPr/>
+          <p:nvPr/>
+        </p:nvSpPr>
+        <p:spPr>
+          <a:xfrm>
+            <a:off x="8509000" y="4737100"/>
+            <a:ext cx="6794500" cy="1397000"/>
+          </a:xfrm>
+          <a:prstGeom prst="rect">
+            <a:avLst/>
+          </a:prstGeom>
+          <a:noFill/>
+        </p:spPr>
+      </p:sp>
+      <p:sp>
+        <p:nvSpPr>
+          <p:cNvPr id="45" name="Text 42"/>
+          <p:cNvSpPr/>
+          <p:nvPr>
+            <p:custDataLst>
+              <p:tags r:id="rId13"/>
+            </p:custDataLst>
+          </p:nvPr>
+        </p:nvSpPr>
+        <p:spPr>
+          <a:xfrm>
+            <a:off x="8387080" y="4676140"/>
+            <a:ext cx="7038340" cy="1518920"/>
+          </a:xfrm>
+          <a:prstGeom prst="rect">
+            <a:avLst/>
+          </a:prstGeom>
+          <a:noFill/>
+        </p:spPr>
+        <p:txBody>
+          <a:bodyPr wrap="square" lIns="0" tIns="0" rIns="0" bIns="0" rtlCol="0" anchor="t"/>
+          <a:lstStyle/>
+          <a:p>
+            <a:pPr algn="l">
+              <a:lnSpc>
+                <a:spcPct val="160000"/>
+              </a:lnSpc>
+            </a:pPr>
+            <a:r>
+              <a:rPr lang="en-US" sz="1600" b="1" dirty="0">
+                <a:solidFill>
+                  <a:srgbClr val="444444"/>
+                </a:solidFill>
+                <a:latin typeface="Arial" panose="020B0604020202020204" pitchFamily="34" charset="0"/>
+                <a:ea typeface="Arial" panose="020B0604020202020204" pitchFamily="34" charset="-122"/>
+                <a:cs typeface="Arial" panose="020B0604020202020204" pitchFamily="34" charset="-120"/>
+              </a:rPr>
+              <a:t>问题：</a:t>
+            </a:r>
+            <a:r>
+              <a:rPr lang="en-US" sz="1600" dirty="0">
+                <a:solidFill>
+                  <a:srgbClr val="444444"/>
+                </a:solidFill>
+                <a:latin typeface="Arial" panose="020B0604020202020204" pitchFamily="34" charset="0"/>
+                <a:ea typeface="Arial" panose="020B0604020202020204" pitchFamily="34" charset="-122"/>
+                <a:cs typeface="Arial" panose="020B0604020202020204" pitchFamily="34" charset="-120"/>
+              </a:rPr>
+              <a:t>委托链中权限放大、混淆副手攻击、审计不可追溯</a:t>
+            </a:r>
+            <a:endParaRPr lang="en-US" sz="1600" dirty="0"/>
+          </a:p>
+          <a:p>
+            <a:pPr algn="l">
+              <a:lnSpc>
+                <a:spcPct val="160000"/>
+              </a:lnSpc>
+            </a:pPr>
+            <a:r>
+              <a:rPr lang="en-US" sz="1600" b="1" dirty="0">
+                <a:solidFill>
+                  <a:srgbClr val="444444"/>
+                </a:solidFill>
+                <a:latin typeface="Arial" panose="020B0604020202020204" pitchFamily="34" charset="0"/>
+                <a:ea typeface="Arial" panose="020B0604020202020204" pitchFamily="34" charset="-122"/>
+                <a:cs typeface="Arial" panose="020B0604020202020204" pitchFamily="34" charset="-120"/>
+              </a:rPr>
+              <a:t>发现：</a:t>
+            </a:r>
+            <a:r>
+              <a:rPr lang="en-US" sz="1600" dirty="0">
+                <a:solidFill>
+                  <a:srgbClr val="444444"/>
+                </a:solidFill>
+                <a:latin typeface="Arial" panose="020B0604020202020204" pitchFamily="34" charset="0"/>
+                <a:ea typeface="Arial" panose="020B0604020202020204" pitchFamily="34" charset="-122"/>
+                <a:cs typeface="Arial" panose="020B0604020202020204" pitchFamily="34" charset="-120"/>
+              </a:rPr>
+              <a:t>即使完美防御提示注入，仍存在结构性授权传播风险</a:t>
+            </a:r>
+            <a:endParaRPr lang="en-US" sz="1600" dirty="0"/>
+          </a:p>
+          <a:p>
+            <a:pPr algn="l">
+              <a:lnSpc>
+                <a:spcPct val="160000"/>
+              </a:lnSpc>
+            </a:pPr>
+            <a:r>
+              <a:rPr lang="en-US" sz="1600" b="1" dirty="0">
+                <a:solidFill>
+                  <a:srgbClr val="444444"/>
+                </a:solidFill>
+                <a:latin typeface="Arial" panose="020B0604020202020204" pitchFamily="34" charset="0"/>
+                <a:ea typeface="Arial" panose="020B0604020202020204" pitchFamily="34" charset="-122"/>
+                <a:cs typeface="Arial" panose="020B0604020202020204" pitchFamily="34" charset="-120"/>
+              </a:rPr>
+              <a:t>核心：</a:t>
+            </a:r>
+            <a:r>
+              <a:rPr lang="en-US" sz="1600" dirty="0">
+                <a:solidFill>
+                  <a:srgbClr val="444444"/>
+                </a:solidFill>
+                <a:latin typeface="Arial" panose="020B0604020202020204" pitchFamily="34" charset="0"/>
+                <a:ea typeface="Arial" panose="020B0604020202020204" pitchFamily="34" charset="-122"/>
+                <a:cs typeface="Arial" panose="020B0604020202020204" pitchFamily="34" charset="-120"/>
+              </a:rPr>
+              <a:t>权限单调衰减、身份可验证追溯、委托可撤销三大不变量</a:t>
+            </a:r>
+            <a:endParaRPr lang="en-US" sz="1600" dirty="0"/>
+          </a:p>
+        </p:txBody>
+      </p:sp>
+      <p:sp>
+        <p:nvSpPr>
+          <p:cNvPr id="46" name="Shape 43"/>
+          <p:cNvSpPr/>
+          <p:nvPr/>
+        </p:nvSpPr>
+        <p:spPr>
+          <a:xfrm>
+            <a:off x="762000" y="6540500"/>
+            <a:ext cx="14732000" cy="1879600"/>
+          </a:xfrm>
+          <a:prstGeom prst="roundRect">
+            <a:avLst>
+              <a:gd name="adj" fmla="val 3000"/>
+            </a:avLst>
+          </a:prstGeom>
+          <a:solidFill>
+            <a:srgbClr val="005C8F"/>
+          </a:solidFill>
+        </p:spPr>
+      </p:sp>
+      <p:sp>
+        <p:nvSpPr>
+          <p:cNvPr id="47" name="Shape 44"/>
+          <p:cNvSpPr/>
+          <p:nvPr/>
+        </p:nvSpPr>
+        <p:spPr>
+          <a:xfrm>
+            <a:off x="1016000" y="6667500"/>
+            <a:ext cx="14224000" cy="1651000"/>
+          </a:xfrm>
+          <a:prstGeom prst="rect">
+            <a:avLst/>
+          </a:prstGeom>
+          <a:noFill/>
+        </p:spPr>
+      </p:sp>
+      <p:sp>
+        <p:nvSpPr>
+          <p:cNvPr id="48" name="Text 45"/>
+          <p:cNvSpPr/>
+          <p:nvPr/>
+        </p:nvSpPr>
+        <p:spPr>
+          <a:xfrm>
+            <a:off x="894080" y="6606540"/>
+            <a:ext cx="14467840" cy="1772920"/>
+          </a:xfrm>
+          <a:prstGeom prst="rect">
+            <a:avLst/>
+          </a:prstGeom>
+          <a:noFill/>
+        </p:spPr>
+        <p:txBody>
+          <a:bodyPr wrap="square" lIns="0" tIns="0" rIns="0" bIns="0" rtlCol="0" anchor="t"/>
+          <a:lstStyle/>
+          <a:p>
+            <a:pPr algn="l">
+              <a:lnSpc>
+                <a:spcPct val="170000"/>
+              </a:lnSpc>
+            </a:pPr>
+            <a:r>
+              <a:rPr lang="en-US" sz="2000" b="1" dirty="0">
+                <a:solidFill>
+                  <a:srgbClr val="FFFFFF"/>
+                </a:solidFill>
+                <a:latin typeface="Arial" panose="020B0604020202020204" pitchFamily="34" charset="0"/>
+                <a:ea typeface="Arial" panose="020B0604020202020204" pitchFamily="34" charset="-122"/>
+                <a:cs typeface="Arial" panose="020B0604020202020204" pitchFamily="34" charset="-120"/>
+              </a:rPr>
+              <a:t>现有研究不足总结：</a:t>
+            </a:r>
+            <a:endParaRPr lang="en-US" sz="2000" dirty="0"/>
+          </a:p>
+          <a:p>
+            <a:pPr algn="l">
+              <a:lnSpc>
+                <a:spcPct val="170000"/>
+              </a:lnSpc>
+            </a:pPr>
+            <a:r>
+              <a:rPr lang="en-US" sz="2000" dirty="0">
+                <a:solidFill>
+                  <a:srgbClr val="FFFFFF"/>
+                </a:solidFill>
+                <a:latin typeface="Arial" panose="020B0604020202020204" pitchFamily="34" charset="0"/>
+                <a:ea typeface="Arial" panose="020B0604020202020204" pitchFamily="34" charset="-122"/>
+                <a:cs typeface="Arial" panose="020B0604020202020204" pitchFamily="34" charset="-120"/>
+              </a:rPr>
+              <a:t>1. 权限粒度仍停留在资源/操作类型层面，未精确到操作参数级（如限定邮件收件人地址、API参数范围）</a:t>
+            </a:r>
+            <a:endParaRPr lang="en-US" sz="2000" dirty="0"/>
+          </a:p>
+          <a:p>
+            <a:pPr algn="l">
+              <a:lnSpc>
+                <a:spcPct val="170000"/>
+              </a:lnSpc>
+            </a:pPr>
+            <a:r>
+              <a:rPr lang="en-US" sz="2000" dirty="0">
+                <a:solidFill>
+                  <a:srgbClr val="FFFFFF"/>
+                </a:solidFill>
+                <a:latin typeface="Arial" panose="020B0604020202020204" pitchFamily="34" charset="0"/>
+                <a:ea typeface="Arial" panose="020B0604020202020204" pitchFamily="34" charset="-122"/>
+                <a:cs typeface="Arial" panose="020B0604020202020204" pitchFamily="34" charset="-120"/>
+              </a:rPr>
+              <a:t>2. 缺乏对智能体当前任务、环境上下文的实时感知能力，无法支持上下文条件触发授权</a:t>
+            </a:r>
+            <a:endParaRPr lang="en-US" sz="2000" dirty="0"/>
+          </a:p>
+        </p:txBody>
+      </p:sp>
+      <p:sp>
+        <p:nvSpPr>
+          <p:cNvPr id="49" name="Shape 46"/>
+          <p:cNvSpPr/>
+          <p:nvPr/>
+        </p:nvSpPr>
+        <p:spPr>
+          <a:xfrm>
+            <a:off x="15240000" y="8636000"/>
+            <a:ext cx="635000" cy="381000"/>
+          </a:xfrm>
+          <a:prstGeom prst="rect">
+            <a:avLst/>
+          </a:prstGeom>
+          <a:noFill/>
+        </p:spPr>
+      </p:sp>
+      <p:sp>
+        <p:nvSpPr>
+          <p:cNvPr id="50" name="Text 47"/>
+          <p:cNvSpPr/>
+          <p:nvPr/>
+        </p:nvSpPr>
+        <p:spPr>
+          <a:xfrm>
+            <a:off x="15118080" y="8575040"/>
+            <a:ext cx="878840" cy="502920"/>
+          </a:xfrm>
+          <a:prstGeom prst="rect">
+            <a:avLst/>
+          </a:prstGeom>
+          <a:noFill/>
+        </p:spPr>
+        <p:txBody>
+          <a:bodyPr wrap="none" lIns="0" tIns="0" rIns="0" bIns="0" rtlCol="0" anchor="ctr"/>
+          <a:lstStyle/>
+          <a:p>
+            <a:pPr algn="r">
+              <a:lnSpc>
+                <a:spcPct val="120000"/>
+              </a:lnSpc>
+            </a:pPr>
+            <a:r>
+              <a:rPr lang="en-US" sz="1800" dirty="0">
+                <a:solidFill>
+                  <a:srgbClr val="666666"/>
+                </a:solidFill>
+                <a:latin typeface="Arial" panose="020B0604020202020204" pitchFamily="34" charset="0"/>
+                <a:ea typeface="Arial" panose="020B0604020202020204" pitchFamily="34" charset="-122"/>
+                <a:cs typeface="Arial" panose="020B0604020202020204" pitchFamily="34" charset="-120"/>
+              </a:rPr>
+              <a:t>12</a:t>
+            </a:r>
+            <a:endParaRPr lang="en-US" sz="1800" dirty="0"/>
+          </a:p>
+        </p:txBody>
+      </p:sp>
+      <p:sp>
+        <p:nvSpPr>
+          <p:cNvPr id="51" name="Shape 15"/>
+          <p:cNvSpPr/>
+          <p:nvPr>
+            <p:custDataLst>
+              <p:tags r:id="rId14"/>
+            </p:custDataLst>
+          </p:nvPr>
+        </p:nvSpPr>
+        <p:spPr>
+          <a:xfrm>
+            <a:off x="762000" y="4254500"/>
+            <a:ext cx="7175500" cy="2032000"/>
+          </a:xfrm>
+          <a:prstGeom prst="roundRect">
+            <a:avLst>
+              <a:gd name="adj" fmla="val 5000"/>
+            </a:avLst>
+          </a:prstGeom>
+          <a:solidFill>
+            <a:srgbClr val="E8F4FD"/>
+          </a:solidFill>
+        </p:spPr>
+      </p:sp>
+      <p:sp>
+        <p:nvSpPr>
+          <p:cNvPr id="52" name="Shape 30"/>
+          <p:cNvSpPr/>
+          <p:nvPr/>
+        </p:nvSpPr>
+        <p:spPr>
+          <a:xfrm>
+            <a:off x="952500" y="4356100"/>
+            <a:ext cx="406400" cy="330200"/>
+          </a:xfrm>
+          <a:prstGeom prst="rect">
+            <a:avLst/>
+          </a:prstGeom>
+          <a:noFill/>
+        </p:spPr>
+      </p:sp>
+      <p:sp>
+        <p:nvSpPr>
+          <p:cNvPr id="53" name="Text 31"/>
+          <p:cNvSpPr/>
+          <p:nvPr>
+            <p:custDataLst>
+              <p:tags r:id="rId15"/>
+            </p:custDataLst>
+          </p:nvPr>
+        </p:nvSpPr>
+        <p:spPr>
+          <a:xfrm>
+            <a:off x="830580" y="4295140"/>
+            <a:ext cx="558800" cy="452120"/>
+          </a:xfrm>
+          <a:prstGeom prst="rect">
+            <a:avLst/>
+          </a:prstGeom>
+          <a:noFill/>
+        </p:spPr>
+        <p:txBody>
+          <a:bodyPr wrap="none" lIns="0" tIns="0" rIns="0" bIns="0" rtlCol="0" anchor="ctr"/>
+          <a:lstStyle/>
+          <a:p>
+            <a:pPr algn="ctr">
+              <a:lnSpc>
+                <a:spcPct val="120000"/>
+              </a:lnSpc>
+            </a:pPr>
+            <a:r>
+              <a:rPr lang="en-US" sz="2000" b="1" dirty="0">
+                <a:solidFill>
+                  <a:schemeClr val="tx1"/>
+                </a:solidFill>
+                <a:latin typeface="Arial" panose="020B0604020202020204" pitchFamily="34" charset="0"/>
+                <a:ea typeface="Arial" panose="020B0604020202020204" pitchFamily="34" charset="-122"/>
+                <a:cs typeface="Arial" panose="020B0604020202020204" pitchFamily="34" charset="-120"/>
+              </a:rPr>
+              <a:t>3</a:t>
+            </a:r>
+            <a:endParaRPr lang="en-US" sz="2000" b="1" dirty="0">
+              <a:solidFill>
+                <a:schemeClr val="tx1"/>
+              </a:solidFill>
+              <a:latin typeface="Arial" panose="020B0604020202020204" pitchFamily="34" charset="0"/>
+              <a:ea typeface="Arial" panose="020B0604020202020204" pitchFamily="34" charset="-122"/>
+              <a:cs typeface="Arial" panose="020B0604020202020204" pitchFamily="34" charset="-120"/>
+            </a:endParaRPr>
+          </a:p>
+        </p:txBody>
+      </p:sp>
+      <p:sp>
+        <p:nvSpPr>
+          <p:cNvPr id="54" name="Shape 32"/>
+          <p:cNvSpPr/>
+          <p:nvPr/>
+        </p:nvSpPr>
+        <p:spPr>
+          <a:xfrm>
+            <a:off x="1371600" y="4356100"/>
+            <a:ext cx="6350000" cy="330200"/>
+          </a:xfrm>
+          <a:prstGeom prst="rect">
+            <a:avLst/>
+          </a:prstGeom>
+          <a:noFill/>
+        </p:spPr>
+      </p:sp>
+      <p:sp>
+        <p:nvSpPr>
+          <p:cNvPr id="55" name="Text 33"/>
+          <p:cNvSpPr/>
+          <p:nvPr>
+            <p:custDataLst>
+              <p:tags r:id="rId16"/>
+            </p:custDataLst>
+          </p:nvPr>
+        </p:nvSpPr>
+        <p:spPr>
+          <a:xfrm>
+            <a:off x="1249680" y="4295140"/>
+            <a:ext cx="6593840" cy="452120"/>
+          </a:xfrm>
+          <a:prstGeom prst="rect">
+            <a:avLst/>
+          </a:prstGeom>
+          <a:noFill/>
+        </p:spPr>
+        <p:txBody>
+          <a:bodyPr wrap="none" lIns="0" tIns="0" rIns="0" bIns="0" rtlCol="0" anchor="ctr"/>
+          <a:lstStyle/>
+          <a:p>
+            <a:pPr algn="l">
+              <a:lnSpc>
+                <a:spcPct val="120000"/>
+              </a:lnSpc>
+            </a:pPr>
+            <a:r>
+              <a:rPr lang="en-US" sz="1600" b="1" dirty="0">
+                <a:solidFill>
+                  <a:schemeClr val="tx1"/>
+                </a:solidFill>
+                <a:latin typeface="Arial" panose="020B0604020202020204" pitchFamily="34" charset="0"/>
+                <a:ea typeface="Arial" panose="020B0604020202020204" pitchFamily="34" charset="-122"/>
+                <a:cs typeface="Arial" panose="020B0604020202020204" pitchFamily="34" charset="-120"/>
+              </a:rPr>
+              <a:t>Fleming等 — 任务级动态授权框架 </a:t>
+            </a:r>
+            <a:r>
+              <a:rPr lang="en-US" sz="1600" b="1" baseline="30000" dirty="0">
+                <a:solidFill>
+                  <a:schemeClr val="tx1"/>
+                </a:solidFill>
+                <a:latin typeface="Arial" panose="020B0604020202020204" pitchFamily="34" charset="0"/>
+                <a:ea typeface="Arial" panose="020B0604020202020204" pitchFamily="34" charset="-122"/>
+                <a:cs typeface="Arial" panose="020B0604020202020204" pitchFamily="34" charset="-120"/>
+              </a:rPr>
+              <a:t>[36]</a:t>
+            </a:r>
+            <a:endParaRPr lang="en-US" sz="1600" b="1" baseline="30000" dirty="0">
+              <a:solidFill>
+                <a:schemeClr val="tx1"/>
+              </a:solidFill>
+              <a:latin typeface="Arial" panose="020B0604020202020204" pitchFamily="34" charset="0"/>
+              <a:ea typeface="Arial" panose="020B0604020202020204" pitchFamily="34" charset="-122"/>
+              <a:cs typeface="Arial" panose="020B0604020202020204" pitchFamily="34" charset="-120"/>
+            </a:endParaRPr>
+          </a:p>
+        </p:txBody>
+      </p:sp>
+      <p:sp>
+        <p:nvSpPr>
+          <p:cNvPr id="56" name="Shape 34"/>
+          <p:cNvSpPr/>
+          <p:nvPr/>
+        </p:nvSpPr>
+        <p:spPr>
+          <a:xfrm>
+            <a:off x="952500" y="4737100"/>
+            <a:ext cx="6794500" cy="1397000"/>
+          </a:xfrm>
+          <a:prstGeom prst="rect">
+            <a:avLst/>
+          </a:prstGeom>
+          <a:noFill/>
+        </p:spPr>
+      </p:sp>
+      <p:sp>
+        <p:nvSpPr>
+          <p:cNvPr id="57" name="Text 35"/>
+          <p:cNvSpPr/>
+          <p:nvPr>
+            <p:custDataLst>
+              <p:tags r:id="rId17"/>
+            </p:custDataLst>
+          </p:nvPr>
+        </p:nvSpPr>
+        <p:spPr>
+          <a:xfrm>
+            <a:off x="894080" y="4737100"/>
+            <a:ext cx="6974840" cy="1457960"/>
+          </a:xfrm>
+          <a:prstGeom prst="rect">
+            <a:avLst/>
+          </a:prstGeom>
+          <a:noFill/>
+        </p:spPr>
+        <p:txBody>
+          <a:bodyPr wrap="square" lIns="0" tIns="0" rIns="0" bIns="0" rtlCol="0" anchor="t"/>
+          <a:lstStyle/>
+          <a:p>
+            <a:pPr algn="l">
+              <a:lnSpc>
+                <a:spcPct val="160000"/>
+              </a:lnSpc>
+            </a:pPr>
+            <a:r>
+              <a:rPr lang="en-US" sz="1600" b="1" dirty="0">
+                <a:solidFill>
+                  <a:srgbClr val="444444"/>
+                </a:solidFill>
+                <a:latin typeface="Arial" panose="020B0604020202020204" pitchFamily="34" charset="0"/>
+                <a:ea typeface="Arial" panose="020B0604020202020204" pitchFamily="34" charset="-122"/>
+                <a:cs typeface="Arial" panose="020B0604020202020204" pitchFamily="34" charset="-120"/>
+              </a:rPr>
+              <a:t>方法：</a:t>
+            </a:r>
+            <a:r>
+              <a:rPr lang="en-US" sz="1600" dirty="0">
+                <a:solidFill>
+                  <a:srgbClr val="444444"/>
+                </a:solidFill>
+                <a:latin typeface="Arial" panose="020B0604020202020204" pitchFamily="34" charset="0"/>
+                <a:ea typeface="Arial" panose="020B0604020202020204" pitchFamily="34" charset="-122"/>
+                <a:cs typeface="Arial" panose="020B0604020202020204" pitchFamily="34" charset="-120"/>
+              </a:rPr>
+              <a:t>资源风险评分 + 模型不确定性估计 + LLM策略合成</a:t>
+            </a:r>
+            <a:endParaRPr lang="en-US" sz="1600" dirty="0"/>
+          </a:p>
+          <a:p>
+            <a:pPr algn="l">
+              <a:lnSpc>
+                <a:spcPct val="160000"/>
+              </a:lnSpc>
+            </a:pPr>
+            <a:r>
+              <a:rPr lang="en-US" sz="1600" b="1" dirty="0">
+                <a:solidFill>
+                  <a:srgbClr val="444444"/>
+                </a:solidFill>
+                <a:latin typeface="Arial" panose="020B0604020202020204" pitchFamily="34" charset="0"/>
+                <a:ea typeface="Arial" panose="020B0604020202020204" pitchFamily="34" charset="-122"/>
+                <a:cs typeface="Arial" panose="020B0604020202020204" pitchFamily="34" charset="-120"/>
+              </a:rPr>
+              <a:t>特点：</a:t>
+            </a:r>
+            <a:r>
+              <a:rPr lang="en-US" sz="1600" dirty="0">
+                <a:solidFill>
+                  <a:srgbClr val="444444"/>
+                </a:solidFill>
+                <a:latin typeface="Arial" panose="020B0604020202020204" pitchFamily="34" charset="0"/>
+                <a:ea typeface="Arial" panose="020B0604020202020204" pitchFamily="34" charset="-122"/>
+                <a:cs typeface="Arial" panose="020B0604020202020204" pitchFamily="34" charset="-120"/>
+              </a:rPr>
+              <a:t>基于任务语义自动合成最小权限策略，实时适应任务演化</a:t>
+            </a:r>
+            <a:endParaRPr lang="en-US" sz="1600" dirty="0"/>
+          </a:p>
+          <a:p>
+            <a:pPr algn="l">
+              <a:lnSpc>
+                <a:spcPct val="160000"/>
+              </a:lnSpc>
+            </a:pPr>
+            <a:r>
+              <a:rPr lang="en-US" sz="1600" b="1" dirty="0">
+                <a:solidFill>
+                  <a:srgbClr val="444444"/>
+                </a:solidFill>
+                <a:latin typeface="Arial" panose="020B0604020202020204" pitchFamily="34" charset="0"/>
+                <a:ea typeface="Arial" panose="020B0604020202020204" pitchFamily="34" charset="-122"/>
+                <a:cs typeface="Arial" panose="020B0604020202020204" pitchFamily="34" charset="-120"/>
+              </a:rPr>
+              <a:t>局限：</a:t>
+            </a:r>
+            <a:r>
+              <a:rPr lang="en-US" sz="1600" dirty="0">
+                <a:solidFill>
+                  <a:srgbClr val="444444"/>
+                </a:solidFill>
+                <a:latin typeface="Arial" panose="020B0604020202020204" pitchFamily="34" charset="0"/>
+                <a:ea typeface="Arial" panose="020B0604020202020204" pitchFamily="34" charset="-122"/>
+                <a:cs typeface="Arial" panose="020B0604020202020204" pitchFamily="34" charset="-120"/>
+              </a:rPr>
+              <a:t>LLM可能幻觉策略，静态风险评分不够灵活</a:t>
+            </a:r>
+            <a:endParaRPr lang="en-US" sz="1600" dirty="0"/>
+          </a:p>
+        </p:txBody>
+      </p:sp>
+    </p:spTree>
+  </p:cSld>
+  <p:clrMapOvr>
+    <a:masterClrMapping/>
+  </p:clrMapOvr>
+  <p:transition>
+    <p:fade/>
+  </p:transition>
+</p:sld>
+</file>
+
+<file path=ppt/slides/slide5.xml><?xml version="1.0" encoding="utf-8"?>
+<p:sld xmlns:a="http://schemas.openxmlformats.org/drawingml/2006/main" xmlns:r="http://schemas.openxmlformats.org/officeDocument/2006/relationships" xmlns:p="http://schemas.openxmlformats.org/presentationml/2006/main">
+  <p:cSld>
+    <p:spTree>
+      <p:nvGrpSpPr>
+        <p:cNvPr id="1" name=""/>
+        <p:cNvGrpSpPr/>
+        <p:nvPr/>
+      </p:nvGrpSpPr>
+      <p:grpSpPr>
+        <a:xfrm>
+          <a:off x="0" y="0"/>
+          <a:ext cx="0" cy="0"/>
+          <a:chOff x="0" y="0"/>
+          <a:chExt cx="0" cy="0"/>
+        </a:xfrm>
+      </p:grpSpPr>
+      <p:sp>
+        <p:nvSpPr>
+          <p:cNvPr id="2" name="Shape 0"/>
+          <p:cNvSpPr/>
+          <p:nvPr/>
+        </p:nvSpPr>
+        <p:spPr>
+          <a:xfrm>
+            <a:off x="2219558" y="893"/>
+            <a:ext cx="2895035" cy="962504"/>
+          </a:xfrm>
+          <a:prstGeom prst="rect">
+            <a:avLst/>
+          </a:prstGeom>
+          <a:solidFill>
+            <a:srgbClr val="F2F2F2"/>
+          </a:solidFill>
+          <a:ln w="12700">
+            <a:solidFill>
+              <a:srgbClr val="F2F2F2"/>
+            </a:solidFill>
+            <a:prstDash val="solid"/>
+          </a:ln>
+        </p:spPr>
+      </p:sp>
+      <p:sp>
+        <p:nvSpPr>
+          <p:cNvPr id="3" name="Shape 1"/>
+          <p:cNvSpPr/>
+          <p:nvPr/>
+        </p:nvSpPr>
+        <p:spPr>
+          <a:xfrm>
+            <a:off x="5161161" y="36"/>
+            <a:ext cx="2590294" cy="962504"/>
+          </a:xfrm>
+          <a:prstGeom prst="rect">
+            <a:avLst/>
+          </a:prstGeom>
+          <a:solidFill>
+            <a:srgbClr val="04579A"/>
+          </a:solidFill>
+          <a:ln w="12700">
+            <a:solidFill>
+              <a:srgbClr val="04579A"/>
+            </a:solidFill>
+            <a:prstDash val="solid"/>
+          </a:ln>
+        </p:spPr>
+      </p:sp>
+      <p:sp>
+        <p:nvSpPr>
+          <p:cNvPr id="4" name="Shape 2"/>
+          <p:cNvSpPr/>
+          <p:nvPr/>
+        </p:nvSpPr>
+        <p:spPr>
+          <a:xfrm>
+            <a:off x="7814974" y="36"/>
+            <a:ext cx="4113996" cy="962504"/>
+          </a:xfrm>
+          <a:prstGeom prst="rect">
+            <a:avLst/>
+          </a:prstGeom>
+          <a:solidFill>
+            <a:srgbClr val="F2F2F2"/>
+          </a:solidFill>
+        </p:spPr>
+      </p:sp>
+      <p:sp>
+        <p:nvSpPr>
+          <p:cNvPr id="5" name="Shape 3"/>
+          <p:cNvSpPr/>
+          <p:nvPr/>
+        </p:nvSpPr>
+        <p:spPr>
+          <a:xfrm>
+            <a:off x="11968682" y="893"/>
+            <a:ext cx="4284175" cy="961551"/>
+          </a:xfrm>
+          <a:prstGeom prst="rect">
+            <a:avLst/>
+          </a:prstGeom>
+          <a:solidFill>
+            <a:srgbClr val="F2F2F2"/>
+          </a:solidFill>
+        </p:spPr>
+      </p:sp>
+      <p:sp>
+        <p:nvSpPr>
+          <p:cNvPr id="6" name="Shape 4"/>
+          <p:cNvSpPr/>
+          <p:nvPr/>
+        </p:nvSpPr>
+        <p:spPr>
+          <a:xfrm>
+            <a:off x="2282982" y="204021"/>
+            <a:ext cx="2768091" cy="507869"/>
+          </a:xfrm>
+          <a:prstGeom prst="rect">
+            <a:avLst/>
+          </a:prstGeom>
+          <a:noFill/>
+        </p:spPr>
+      </p:sp>
+      <p:sp>
+        <p:nvSpPr>
+          <p:cNvPr id="7" name="Shape 5"/>
+          <p:cNvSpPr/>
+          <p:nvPr/>
+        </p:nvSpPr>
+        <p:spPr>
+          <a:xfrm>
+            <a:off x="2161086" y="143073"/>
+            <a:ext cx="3011883" cy="629765"/>
+          </a:xfrm>
+          <a:prstGeom prst="rect">
+            <a:avLst/>
+          </a:prstGeom>
+          <a:noFill/>
+        </p:spPr>
+      </p:sp>
+      <p:sp>
+        <p:nvSpPr>
+          <p:cNvPr id="8" name="Text 6"/>
+          <p:cNvSpPr/>
+          <p:nvPr/>
+        </p:nvSpPr>
+        <p:spPr>
+          <a:xfrm>
+            <a:off x="2069664" y="97362"/>
+            <a:ext cx="3194728" cy="721187"/>
+          </a:xfrm>
+          <a:prstGeom prst="rect">
+            <a:avLst/>
+          </a:prstGeom>
+          <a:noFill/>
+        </p:spPr>
+        <p:txBody>
+          <a:bodyPr wrap="none" lIns="0" tIns="0" rIns="0" bIns="0" rtlCol="0" anchor="ctr"/>
+          <a:lstStyle/>
+          <a:p>
+            <a:pPr algn="ctr">
+              <a:lnSpc>
+                <a:spcPct val="120000"/>
+              </a:lnSpc>
+            </a:pPr>
+            <a:r>
+              <a:rPr lang="en-US" sz="2000" dirty="0">
+                <a:solidFill>
+                  <a:srgbClr val="333333"/>
+                </a:solidFill>
+                <a:latin typeface="Arial" panose="020B0604020202020204" pitchFamily="34" charset="0"/>
+                <a:ea typeface="Arial" panose="020B0604020202020204" pitchFamily="34" charset="-122"/>
+                <a:cs typeface="Arial" panose="020B0604020202020204" pitchFamily="34" charset="-120"/>
+              </a:rPr>
+              <a:t>选题背景及意义</a:t>
+            </a:r>
+            <a:endParaRPr lang="en-US" sz="2000" dirty="0"/>
+          </a:p>
+        </p:txBody>
+      </p:sp>
+      <p:sp>
+        <p:nvSpPr>
+          <p:cNvPr id="9" name="Shape 7"/>
+          <p:cNvSpPr/>
+          <p:nvPr/>
+        </p:nvSpPr>
+        <p:spPr>
+          <a:xfrm>
+            <a:off x="5224680" y="204021"/>
+            <a:ext cx="2463351" cy="507869"/>
+          </a:xfrm>
+          <a:prstGeom prst="rect">
+            <a:avLst/>
+          </a:prstGeom>
+          <a:noFill/>
+        </p:spPr>
+      </p:sp>
+      <p:sp>
+        <p:nvSpPr>
+          <p:cNvPr id="10" name="Shape 8"/>
+          <p:cNvSpPr/>
+          <p:nvPr/>
+        </p:nvSpPr>
+        <p:spPr>
+          <a:xfrm>
+            <a:off x="5102784" y="143073"/>
+            <a:ext cx="2707143" cy="629765"/>
+          </a:xfrm>
+          <a:prstGeom prst="rect">
+            <a:avLst/>
+          </a:prstGeom>
+          <a:noFill/>
+        </p:spPr>
+      </p:sp>
+      <p:sp>
+        <p:nvSpPr>
+          <p:cNvPr id="11" name="Text 9"/>
+          <p:cNvSpPr/>
+          <p:nvPr/>
+        </p:nvSpPr>
+        <p:spPr>
+          <a:xfrm>
+            <a:off x="5011362" y="97362"/>
+            <a:ext cx="2889987" cy="721187"/>
+          </a:xfrm>
+          <a:prstGeom prst="rect">
+            <a:avLst/>
+          </a:prstGeom>
+          <a:noFill/>
+        </p:spPr>
+        <p:txBody>
+          <a:bodyPr wrap="none" lIns="0" tIns="0" rIns="0" bIns="0" rtlCol="0" anchor="ctr"/>
+          <a:lstStyle/>
+          <a:p>
+            <a:pPr algn="ctr">
+              <a:lnSpc>
+                <a:spcPct val="120000"/>
+              </a:lnSpc>
+            </a:pPr>
+            <a:r>
+              <a:rPr lang="en-US" sz="2000" dirty="0">
+                <a:solidFill>
+                  <a:srgbClr val="FFFFFF"/>
+                </a:solidFill>
+                <a:latin typeface="Arial" panose="020B0604020202020204" pitchFamily="34" charset="0"/>
+                <a:ea typeface="Arial" panose="020B0604020202020204" pitchFamily="34" charset="-122"/>
+                <a:cs typeface="Arial" panose="020B0604020202020204" pitchFamily="34" charset="-120"/>
+              </a:rPr>
+              <a:t>国内外研究现状</a:t>
+            </a:r>
+            <a:endParaRPr lang="en-US" sz="2000" dirty="0"/>
+          </a:p>
+        </p:txBody>
+      </p:sp>
+      <p:sp>
+        <p:nvSpPr>
+          <p:cNvPr id="12" name="Shape 10"/>
+          <p:cNvSpPr/>
+          <p:nvPr/>
+        </p:nvSpPr>
+        <p:spPr>
+          <a:xfrm>
+            <a:off x="7878399" y="204021"/>
+            <a:ext cx="3987053" cy="507869"/>
+          </a:xfrm>
+          <a:prstGeom prst="rect">
+            <a:avLst/>
+          </a:prstGeom>
+          <a:noFill/>
+        </p:spPr>
+      </p:sp>
+      <p:sp>
+        <p:nvSpPr>
+          <p:cNvPr id="13" name="Shape 11"/>
+          <p:cNvSpPr/>
+          <p:nvPr/>
+        </p:nvSpPr>
+        <p:spPr>
+          <a:xfrm>
+            <a:off x="7756502" y="143073"/>
+            <a:ext cx="4230845" cy="629765"/>
+          </a:xfrm>
+          <a:prstGeom prst="rect">
+            <a:avLst/>
+          </a:prstGeom>
+          <a:noFill/>
+        </p:spPr>
+      </p:sp>
+      <p:sp>
+        <p:nvSpPr>
+          <p:cNvPr id="14" name="Text 12"/>
+          <p:cNvSpPr/>
+          <p:nvPr/>
+        </p:nvSpPr>
+        <p:spPr>
+          <a:xfrm>
+            <a:off x="7665080" y="97362"/>
+            <a:ext cx="4413690" cy="721187"/>
+          </a:xfrm>
+          <a:prstGeom prst="rect">
+            <a:avLst/>
+          </a:prstGeom>
+          <a:noFill/>
+        </p:spPr>
+        <p:txBody>
+          <a:bodyPr wrap="none" lIns="0" tIns="0" rIns="0" bIns="0" rtlCol="0" anchor="ctr"/>
+          <a:lstStyle/>
+          <a:p>
+            <a:pPr algn="ctr">
+              <a:lnSpc>
+                <a:spcPct val="120000"/>
+              </a:lnSpc>
+            </a:pPr>
+            <a:r>
+              <a:rPr lang="en-US" sz="2000" dirty="0">
+                <a:solidFill>
+                  <a:srgbClr val="333333"/>
+                </a:solidFill>
+                <a:latin typeface="Arial" panose="020B0604020202020204" pitchFamily="34" charset="0"/>
+                <a:ea typeface="Arial" panose="020B0604020202020204" pitchFamily="34" charset="-122"/>
+                <a:cs typeface="Arial" panose="020B0604020202020204" pitchFamily="34" charset="-120"/>
+              </a:rPr>
+              <a:t>主要研究内容及预期目标</a:t>
+            </a:r>
+            <a:endParaRPr lang="en-US" sz="2000" dirty="0"/>
+          </a:p>
+        </p:txBody>
+      </p:sp>
+      <p:sp>
+        <p:nvSpPr>
+          <p:cNvPr id="15" name="Shape 13"/>
+          <p:cNvSpPr/>
+          <p:nvPr/>
+        </p:nvSpPr>
+        <p:spPr>
+          <a:xfrm>
+            <a:off x="12032202" y="204021"/>
+            <a:ext cx="4157136" cy="507869"/>
+          </a:xfrm>
+          <a:prstGeom prst="rect">
+            <a:avLst/>
+          </a:prstGeom>
+          <a:noFill/>
+        </p:spPr>
+      </p:sp>
+      <p:sp>
+        <p:nvSpPr>
+          <p:cNvPr id="16" name="Shape 14"/>
+          <p:cNvSpPr/>
+          <p:nvPr/>
+        </p:nvSpPr>
+        <p:spPr>
+          <a:xfrm>
+            <a:off x="11910306" y="143073"/>
+            <a:ext cx="4400929" cy="629765"/>
+          </a:xfrm>
+          <a:prstGeom prst="rect">
+            <a:avLst/>
+          </a:prstGeom>
+          <a:noFill/>
+        </p:spPr>
+      </p:sp>
+      <p:sp>
+        <p:nvSpPr>
+          <p:cNvPr id="17" name="Text 15"/>
+          <p:cNvSpPr/>
+          <p:nvPr/>
+        </p:nvSpPr>
+        <p:spPr>
+          <a:xfrm>
+            <a:off x="11818883" y="97362"/>
+            <a:ext cx="4583773" cy="721187"/>
+          </a:xfrm>
+          <a:prstGeom prst="rect">
+            <a:avLst/>
+          </a:prstGeom>
+          <a:noFill/>
+        </p:spPr>
+        <p:txBody>
+          <a:bodyPr wrap="none" lIns="0" tIns="0" rIns="0" bIns="0" rtlCol="0" anchor="ctr"/>
+          <a:lstStyle/>
+          <a:p>
+            <a:pPr algn="ctr">
+              <a:lnSpc>
+                <a:spcPct val="120000"/>
+              </a:lnSpc>
+            </a:pPr>
+            <a:r>
+              <a:rPr lang="en-US" sz="2000" dirty="0">
+                <a:solidFill>
+                  <a:srgbClr val="333333"/>
+                </a:solidFill>
+                <a:latin typeface="Arial" panose="020B0604020202020204" pitchFamily="34" charset="0"/>
+                <a:ea typeface="Arial" panose="020B0604020202020204" pitchFamily="34" charset="-122"/>
+                <a:cs typeface="Arial" panose="020B0604020202020204" pitchFamily="34" charset="-120"/>
+              </a:rPr>
+              <a:t>工作计划与进度安排</a:t>
+            </a:r>
+            <a:endParaRPr lang="en-US" sz="2000" dirty="0"/>
+          </a:p>
+        </p:txBody>
+      </p:sp>
+      <p:pic>
+        <p:nvPicPr>
+          <p:cNvPr id="18" name="Image 0" descr="https://kimi-img.moonshot.cn/pub/slides/okc/flfuysioo4gzm/mnt/agents/output/temp3_pptd/images/image_1.jpg"/>
+          <p:cNvPicPr>
+            <a:picLocks noChangeAspect="1"/>
+          </p:cNvPicPr>
+          <p:nvPr/>
+        </p:nvPicPr>
+        <p:blipFill>
+          <a:blip r:embed="rId1"/>
+          <a:srcRect l="5060" r="29000"/>
+          <a:stretch>
+            <a:fillRect/>
+          </a:stretch>
+        </p:blipFill>
+        <p:spPr>
+          <a:xfrm>
+            <a:off x="544343" y="141454"/>
+            <a:ext cx="1273149" cy="745757"/>
+          </a:xfrm>
+          <a:prstGeom prst="rect">
+            <a:avLst/>
+          </a:prstGeom>
+        </p:spPr>
+      </p:pic>
+      <p:sp>
+        <p:nvSpPr>
+          <p:cNvPr id="19" name="Shape 16"/>
+          <p:cNvSpPr/>
+          <p:nvPr/>
+        </p:nvSpPr>
+        <p:spPr>
+          <a:xfrm rot="10800000">
+            <a:off x="6378313" y="962444"/>
+            <a:ext cx="389401" cy="304740"/>
+          </a:xfrm>
+          <a:prstGeom prst="triangle">
+            <a:avLst>
+              <a:gd name="adj" fmla="val 50000"/>
+            </a:avLst>
+          </a:prstGeom>
+          <a:solidFill>
+            <a:srgbClr val="04579A"/>
+          </a:solidFill>
+        </p:spPr>
+      </p:sp>
+      <p:sp>
+        <p:nvSpPr>
+          <p:cNvPr id="20" name="Text 17"/>
+          <p:cNvSpPr/>
+          <p:nvPr/>
+        </p:nvSpPr>
+        <p:spPr>
+          <a:xfrm>
+            <a:off x="571388" y="1191285"/>
+            <a:ext cx="9523140" cy="619004"/>
+          </a:xfrm>
+          <a:prstGeom prst="rect">
+            <a:avLst/>
+          </a:prstGeom>
+          <a:noFill/>
+        </p:spPr>
+        <p:txBody>
+          <a:bodyPr wrap="none" lIns="0" tIns="0" rIns="0" bIns="0" rtlCol="0" anchor="ctr"/>
+          <a:lstStyle/>
+          <a:p>
+            <a:pPr algn="l">
+              <a:lnSpc>
+                <a:spcPct val="120000"/>
+              </a:lnSpc>
+            </a:pPr>
+            <a:r>
+              <a:rPr lang="en-US" sz="3150" b="1" dirty="0">
+                <a:solidFill>
+                  <a:srgbClr val="04579A"/>
+                </a:solidFill>
+                <a:latin typeface="Arial" panose="020B0604020202020204" pitchFamily="34" charset="0"/>
+                <a:ea typeface="Arial" panose="020B0604020202020204" pitchFamily="34" charset="-122"/>
+                <a:cs typeface="Arial" panose="020B0604020202020204" pitchFamily="34" charset="-120"/>
+              </a:rPr>
+              <a:t>现有研究不足总结</a:t>
+            </a:r>
+            <a:endParaRPr lang="en-US" sz="3150" dirty="0"/>
+          </a:p>
+        </p:txBody>
+      </p:sp>
+      <p:sp>
+        <p:nvSpPr>
+          <p:cNvPr id="54" name="Text 51"/>
+          <p:cNvSpPr/>
+          <p:nvPr/>
+        </p:nvSpPr>
+        <p:spPr>
+          <a:xfrm>
+            <a:off x="857083" y="7667021"/>
+            <a:ext cx="14541835" cy="1047545"/>
+          </a:xfrm>
+          <a:prstGeom prst="rect">
+            <a:avLst/>
+          </a:prstGeom>
+          <a:noFill/>
+        </p:spPr>
+        <p:txBody>
+          <a:bodyPr wrap="square" lIns="0" tIns="0" rIns="0" bIns="0" rtlCol="0" anchor="t"/>
+          <a:lstStyle/>
+          <a:p>
+            <a:pPr algn="l">
+              <a:lnSpc>
+                <a:spcPct val="160000"/>
+              </a:lnSpc>
+            </a:pPr>
+            <a:endParaRPr lang="en-US" dirty="0"/>
+          </a:p>
+        </p:txBody>
+      </p:sp>
+      <p:sp>
+        <p:nvSpPr>
+          <p:cNvPr id="55" name="Text 52"/>
+          <p:cNvSpPr/>
+          <p:nvPr/>
+        </p:nvSpPr>
+        <p:spPr>
+          <a:xfrm>
+            <a:off x="15237024" y="8666950"/>
+            <a:ext cx="761851" cy="380926"/>
+          </a:xfrm>
+          <a:prstGeom prst="rect">
+            <a:avLst/>
+          </a:prstGeom>
+          <a:noFill/>
+        </p:spPr>
+        <p:txBody>
+          <a:bodyPr wrap="none" lIns="0" tIns="0" rIns="0" bIns="0" rtlCol="0" anchor="ctr"/>
+          <a:lstStyle/>
+          <a:p>
+            <a:pPr algn="r">
+              <a:lnSpc>
+                <a:spcPct val="120000"/>
+              </a:lnSpc>
+            </a:pPr>
+            <a:r>
+              <a:rPr lang="en-US" sz="2100" dirty="0">
+                <a:solidFill>
+                  <a:srgbClr val="666666"/>
+                </a:solidFill>
+                <a:latin typeface="Arial" panose="020B0604020202020204" pitchFamily="34" charset="0"/>
+                <a:ea typeface="Arial" panose="020B0604020202020204" pitchFamily="34" charset="-122"/>
+                <a:cs typeface="Arial" panose="020B0604020202020204" pitchFamily="34" charset="-120"/>
+              </a:rPr>
+              <a:t>13</a:t>
+            </a:r>
+            <a:endParaRPr lang="en-US" sz="2100" dirty="0"/>
+          </a:p>
+        </p:txBody>
+      </p:sp>
+      <p:sp>
+        <p:nvSpPr>
+          <p:cNvPr id="62" name="文本框 61"/>
+          <p:cNvSpPr txBox="1"/>
+          <p:nvPr/>
+        </p:nvSpPr>
+        <p:spPr>
+          <a:xfrm>
+            <a:off x="3691890" y="2632075"/>
+            <a:ext cx="8935720" cy="922020"/>
+          </a:xfrm>
+          <a:prstGeom prst="rect">
+            <a:avLst/>
+          </a:prstGeom>
+          <a:noFill/>
+        </p:spPr>
+        <p:txBody>
+          <a:bodyPr wrap="square" rtlCol="0">
+            <a:spAutoFit/>
+          </a:bodyPr>
+          <a:p>
+            <a:r>
+              <a:rPr lang="zh-CN" altLang="en-US"/>
+              <a:t>传统授</a:t>
+            </a:r>
+            <a:r>
+              <a:rPr lang="zh-CN" altLang="en-US"/>
+              <a:t>领域致力于研究</a:t>
+            </a:r>
+            <a:endParaRPr lang="zh-CN" altLang="en-US"/>
+          </a:p>
+          <a:p>
+            <a:pPr indent="457200"/>
+            <a:r>
+              <a:rPr lang="zh-CN" altLang="en-US"/>
+              <a:t>动态衰减令牌的权限，以便满足最小权限原则：</a:t>
+            </a:r>
+            <a:r>
+              <a:rPr lang="en-US" altLang="zh-CN"/>
+              <a:t>Macroons</a:t>
+            </a:r>
+            <a:r>
+              <a:rPr lang="zh-CN" altLang="en-US"/>
+              <a:t>、</a:t>
+            </a:r>
+            <a:r>
+              <a:rPr lang="en-US" altLang="zh-CN"/>
+              <a:t>Stateful Least Auth</a:t>
+            </a:r>
+            <a:endParaRPr lang="zh-CN" altLang="en-US"/>
+          </a:p>
+          <a:p>
+            <a:pPr indent="457200"/>
+            <a:r>
+              <a:rPr lang="zh-CN" altLang="en-US"/>
+              <a:t>去中心化授权，离线验证凭证：</a:t>
+            </a:r>
+            <a:r>
+              <a:rPr lang="en-US" altLang="zh-CN"/>
+              <a:t>WAVE</a:t>
+            </a:r>
+            <a:endParaRPr lang="en-US" altLang="zh-CN"/>
+          </a:p>
+        </p:txBody>
+      </p:sp>
+      <p:sp>
+        <p:nvSpPr>
+          <p:cNvPr id="63" name="文本框 62"/>
+          <p:cNvSpPr txBox="1"/>
+          <p:nvPr/>
+        </p:nvSpPr>
+        <p:spPr>
+          <a:xfrm>
+            <a:off x="3771265" y="3909695"/>
+            <a:ext cx="9077960" cy="1586230"/>
+          </a:xfrm>
+          <a:prstGeom prst="rect">
+            <a:avLst/>
+          </a:prstGeom>
+          <a:noFill/>
+        </p:spPr>
+        <p:txBody>
+          <a:bodyPr wrap="square" rtlCol="0">
+            <a:noAutofit/>
+          </a:bodyPr>
+          <a:p>
+            <a:r>
+              <a:rPr lang="zh-CN" altLang="en-US"/>
+              <a:t>现有智能体授权领域致力于</a:t>
+            </a:r>
+            <a:r>
+              <a:rPr lang="zh-CN" altLang="en-US"/>
+              <a:t>研究</a:t>
+            </a:r>
+            <a:endParaRPr lang="zh-CN" altLang="en-US"/>
+          </a:p>
+          <a:p>
+            <a:pPr indent="457200"/>
+            <a:r>
+              <a:rPr lang="zh-CN" altLang="en-US"/>
+              <a:t>自动授权，解放人类监督任务</a:t>
+            </a:r>
+            <a:r>
+              <a:rPr lang="en-US" altLang="zh-CN"/>
+              <a:t> : Automating Permissions</a:t>
+            </a:r>
+            <a:endParaRPr lang="en-US" altLang="zh-CN"/>
+          </a:p>
+          <a:p>
+            <a:pPr indent="457200"/>
+            <a:r>
+              <a:rPr lang="zh-CN" altLang="en-US"/>
+              <a:t>委托授权，适配多智能体系统的授权需求：</a:t>
+            </a:r>
+            <a:r>
+              <a:rPr lang="en-US" altLang="zh-CN"/>
+              <a:t>Authenticated Delegation for AI Agents</a:t>
+            </a:r>
+            <a:endParaRPr lang="en-US" altLang="zh-CN"/>
+          </a:p>
+          <a:p>
+            <a:pPr indent="457200"/>
+            <a:r>
+              <a:rPr lang="zh-CN" altLang="en-US"/>
+              <a:t>收紧授权，保证最小权限原则：</a:t>
+            </a:r>
+            <a:r>
+              <a:rPr lang="en-US" altLang="zh-CN"/>
+              <a:t>Deterministic Pre-Action Auth</a:t>
+            </a:r>
+            <a:endParaRPr lang="zh-CN" altLang="en-US"/>
+          </a:p>
+        </p:txBody>
+      </p:sp>
+      <p:sp>
+        <p:nvSpPr>
+          <p:cNvPr id="64" name="文本框 63"/>
+          <p:cNvSpPr txBox="1"/>
+          <p:nvPr/>
+        </p:nvSpPr>
+        <p:spPr>
+          <a:xfrm>
+            <a:off x="3763645" y="5537200"/>
+            <a:ext cx="5715000" cy="922020"/>
+          </a:xfrm>
+          <a:prstGeom prst="rect">
+            <a:avLst/>
+          </a:prstGeom>
+          <a:noFill/>
+        </p:spPr>
+        <p:txBody>
+          <a:bodyPr wrap="square" rtlCol="0">
+            <a:spAutoFit/>
+          </a:bodyPr>
+          <a:p>
+            <a:r>
+              <a:rPr lang="zh-CN" altLang="en-US"/>
+              <a:t>传统授权聚焦动态衰减</a:t>
+            </a:r>
+            <a:r>
+              <a:rPr lang="zh-CN" altLang="en-US"/>
+              <a:t>令牌权限</a:t>
+            </a:r>
+            <a:endParaRPr lang="zh-CN" altLang="en-US"/>
+          </a:p>
+          <a:p>
+            <a:r>
+              <a:rPr lang="zh-CN" altLang="en-US"/>
+              <a:t>现有智能体授权致力于研究自动授权、委托授权，收紧授权，</a:t>
+            </a:r>
+            <a:endParaRPr lang="zh-CN" altLang="en-US"/>
+          </a:p>
+        </p:txBody>
+      </p:sp>
+      <p:sp>
+        <p:nvSpPr>
+          <p:cNvPr id="65" name="文本框 64"/>
+          <p:cNvSpPr txBox="1"/>
+          <p:nvPr/>
+        </p:nvSpPr>
+        <p:spPr>
+          <a:xfrm>
+            <a:off x="10772775" y="5378450"/>
+            <a:ext cx="3261995" cy="878205"/>
+          </a:xfrm>
+          <a:prstGeom prst="rect">
+            <a:avLst/>
+          </a:prstGeom>
+          <a:noFill/>
+        </p:spPr>
+        <p:txBody>
+          <a:bodyPr wrap="square" rtlCol="0">
+            <a:noAutofit/>
+          </a:bodyPr>
+          <a:p>
+            <a:r>
+              <a:rPr lang="zh-CN" altLang="en-US">
+                <a:sym typeface="+mn-ea"/>
+              </a:rPr>
+              <a:t>尽管</a:t>
+            </a:r>
+            <a:r>
+              <a:rPr lang="en-US" altLang="zh-CN">
+                <a:sym typeface="+mn-ea"/>
+              </a:rPr>
+              <a:t>OAuth is not enough</a:t>
+            </a:r>
+            <a:r>
+              <a:rPr lang="zh-CN" altLang="en-US">
+                <a:sym typeface="+mn-ea"/>
+              </a:rPr>
+              <a:t>提出目前需要细粒度的授权</a:t>
+            </a:r>
+            <a:r>
+              <a:rPr lang="zh-CN" altLang="en-US">
+                <a:sym typeface="+mn-ea"/>
+              </a:rPr>
+              <a:t>框架，但未有完整方案出现</a:t>
+            </a:r>
+            <a:endParaRPr lang="zh-CN" altLang="en-US"/>
+          </a:p>
+          <a:p>
+            <a:endParaRPr lang="zh-CN" altLang="en-US"/>
+          </a:p>
+        </p:txBody>
+      </p:sp>
+      <p:sp>
+        <p:nvSpPr>
+          <p:cNvPr id="66" name="文本框 65"/>
+          <p:cNvSpPr txBox="1"/>
+          <p:nvPr/>
+        </p:nvSpPr>
+        <p:spPr>
+          <a:xfrm>
+            <a:off x="10875645" y="6640195"/>
+            <a:ext cx="3159125" cy="645160"/>
+          </a:xfrm>
+          <a:prstGeom prst="rect">
+            <a:avLst/>
+          </a:prstGeom>
+          <a:noFill/>
+        </p:spPr>
+        <p:txBody>
+          <a:bodyPr wrap="square" rtlCol="0">
+            <a:spAutoFit/>
+          </a:bodyPr>
+          <a:p>
+            <a:r>
+              <a:rPr lang="zh-CN" altLang="en-US"/>
+              <a:t>并且没有针对保证有序任务中顺序授权的</a:t>
+            </a:r>
+            <a:r>
+              <a:rPr lang="zh-CN" altLang="en-US"/>
+              <a:t>研究</a:t>
+            </a:r>
+            <a:endParaRPr lang="zh-CN" altLang="en-US"/>
+          </a:p>
+        </p:txBody>
+      </p:sp>
+    </p:spTree>
+  </p:cSld>
+  <p:clrMapOvr>
+    <a:masterClrMapping/>
+  </p:clrMapOvr>
+  <p:transition>
+    <p:fade/>
+  </p:transition>
+</p:sld>
+</file>
+
+<file path=ppt/slides/slide6.xml><?xml version="1.0" encoding="utf-8"?>
+<p:sld xmlns:a="http://schemas.openxmlformats.org/drawingml/2006/main" xmlns:r="http://schemas.openxmlformats.org/officeDocument/2006/relationships" xmlns:p="http://schemas.openxmlformats.org/presentationml/2006/main">
+  <p:cSld>
+    <p:spTree>
+      <p:nvGrpSpPr>
+        <p:cNvPr id="1" name=""/>
+        <p:cNvGrpSpPr/>
+        <p:nvPr/>
+      </p:nvGrpSpPr>
+      <p:grpSpPr>
+        <a:xfrm>
+          <a:off x="0" y="0"/>
+          <a:ext cx="0" cy="0"/>
+          <a:chOff x="0" y="0"/>
+          <a:chExt cx="0" cy="0"/>
+        </a:xfrm>
+      </p:grpSpPr>
+      <p:sp>
+        <p:nvSpPr>
+          <p:cNvPr id="2" name="Shape 0"/>
+          <p:cNvSpPr/>
+          <p:nvPr/>
+        </p:nvSpPr>
+        <p:spPr>
+          <a:xfrm>
+            <a:off x="2219558" y="893"/>
+            <a:ext cx="2895035" cy="962504"/>
+          </a:xfrm>
+          <a:prstGeom prst="rect">
+            <a:avLst/>
+          </a:prstGeom>
+          <a:solidFill>
+            <a:srgbClr val="F2F2F2"/>
+          </a:solidFill>
+          <a:ln w="12700">
+            <a:solidFill>
+              <a:srgbClr val="F2F2F2"/>
+            </a:solidFill>
+            <a:prstDash val="solid"/>
+          </a:ln>
+        </p:spPr>
+      </p:sp>
+      <p:sp>
+        <p:nvSpPr>
+          <p:cNvPr id="3" name="Shape 1"/>
+          <p:cNvSpPr/>
+          <p:nvPr/>
+        </p:nvSpPr>
+        <p:spPr>
+          <a:xfrm>
+            <a:off x="5161161" y="36"/>
+            <a:ext cx="2590294" cy="962504"/>
+          </a:xfrm>
+          <a:prstGeom prst="rect">
+            <a:avLst/>
+          </a:prstGeom>
+          <a:solidFill>
+            <a:srgbClr val="04579A"/>
+          </a:solidFill>
+          <a:ln w="12700">
+            <a:solidFill>
+              <a:srgbClr val="04579A"/>
+            </a:solidFill>
+            <a:prstDash val="solid"/>
+          </a:ln>
+        </p:spPr>
+      </p:sp>
+      <p:sp>
+        <p:nvSpPr>
+          <p:cNvPr id="4" name="Shape 2"/>
+          <p:cNvSpPr/>
+          <p:nvPr/>
+        </p:nvSpPr>
+        <p:spPr>
+          <a:xfrm>
+            <a:off x="7814974" y="36"/>
+            <a:ext cx="4113996" cy="962504"/>
+          </a:xfrm>
+          <a:prstGeom prst="rect">
+            <a:avLst/>
+          </a:prstGeom>
+          <a:solidFill>
+            <a:srgbClr val="F2F2F2"/>
+          </a:solidFill>
+        </p:spPr>
+      </p:sp>
+      <p:sp>
+        <p:nvSpPr>
+          <p:cNvPr id="5" name="Shape 3"/>
+          <p:cNvSpPr/>
+          <p:nvPr/>
+        </p:nvSpPr>
+        <p:spPr>
+          <a:xfrm>
+            <a:off x="11968682" y="893"/>
+            <a:ext cx="4284175" cy="961551"/>
+          </a:xfrm>
+          <a:prstGeom prst="rect">
+            <a:avLst/>
+          </a:prstGeom>
+          <a:solidFill>
+            <a:srgbClr val="F2F2F2"/>
+          </a:solidFill>
+        </p:spPr>
+      </p:sp>
+      <p:sp>
+        <p:nvSpPr>
+          <p:cNvPr id="6" name="Shape 4"/>
+          <p:cNvSpPr/>
+          <p:nvPr/>
+        </p:nvSpPr>
+        <p:spPr>
+          <a:xfrm>
+            <a:off x="2282982" y="204021"/>
+            <a:ext cx="2768091" cy="507869"/>
+          </a:xfrm>
+          <a:prstGeom prst="rect">
+            <a:avLst/>
+          </a:prstGeom>
+          <a:noFill/>
+        </p:spPr>
+      </p:sp>
+      <p:sp>
+        <p:nvSpPr>
+          <p:cNvPr id="7" name="Shape 5"/>
+          <p:cNvSpPr/>
+          <p:nvPr/>
+        </p:nvSpPr>
+        <p:spPr>
+          <a:xfrm>
+            <a:off x="2161086" y="143073"/>
+            <a:ext cx="3011883" cy="629765"/>
+          </a:xfrm>
+          <a:prstGeom prst="rect">
+            <a:avLst/>
+          </a:prstGeom>
+          <a:noFill/>
+        </p:spPr>
+      </p:sp>
+      <p:sp>
+        <p:nvSpPr>
+          <p:cNvPr id="8" name="Text 6"/>
+          <p:cNvSpPr/>
+          <p:nvPr/>
+        </p:nvSpPr>
+        <p:spPr>
+          <a:xfrm>
+            <a:off x="2069664" y="97362"/>
+            <a:ext cx="3194728" cy="721187"/>
+          </a:xfrm>
+          <a:prstGeom prst="rect">
+            <a:avLst/>
+          </a:prstGeom>
+          <a:noFill/>
+        </p:spPr>
+        <p:txBody>
+          <a:bodyPr wrap="none" lIns="0" tIns="0" rIns="0" bIns="0" rtlCol="0" anchor="ctr"/>
+          <a:lstStyle/>
+          <a:p>
+            <a:pPr algn="ctr">
+              <a:lnSpc>
+                <a:spcPct val="120000"/>
+              </a:lnSpc>
+            </a:pPr>
+            <a:r>
+              <a:rPr lang="en-US" sz="2000" dirty="0">
+                <a:solidFill>
+                  <a:srgbClr val="333333"/>
+                </a:solidFill>
+                <a:latin typeface="Arial" panose="020B0604020202020204" pitchFamily="34" charset="0"/>
+                <a:ea typeface="Arial" panose="020B0604020202020204" pitchFamily="34" charset="-122"/>
+                <a:cs typeface="Arial" panose="020B0604020202020204" pitchFamily="34" charset="-120"/>
+              </a:rPr>
+              <a:t>选题背景及意义</a:t>
+            </a:r>
+            <a:endParaRPr lang="en-US" sz="2000" dirty="0"/>
+          </a:p>
+        </p:txBody>
+      </p:sp>
+      <p:sp>
+        <p:nvSpPr>
+          <p:cNvPr id="9" name="Shape 7"/>
+          <p:cNvSpPr/>
+          <p:nvPr/>
+        </p:nvSpPr>
+        <p:spPr>
+          <a:xfrm>
+            <a:off x="5224680" y="204021"/>
+            <a:ext cx="2463351" cy="507869"/>
+          </a:xfrm>
+          <a:prstGeom prst="rect">
+            <a:avLst/>
+          </a:prstGeom>
+          <a:noFill/>
+        </p:spPr>
+      </p:sp>
+      <p:sp>
+        <p:nvSpPr>
+          <p:cNvPr id="10" name="Shape 8"/>
+          <p:cNvSpPr/>
+          <p:nvPr/>
+        </p:nvSpPr>
+        <p:spPr>
+          <a:xfrm>
+            <a:off x="5102784" y="143073"/>
+            <a:ext cx="2707143" cy="629765"/>
+          </a:xfrm>
+          <a:prstGeom prst="rect">
+            <a:avLst/>
+          </a:prstGeom>
+          <a:noFill/>
+        </p:spPr>
+      </p:sp>
+      <p:sp>
+        <p:nvSpPr>
+          <p:cNvPr id="11" name="Text 9"/>
+          <p:cNvSpPr/>
+          <p:nvPr/>
+        </p:nvSpPr>
+        <p:spPr>
+          <a:xfrm>
+            <a:off x="5011362" y="97362"/>
+            <a:ext cx="2889987" cy="721187"/>
+          </a:xfrm>
+          <a:prstGeom prst="rect">
+            <a:avLst/>
+          </a:prstGeom>
+          <a:noFill/>
+        </p:spPr>
+        <p:txBody>
+          <a:bodyPr wrap="none" lIns="0" tIns="0" rIns="0" bIns="0" rtlCol="0" anchor="ctr"/>
+          <a:lstStyle/>
+          <a:p>
+            <a:pPr algn="ctr">
+              <a:lnSpc>
+                <a:spcPct val="120000"/>
+              </a:lnSpc>
+            </a:pPr>
+            <a:r>
+              <a:rPr lang="en-US" sz="2000" dirty="0">
+                <a:solidFill>
+                  <a:srgbClr val="FFFFFF"/>
+                </a:solidFill>
+                <a:latin typeface="Arial" panose="020B0604020202020204" pitchFamily="34" charset="0"/>
+                <a:ea typeface="Arial" panose="020B0604020202020204" pitchFamily="34" charset="-122"/>
+                <a:cs typeface="Arial" panose="020B0604020202020204" pitchFamily="34" charset="-120"/>
+              </a:rPr>
+              <a:t>国内外研究现状</a:t>
+            </a:r>
+            <a:endParaRPr lang="en-US" sz="2000" dirty="0"/>
+          </a:p>
+        </p:txBody>
+      </p:sp>
+      <p:sp>
+        <p:nvSpPr>
+          <p:cNvPr id="12" name="Shape 10"/>
+          <p:cNvSpPr/>
+          <p:nvPr/>
+        </p:nvSpPr>
+        <p:spPr>
+          <a:xfrm>
+            <a:off x="7878399" y="204021"/>
+            <a:ext cx="3987053" cy="507869"/>
+          </a:xfrm>
+          <a:prstGeom prst="rect">
+            <a:avLst/>
+          </a:prstGeom>
+          <a:noFill/>
+        </p:spPr>
+      </p:sp>
+      <p:sp>
+        <p:nvSpPr>
+          <p:cNvPr id="13" name="Shape 11"/>
+          <p:cNvSpPr/>
+          <p:nvPr/>
+        </p:nvSpPr>
+        <p:spPr>
+          <a:xfrm>
+            <a:off x="7756502" y="143073"/>
+            <a:ext cx="4230845" cy="629765"/>
+          </a:xfrm>
+          <a:prstGeom prst="rect">
+            <a:avLst/>
+          </a:prstGeom>
+          <a:noFill/>
+        </p:spPr>
+      </p:sp>
+      <p:sp>
+        <p:nvSpPr>
+          <p:cNvPr id="14" name="Text 12"/>
+          <p:cNvSpPr/>
+          <p:nvPr/>
+        </p:nvSpPr>
+        <p:spPr>
+          <a:xfrm>
+            <a:off x="7665080" y="97362"/>
+            <a:ext cx="4413690" cy="721187"/>
+          </a:xfrm>
+          <a:prstGeom prst="rect">
+            <a:avLst/>
+          </a:prstGeom>
+          <a:noFill/>
+        </p:spPr>
+        <p:txBody>
+          <a:bodyPr wrap="none" lIns="0" tIns="0" rIns="0" bIns="0" rtlCol="0" anchor="ctr"/>
+          <a:lstStyle/>
+          <a:p>
+            <a:pPr algn="ctr">
+              <a:lnSpc>
+                <a:spcPct val="120000"/>
+              </a:lnSpc>
+            </a:pPr>
+            <a:r>
+              <a:rPr lang="en-US" sz="2000" dirty="0">
+                <a:solidFill>
+                  <a:srgbClr val="333333"/>
+                </a:solidFill>
+                <a:latin typeface="Arial" panose="020B0604020202020204" pitchFamily="34" charset="0"/>
+                <a:ea typeface="Arial" panose="020B0604020202020204" pitchFamily="34" charset="-122"/>
+                <a:cs typeface="Arial" panose="020B0604020202020204" pitchFamily="34" charset="-120"/>
+              </a:rPr>
+              <a:t>主要研究内容及预期目标</a:t>
+            </a:r>
+            <a:endParaRPr lang="en-US" sz="2000" dirty="0"/>
+          </a:p>
+        </p:txBody>
+      </p:sp>
+      <p:sp>
+        <p:nvSpPr>
+          <p:cNvPr id="15" name="Shape 13"/>
+          <p:cNvSpPr/>
+          <p:nvPr/>
+        </p:nvSpPr>
+        <p:spPr>
+          <a:xfrm>
+            <a:off x="12032202" y="204021"/>
+            <a:ext cx="4157136" cy="507869"/>
+          </a:xfrm>
+          <a:prstGeom prst="rect">
+            <a:avLst/>
+          </a:prstGeom>
+          <a:noFill/>
+        </p:spPr>
+      </p:sp>
+      <p:sp>
+        <p:nvSpPr>
+          <p:cNvPr id="16" name="Shape 14"/>
+          <p:cNvSpPr/>
+          <p:nvPr/>
+        </p:nvSpPr>
+        <p:spPr>
+          <a:xfrm>
+            <a:off x="11910306" y="143073"/>
+            <a:ext cx="4400929" cy="629765"/>
+          </a:xfrm>
+          <a:prstGeom prst="rect">
+            <a:avLst/>
+          </a:prstGeom>
+          <a:noFill/>
+        </p:spPr>
+      </p:sp>
+      <p:sp>
+        <p:nvSpPr>
+          <p:cNvPr id="17" name="Text 15"/>
+          <p:cNvSpPr/>
+          <p:nvPr/>
+        </p:nvSpPr>
+        <p:spPr>
+          <a:xfrm>
+            <a:off x="11818883" y="97362"/>
+            <a:ext cx="4583773" cy="721187"/>
+          </a:xfrm>
+          <a:prstGeom prst="rect">
+            <a:avLst/>
+          </a:prstGeom>
+          <a:noFill/>
+        </p:spPr>
+        <p:txBody>
+          <a:bodyPr wrap="none" lIns="0" tIns="0" rIns="0" bIns="0" rtlCol="0" anchor="ctr"/>
+          <a:lstStyle/>
+          <a:p>
+            <a:pPr algn="ctr">
+              <a:lnSpc>
+                <a:spcPct val="120000"/>
+              </a:lnSpc>
+            </a:pPr>
+            <a:r>
+              <a:rPr lang="en-US" sz="2000" dirty="0">
+                <a:solidFill>
+                  <a:srgbClr val="333333"/>
+                </a:solidFill>
+                <a:latin typeface="Arial" panose="020B0604020202020204" pitchFamily="34" charset="0"/>
+                <a:ea typeface="Arial" panose="020B0604020202020204" pitchFamily="34" charset="-122"/>
+                <a:cs typeface="Arial" panose="020B0604020202020204" pitchFamily="34" charset="-120"/>
+              </a:rPr>
+              <a:t>工作计划与进度安排</a:t>
+            </a:r>
+            <a:endParaRPr lang="en-US" sz="2000" dirty="0"/>
+          </a:p>
+        </p:txBody>
+      </p:sp>
+      <p:pic>
+        <p:nvPicPr>
+          <p:cNvPr id="18" name="Image 0" descr="https://kimi-img.moonshot.cn/pub/slides/okc/flfuysioo4gzm/mnt/agents/output/temp3_pptd/images/image_1.jpg"/>
+          <p:cNvPicPr>
+            <a:picLocks noChangeAspect="1"/>
+          </p:cNvPicPr>
+          <p:nvPr/>
+        </p:nvPicPr>
+        <p:blipFill>
+          <a:blip r:embed="rId1"/>
+          <a:srcRect l="5060" r="29000"/>
+          <a:stretch>
+            <a:fillRect/>
+          </a:stretch>
+        </p:blipFill>
+        <p:spPr>
+          <a:xfrm>
+            <a:off x="544343" y="141454"/>
+            <a:ext cx="1273149" cy="745757"/>
+          </a:xfrm>
+          <a:prstGeom prst="rect">
+            <a:avLst/>
+          </a:prstGeom>
+        </p:spPr>
+      </p:pic>
+      <p:sp>
+        <p:nvSpPr>
+          <p:cNvPr id="19" name="Shape 16"/>
+          <p:cNvSpPr/>
+          <p:nvPr/>
+        </p:nvSpPr>
+        <p:spPr>
+          <a:xfrm rot="10800000">
+            <a:off x="6378313" y="962444"/>
+            <a:ext cx="389401" cy="304740"/>
+          </a:xfrm>
+          <a:prstGeom prst="triangle">
+            <a:avLst>
+              <a:gd name="adj" fmla="val 50000"/>
+            </a:avLst>
+          </a:prstGeom>
+          <a:solidFill>
+            <a:srgbClr val="04579A"/>
+          </a:solidFill>
+        </p:spPr>
+      </p:sp>
+      <p:sp>
+        <p:nvSpPr>
+          <p:cNvPr id="20" name="Text 17"/>
+          <p:cNvSpPr/>
+          <p:nvPr/>
+        </p:nvSpPr>
+        <p:spPr>
+          <a:xfrm>
+            <a:off x="571388" y="1191285"/>
+            <a:ext cx="9523140" cy="619004"/>
+          </a:xfrm>
+          <a:prstGeom prst="rect">
+            <a:avLst/>
+          </a:prstGeom>
+          <a:noFill/>
+        </p:spPr>
+        <p:txBody>
+          <a:bodyPr wrap="none" lIns="0" tIns="0" rIns="0" bIns="0" rtlCol="0" anchor="ctr"/>
+          <a:lstStyle/>
+          <a:p>
+            <a:pPr algn="l">
+              <a:lnSpc>
+                <a:spcPct val="120000"/>
+              </a:lnSpc>
+            </a:pPr>
+            <a:r>
+              <a:rPr lang="en-US" sz="3150" b="1" dirty="0">
+                <a:solidFill>
+                  <a:srgbClr val="04579A"/>
+                </a:solidFill>
+                <a:latin typeface="Arial" panose="020B0604020202020204" pitchFamily="34" charset="0"/>
+                <a:ea typeface="Arial" panose="020B0604020202020204" pitchFamily="34" charset="-122"/>
+                <a:cs typeface="Arial" panose="020B0604020202020204" pitchFamily="34" charset="-120"/>
+              </a:rPr>
+              <a:t>现有研究不足总结</a:t>
+            </a:r>
+            <a:endParaRPr lang="en-US" sz="3150" dirty="0"/>
+          </a:p>
+        </p:txBody>
+      </p:sp>
+      <p:sp>
+        <p:nvSpPr>
+          <p:cNvPr id="21" name="Shape 18"/>
+          <p:cNvSpPr/>
+          <p:nvPr/>
+        </p:nvSpPr>
+        <p:spPr>
+          <a:xfrm>
+            <a:off x="571388" y="1905521"/>
+            <a:ext cx="15113223" cy="476157"/>
+          </a:xfrm>
+          <a:prstGeom prst="rect">
+            <a:avLst/>
+          </a:prstGeom>
+          <a:solidFill>
+            <a:srgbClr val="04579A"/>
+          </a:solidFill>
+        </p:spPr>
+      </p:sp>
+      <p:sp>
+        <p:nvSpPr>
+          <p:cNvPr id="22" name="Text 19"/>
+          <p:cNvSpPr/>
+          <p:nvPr/>
+        </p:nvSpPr>
+        <p:spPr>
+          <a:xfrm>
+            <a:off x="666620" y="1905521"/>
+            <a:ext cx="2095091" cy="476157"/>
+          </a:xfrm>
+          <a:prstGeom prst="rect">
+            <a:avLst/>
+          </a:prstGeom>
+          <a:noFill/>
+        </p:spPr>
+        <p:txBody>
+          <a:bodyPr wrap="none" lIns="0" tIns="0" rIns="0" bIns="0" rtlCol="0" anchor="ctr"/>
+          <a:lstStyle/>
+          <a:p>
+            <a:pPr algn="ctr">
+              <a:lnSpc>
+                <a:spcPct val="120000"/>
+              </a:lnSpc>
+            </a:pPr>
+            <a:r>
+              <a:rPr lang="en-US" b="1" dirty="0">
+                <a:solidFill>
+                  <a:srgbClr val="FFFFFF"/>
+                </a:solidFill>
+                <a:latin typeface="Arial" panose="020B0604020202020204" pitchFamily="34" charset="0"/>
+                <a:ea typeface="Arial" panose="020B0604020202020204" pitchFamily="34" charset="-122"/>
+                <a:cs typeface="Arial" panose="020B0604020202020204" pitchFamily="34" charset="-120"/>
+              </a:rPr>
+              <a:t>研究工作</a:t>
+            </a:r>
+            <a:endParaRPr lang="en-US" dirty="0"/>
+          </a:p>
+        </p:txBody>
+      </p:sp>
+      <p:sp>
+        <p:nvSpPr>
+          <p:cNvPr id="23" name="Text 20"/>
+          <p:cNvSpPr/>
+          <p:nvPr/>
+        </p:nvSpPr>
+        <p:spPr>
+          <a:xfrm>
+            <a:off x="4281805" y="1905635"/>
+            <a:ext cx="3432175" cy="476250"/>
+          </a:xfrm>
+          <a:prstGeom prst="rect">
+            <a:avLst/>
+          </a:prstGeom>
+          <a:noFill/>
+        </p:spPr>
+        <p:txBody>
+          <a:bodyPr wrap="none" lIns="0" tIns="0" rIns="0" bIns="0" rtlCol="0" anchor="ctr"/>
+          <a:lstStyle/>
+          <a:p>
+            <a:pPr algn="ctr">
+              <a:lnSpc>
+                <a:spcPct val="120000"/>
+              </a:lnSpc>
+            </a:pPr>
+            <a:r>
+              <a:rPr lang="en-US" b="1" dirty="0">
+                <a:solidFill>
+                  <a:srgbClr val="FFFFFF"/>
+                </a:solidFill>
+                <a:latin typeface="Arial" panose="020B0604020202020204" pitchFamily="34" charset="0"/>
+                <a:ea typeface="Arial" panose="020B0604020202020204" pitchFamily="34" charset="-122"/>
+                <a:cs typeface="Arial" panose="020B0604020202020204" pitchFamily="34" charset="-120"/>
+              </a:rPr>
+              <a:t>核心贡献</a:t>
+            </a:r>
+            <a:endParaRPr lang="en-US" dirty="0"/>
+          </a:p>
+        </p:txBody>
+      </p:sp>
+      <p:sp>
+        <p:nvSpPr>
+          <p:cNvPr id="24" name="Text 21"/>
+          <p:cNvSpPr/>
+          <p:nvPr/>
+        </p:nvSpPr>
+        <p:spPr>
+          <a:xfrm>
+            <a:off x="7904206" y="1905521"/>
+            <a:ext cx="4761570" cy="476157"/>
+          </a:xfrm>
+          <a:prstGeom prst="rect">
+            <a:avLst/>
+          </a:prstGeom>
+          <a:noFill/>
+        </p:spPr>
+        <p:txBody>
+          <a:bodyPr wrap="none" lIns="0" tIns="0" rIns="0" bIns="0" rtlCol="0" anchor="ctr"/>
+          <a:lstStyle/>
+          <a:p>
+            <a:pPr algn="ctr">
+              <a:lnSpc>
+                <a:spcPct val="120000"/>
+              </a:lnSpc>
+            </a:pPr>
+            <a:r>
+              <a:rPr lang="en-US" b="1" dirty="0">
+                <a:solidFill>
+                  <a:srgbClr val="FFFFFF"/>
+                </a:solidFill>
+                <a:latin typeface="Arial" panose="020B0604020202020204" pitchFamily="34" charset="0"/>
+                <a:ea typeface="Arial" panose="020B0604020202020204" pitchFamily="34" charset="-122"/>
+                <a:cs typeface="Arial" panose="020B0604020202020204" pitchFamily="34" charset="-120"/>
+              </a:rPr>
+              <a:t>存在的不足</a:t>
+            </a:r>
+            <a:endParaRPr lang="en-US" dirty="0"/>
+          </a:p>
+        </p:txBody>
+      </p:sp>
+      <p:sp>
+        <p:nvSpPr>
+          <p:cNvPr id="25" name="Shape 22"/>
+          <p:cNvSpPr/>
+          <p:nvPr/>
+        </p:nvSpPr>
+        <p:spPr>
+          <a:xfrm>
+            <a:off x="571388" y="2381678"/>
+            <a:ext cx="15113223" cy="619004"/>
+          </a:xfrm>
+          <a:prstGeom prst="rect">
+            <a:avLst/>
+          </a:prstGeom>
+          <a:solidFill>
+            <a:srgbClr val="F0F7FC"/>
+          </a:solidFill>
+        </p:spPr>
+      </p:sp>
+      <p:sp>
+        <p:nvSpPr>
+          <p:cNvPr id="26" name="Text 23"/>
+          <p:cNvSpPr/>
+          <p:nvPr/>
+        </p:nvSpPr>
+        <p:spPr>
+          <a:xfrm>
+            <a:off x="666620" y="2429293"/>
+            <a:ext cx="2095091" cy="523773"/>
+          </a:xfrm>
+          <a:prstGeom prst="rect">
+            <a:avLst/>
+          </a:prstGeom>
+          <a:noFill/>
+        </p:spPr>
+        <p:txBody>
+          <a:bodyPr wrap="none" lIns="0" tIns="0" rIns="0" bIns="0" rtlCol="0" anchor="ctr"/>
+          <a:lstStyle/>
+          <a:p>
+            <a:pPr algn="l">
+              <a:lnSpc>
+                <a:spcPct val="120000"/>
+              </a:lnSpc>
+            </a:pPr>
+            <a:r>
+              <a:rPr lang="en-US" sz="1350" b="1" dirty="0">
+                <a:solidFill>
+                  <a:srgbClr val="04579A"/>
+                </a:solidFill>
+                <a:latin typeface="Arial" panose="020B0604020202020204" pitchFamily="34" charset="0"/>
+                <a:ea typeface="Arial" panose="020B0604020202020204" pitchFamily="34" charset="-122"/>
+                <a:cs typeface="Arial" panose="020B0604020202020204" pitchFamily="34" charset="-120"/>
+                <a:sym typeface="+mn-ea"/>
+              </a:rPr>
+              <a:t>OAuth Is Not Enough for AI Agents [34]</a:t>
+            </a:r>
+            <a:endParaRPr lang="en-US" sz="1350" dirty="0"/>
+          </a:p>
+        </p:txBody>
+      </p:sp>
+      <p:sp>
+        <p:nvSpPr>
+          <p:cNvPr id="27" name="Text 24"/>
+          <p:cNvSpPr/>
+          <p:nvPr/>
+        </p:nvSpPr>
+        <p:spPr>
+          <a:xfrm>
+            <a:off x="4313555" y="2429510"/>
+            <a:ext cx="3400425" cy="523875"/>
+          </a:xfrm>
+          <a:prstGeom prst="rect">
+            <a:avLst/>
+          </a:prstGeom>
+          <a:noFill/>
+        </p:spPr>
+        <p:txBody>
+          <a:bodyPr wrap="square" lIns="0" tIns="0" rIns="0" bIns="0" rtlCol="0" anchor="ctr"/>
+          <a:lstStyle/>
+          <a:p>
+            <a:pPr algn="l">
+              <a:lnSpc>
+                <a:spcPct val="130000"/>
+              </a:lnSpc>
+            </a:pPr>
+            <a:r>
+              <a:rPr lang="en-US" sz="1200" dirty="0">
+                <a:solidFill>
+                  <a:srgbClr val="333333"/>
+                </a:solidFill>
+                <a:latin typeface="Arial" panose="020B0604020202020204" pitchFamily="34" charset="0"/>
+                <a:ea typeface="Arial" panose="020B0604020202020204" pitchFamily="34" charset="-122"/>
+                <a:cs typeface="Arial" panose="020B0604020202020204" pitchFamily="34" charset="-120"/>
+              </a:rPr>
+              <a:t>揭示传统授权与智能体的结构性不匹配，提出四项设计方向</a:t>
+            </a:r>
+            <a:endParaRPr lang="en-US" sz="1200" dirty="0"/>
+          </a:p>
+        </p:txBody>
+      </p:sp>
+      <p:sp>
+        <p:nvSpPr>
+          <p:cNvPr id="28" name="Text 25"/>
+          <p:cNvSpPr/>
+          <p:nvPr/>
+        </p:nvSpPr>
+        <p:spPr>
+          <a:xfrm>
+            <a:off x="7904206" y="2429293"/>
+            <a:ext cx="4761570" cy="523773"/>
+          </a:xfrm>
+          <a:prstGeom prst="rect">
+            <a:avLst/>
+          </a:prstGeom>
+          <a:noFill/>
+        </p:spPr>
+        <p:txBody>
+          <a:bodyPr wrap="square" lIns="0" tIns="0" rIns="0" bIns="0" rtlCol="0" anchor="ctr"/>
+          <a:lstStyle/>
+          <a:p>
+            <a:pPr algn="l">
+              <a:lnSpc>
+                <a:spcPct val="130000"/>
+              </a:lnSpc>
+            </a:pPr>
+            <a:r>
+              <a:rPr lang="en-US" sz="1200" dirty="0">
+                <a:solidFill>
+                  <a:srgbClr val="EC5F74"/>
+                </a:solidFill>
+                <a:latin typeface="Arial" panose="020B0604020202020204" pitchFamily="34" charset="0"/>
+                <a:ea typeface="Arial" panose="020B0604020202020204" pitchFamily="34" charset="-122"/>
+                <a:cs typeface="Arial" panose="020B0604020202020204" pitchFamily="34" charset="-120"/>
+              </a:rPr>
+              <a:t>仅指出问题，未给出完整解决方案</a:t>
+            </a:r>
+            <a:endParaRPr lang="en-US" sz="1200" dirty="0"/>
+          </a:p>
+        </p:txBody>
+      </p:sp>
+      <p:sp>
+        <p:nvSpPr>
+          <p:cNvPr id="29" name="Shape 26"/>
+          <p:cNvSpPr/>
+          <p:nvPr/>
+        </p:nvSpPr>
+        <p:spPr>
+          <a:xfrm>
+            <a:off x="571388" y="3000682"/>
+            <a:ext cx="15113223" cy="619004"/>
+          </a:xfrm>
+          <a:prstGeom prst="rect">
+            <a:avLst/>
+          </a:prstGeom>
+          <a:solidFill>
+            <a:srgbClr val="FFFFFF"/>
+          </a:solidFill>
+        </p:spPr>
+        <p:txBody>
+          <a:bodyPr/>
+          <a:p>
+            <a:endParaRPr lang="zh-CN" altLang="en-US"/>
+          </a:p>
+        </p:txBody>
+      </p:sp>
+      <p:sp>
+        <p:nvSpPr>
+          <p:cNvPr id="30" name="Text 27"/>
+          <p:cNvSpPr/>
+          <p:nvPr/>
+        </p:nvSpPr>
+        <p:spPr>
+          <a:xfrm>
+            <a:off x="666620" y="3048298"/>
+            <a:ext cx="2095091" cy="523773"/>
+          </a:xfrm>
+          <a:prstGeom prst="rect">
+            <a:avLst/>
+          </a:prstGeom>
+          <a:noFill/>
+        </p:spPr>
+        <p:txBody>
+          <a:bodyPr wrap="none" lIns="0" tIns="0" rIns="0" bIns="0" rtlCol="0" anchor="ctr"/>
+          <a:lstStyle/>
+          <a:p>
+            <a:pPr algn="l">
+              <a:lnSpc>
+                <a:spcPct val="120000"/>
+              </a:lnSpc>
+            </a:pPr>
+            <a:r>
+              <a:rPr lang="en-US" sz="1350" b="1" dirty="0">
+                <a:solidFill>
+                  <a:srgbClr val="04579A"/>
+                </a:solidFill>
+                <a:latin typeface="Arial" panose="020B0604020202020204" pitchFamily="34" charset="0"/>
+                <a:ea typeface="Arial" panose="020B0604020202020204" pitchFamily="34" charset="-122"/>
+                <a:cs typeface="Arial" panose="020B0604020202020204" pitchFamily="34" charset="-120"/>
+                <a:sym typeface="+mn-ea"/>
+              </a:rPr>
+              <a:t>Automating Permissions [41]</a:t>
+            </a:r>
+            <a:endParaRPr lang="en-US" sz="1350" dirty="0"/>
+          </a:p>
+        </p:txBody>
+      </p:sp>
+      <p:sp>
+        <p:nvSpPr>
+          <p:cNvPr id="31" name="Text 28"/>
+          <p:cNvSpPr/>
+          <p:nvPr/>
+        </p:nvSpPr>
+        <p:spPr>
+          <a:xfrm>
+            <a:off x="4293235" y="3048000"/>
+            <a:ext cx="3420745" cy="523875"/>
+          </a:xfrm>
+          <a:prstGeom prst="rect">
+            <a:avLst/>
+          </a:prstGeom>
+          <a:noFill/>
+        </p:spPr>
+        <p:txBody>
+          <a:bodyPr wrap="square" lIns="0" tIns="0" rIns="0" bIns="0" rtlCol="0" anchor="ctr"/>
+          <a:lstStyle/>
+          <a:p>
+            <a:pPr algn="l">
+              <a:lnSpc>
+                <a:spcPct val="130000"/>
+              </a:lnSpc>
+            </a:pPr>
+            <a:endParaRPr lang="en-US" sz="1200" dirty="0"/>
+          </a:p>
+        </p:txBody>
+      </p:sp>
+      <p:sp>
+        <p:nvSpPr>
+          <p:cNvPr id="32" name="Text 29"/>
+          <p:cNvSpPr/>
+          <p:nvPr/>
+        </p:nvSpPr>
+        <p:spPr>
+          <a:xfrm>
+            <a:off x="7904206" y="3048298"/>
+            <a:ext cx="4761570" cy="523773"/>
+          </a:xfrm>
+          <a:prstGeom prst="rect">
+            <a:avLst/>
+          </a:prstGeom>
+          <a:noFill/>
+        </p:spPr>
+        <p:txBody>
+          <a:bodyPr wrap="square" lIns="0" tIns="0" rIns="0" bIns="0" rtlCol="0" anchor="ctr"/>
+          <a:lstStyle/>
+          <a:p>
+            <a:pPr algn="l">
+              <a:lnSpc>
+                <a:spcPct val="130000"/>
+              </a:lnSpc>
+            </a:pPr>
+            <a:r>
+              <a:rPr lang="en-US" sz="1200" dirty="0">
+                <a:solidFill>
+                  <a:srgbClr val="EC5F74"/>
+                </a:solidFill>
+                <a:latin typeface="Arial" panose="020B0604020202020204" pitchFamily="34" charset="0"/>
+                <a:ea typeface="Arial" panose="020B0604020202020204" pitchFamily="34" charset="-122"/>
+                <a:cs typeface="Arial" panose="020B0604020202020204" pitchFamily="34" charset="-120"/>
+              </a:rPr>
+              <a:t>解决身份缺失但未解决授权粒度宽泛问题</a:t>
+            </a:r>
+            <a:endParaRPr lang="en-US" sz="1200" dirty="0"/>
+          </a:p>
+        </p:txBody>
+      </p:sp>
+      <p:sp>
+        <p:nvSpPr>
+          <p:cNvPr id="33" name="Shape 30"/>
+          <p:cNvSpPr/>
+          <p:nvPr/>
+        </p:nvSpPr>
+        <p:spPr>
+          <a:xfrm>
+            <a:off x="571388" y="3619686"/>
+            <a:ext cx="15113223" cy="619004"/>
+          </a:xfrm>
+          <a:prstGeom prst="rect">
+            <a:avLst/>
+          </a:prstGeom>
+          <a:solidFill>
+            <a:srgbClr val="F0F7FC"/>
+          </a:solidFill>
+        </p:spPr>
+      </p:sp>
+      <p:sp>
+        <p:nvSpPr>
+          <p:cNvPr id="34" name="Text 31"/>
+          <p:cNvSpPr/>
+          <p:nvPr/>
+        </p:nvSpPr>
+        <p:spPr>
+          <a:xfrm>
+            <a:off x="666620" y="3667302"/>
+            <a:ext cx="2095091" cy="523773"/>
+          </a:xfrm>
+          <a:prstGeom prst="rect">
+            <a:avLst/>
+          </a:prstGeom>
+          <a:noFill/>
+        </p:spPr>
+        <p:txBody>
+          <a:bodyPr wrap="none" lIns="0" tIns="0" rIns="0" bIns="0" rtlCol="0" anchor="ctr"/>
+          <a:lstStyle/>
+          <a:p>
+            <a:pPr algn="l">
+              <a:lnSpc>
+                <a:spcPct val="120000"/>
+              </a:lnSpc>
+            </a:pPr>
+            <a:r>
+              <a:rPr lang="en-US" sz="1350" b="1" dirty="0">
+                <a:solidFill>
+                  <a:srgbClr val="04579A"/>
+                </a:solidFill>
+                <a:latin typeface="Arial" panose="020B0604020202020204" pitchFamily="34" charset="0"/>
+                <a:ea typeface="Arial" panose="020B0604020202020204" pitchFamily="34" charset="-122"/>
+                <a:cs typeface="Arial" panose="020B0604020202020204" pitchFamily="34" charset="-120"/>
+                <a:sym typeface="+mn-ea"/>
+              </a:rPr>
+              <a:t>Authenticated Delegation for AI Agents [35]</a:t>
+            </a:r>
+            <a:endParaRPr lang="en-US" sz="1350" dirty="0"/>
+          </a:p>
+        </p:txBody>
+      </p:sp>
+      <p:sp>
+        <p:nvSpPr>
+          <p:cNvPr id="35" name="Text 32"/>
+          <p:cNvSpPr/>
+          <p:nvPr/>
+        </p:nvSpPr>
+        <p:spPr>
+          <a:xfrm>
+            <a:off x="4281170" y="3667125"/>
+            <a:ext cx="3432810" cy="523875"/>
+          </a:xfrm>
+          <a:prstGeom prst="rect">
+            <a:avLst/>
+          </a:prstGeom>
+          <a:noFill/>
+        </p:spPr>
+        <p:txBody>
+          <a:bodyPr wrap="square" lIns="0" tIns="0" rIns="0" bIns="0" rtlCol="0" anchor="ctr"/>
+          <a:lstStyle/>
+          <a:p>
+            <a:pPr algn="l">
+              <a:lnSpc>
+                <a:spcPct val="130000"/>
+              </a:lnSpc>
+            </a:pPr>
+            <a:r>
+              <a:rPr lang="en-US" sz="1200" dirty="0">
+                <a:solidFill>
+                  <a:srgbClr val="333333"/>
+                </a:solidFill>
+                <a:latin typeface="Arial" panose="020B0604020202020204" pitchFamily="34" charset="0"/>
+                <a:ea typeface="Arial" panose="020B0604020202020204" pitchFamily="34" charset="-122"/>
+                <a:cs typeface="Arial" panose="020B0604020202020204" pitchFamily="34" charset="-120"/>
+                <a:sym typeface="+mn-ea"/>
+              </a:rPr>
+              <a:t>Agent-ID + Delegation Token</a:t>
+            </a:r>
+            <a:endParaRPr lang="en-US" sz="1200" dirty="0"/>
+          </a:p>
+          <a:p>
+            <a:pPr algn="l">
+              <a:lnSpc>
+                <a:spcPct val="130000"/>
+              </a:lnSpc>
+            </a:pPr>
+            <a:r>
+              <a:rPr lang="en-US" sz="1200" dirty="0">
+                <a:solidFill>
+                  <a:srgbClr val="333333"/>
+                </a:solidFill>
+                <a:latin typeface="Arial" panose="020B0604020202020204" pitchFamily="34" charset="0"/>
+                <a:ea typeface="Arial" panose="020B0604020202020204" pitchFamily="34" charset="-122"/>
+                <a:cs typeface="Arial" panose="020B0604020202020204" pitchFamily="34" charset="-120"/>
+              </a:rPr>
+              <a:t>M-TBAC动态授权</a:t>
+            </a:r>
+            <a:endParaRPr lang="en-US" sz="1200" dirty="0"/>
+          </a:p>
+        </p:txBody>
+      </p:sp>
+      <p:sp>
+        <p:nvSpPr>
+          <p:cNvPr id="36" name="Text 33"/>
+          <p:cNvSpPr/>
+          <p:nvPr/>
+        </p:nvSpPr>
+        <p:spPr>
+          <a:xfrm>
+            <a:off x="7904206" y="3667302"/>
+            <a:ext cx="4761570" cy="523773"/>
+          </a:xfrm>
+          <a:prstGeom prst="rect">
+            <a:avLst/>
+          </a:prstGeom>
+          <a:noFill/>
+        </p:spPr>
+        <p:txBody>
+          <a:bodyPr wrap="square" lIns="0" tIns="0" rIns="0" bIns="0" rtlCol="0" anchor="ctr"/>
+          <a:lstStyle/>
+          <a:p>
+            <a:pPr algn="l">
+              <a:lnSpc>
+                <a:spcPct val="130000"/>
+              </a:lnSpc>
+            </a:pPr>
+            <a:r>
+              <a:rPr lang="en-US" sz="1200" dirty="0">
+                <a:solidFill>
+                  <a:srgbClr val="EC5F74"/>
+                </a:solidFill>
+                <a:latin typeface="Arial" panose="020B0604020202020204" pitchFamily="34" charset="0"/>
+                <a:ea typeface="Arial" panose="020B0604020202020204" pitchFamily="34" charset="-122"/>
+                <a:cs typeface="Arial" panose="020B0604020202020204" pitchFamily="34" charset="-120"/>
+              </a:rPr>
+              <a:t>LLM可能幻觉策略，静态风险评分不够灵活</a:t>
+            </a:r>
+            <a:endParaRPr lang="en-US" sz="1200" dirty="0"/>
+          </a:p>
+        </p:txBody>
+      </p:sp>
+      <p:sp>
+        <p:nvSpPr>
+          <p:cNvPr id="37" name="Shape 34"/>
+          <p:cNvSpPr/>
+          <p:nvPr/>
+        </p:nvSpPr>
+        <p:spPr>
+          <a:xfrm>
+            <a:off x="571388" y="4238690"/>
+            <a:ext cx="15113223" cy="619004"/>
+          </a:xfrm>
+          <a:prstGeom prst="rect">
+            <a:avLst/>
+          </a:prstGeom>
+          <a:solidFill>
+            <a:srgbClr val="FFFFFF"/>
+          </a:solidFill>
+        </p:spPr>
+      </p:sp>
+      <p:sp>
+        <p:nvSpPr>
+          <p:cNvPr id="41" name="Shape 38"/>
+          <p:cNvSpPr/>
+          <p:nvPr/>
+        </p:nvSpPr>
+        <p:spPr>
+          <a:xfrm>
+            <a:off x="544083" y="4238569"/>
+            <a:ext cx="15113223" cy="619004"/>
+          </a:xfrm>
+          <a:prstGeom prst="rect">
+            <a:avLst/>
+          </a:prstGeom>
+          <a:solidFill>
+            <a:srgbClr val="F0F7FC"/>
+          </a:solidFill>
+        </p:spPr>
+      </p:sp>
+      <p:sp>
+        <p:nvSpPr>
+          <p:cNvPr id="42" name="Text 39"/>
+          <p:cNvSpPr/>
+          <p:nvPr/>
+        </p:nvSpPr>
+        <p:spPr>
+          <a:xfrm>
+            <a:off x="639315" y="4286185"/>
+            <a:ext cx="2095091" cy="523773"/>
+          </a:xfrm>
+          <a:prstGeom prst="rect">
+            <a:avLst/>
+          </a:prstGeom>
+          <a:noFill/>
+        </p:spPr>
+        <p:txBody>
+          <a:bodyPr wrap="none" lIns="0" tIns="0" rIns="0" bIns="0" rtlCol="0" anchor="ctr"/>
+          <a:lstStyle/>
+          <a:p>
+            <a:pPr algn="l">
+              <a:lnSpc>
+                <a:spcPct val="120000"/>
+              </a:lnSpc>
+            </a:pPr>
+            <a:r>
+              <a:rPr lang="en-US" sz="1350" b="1" dirty="0">
+                <a:solidFill>
+                  <a:srgbClr val="04579A"/>
+                </a:solidFill>
+                <a:latin typeface="Arial" panose="020B0604020202020204" pitchFamily="34" charset="0"/>
+                <a:ea typeface="Arial" panose="020B0604020202020204" pitchFamily="34" charset="-122"/>
+                <a:cs typeface="Arial" panose="020B0604020202020204" pitchFamily="34" charset="-120"/>
+                <a:sym typeface="+mn-ea"/>
+              </a:rPr>
+              <a:t>Uncertainty-Aware Access Control [38]</a:t>
+            </a:r>
+            <a:endParaRPr lang="en-US" sz="1350" dirty="0"/>
+          </a:p>
+        </p:txBody>
+      </p:sp>
+      <p:sp>
+        <p:nvSpPr>
+          <p:cNvPr id="43" name="Text 40"/>
+          <p:cNvSpPr/>
+          <p:nvPr/>
+        </p:nvSpPr>
+        <p:spPr>
+          <a:xfrm>
+            <a:off x="4248150" y="4857750"/>
+            <a:ext cx="3416935" cy="523875"/>
+          </a:xfrm>
+          <a:prstGeom prst="rect">
+            <a:avLst/>
+          </a:prstGeom>
+          <a:noFill/>
+        </p:spPr>
+        <p:txBody>
+          <a:bodyPr wrap="square" lIns="0" tIns="0" rIns="0" bIns="0" rtlCol="0" anchor="ctr"/>
+          <a:lstStyle/>
+          <a:p>
+            <a:pPr algn="l">
+              <a:lnSpc>
+                <a:spcPct val="130000"/>
+              </a:lnSpc>
+            </a:pPr>
+            <a:r>
+              <a:rPr lang="en-US" sz="1200" dirty="0">
+                <a:solidFill>
+                  <a:srgbClr val="333333"/>
+                </a:solidFill>
+                <a:latin typeface="Arial" panose="020B0604020202020204" pitchFamily="34" charset="0"/>
+                <a:ea typeface="Arial" panose="020B0604020202020204" pitchFamily="34" charset="-122"/>
+                <a:cs typeface="Arial" panose="020B0604020202020204" pitchFamily="34" charset="-120"/>
+              </a:rPr>
+              <a:t>工具调用前确定性预授权，53ms延迟</a:t>
+            </a:r>
+            <a:endParaRPr lang="en-US" sz="1200" dirty="0"/>
+          </a:p>
+        </p:txBody>
+      </p:sp>
+      <p:sp>
+        <p:nvSpPr>
+          <p:cNvPr id="44" name="Text 41"/>
+          <p:cNvSpPr/>
+          <p:nvPr/>
+        </p:nvSpPr>
+        <p:spPr>
+          <a:xfrm>
+            <a:off x="7876901" y="4286185"/>
+            <a:ext cx="4761570" cy="523773"/>
+          </a:xfrm>
+          <a:prstGeom prst="rect">
+            <a:avLst/>
+          </a:prstGeom>
+          <a:noFill/>
+        </p:spPr>
+        <p:txBody>
+          <a:bodyPr wrap="square" lIns="0" tIns="0" rIns="0" bIns="0" rtlCol="0" anchor="ctr"/>
+          <a:lstStyle/>
+          <a:p>
+            <a:pPr algn="l">
+              <a:lnSpc>
+                <a:spcPct val="130000"/>
+              </a:lnSpc>
+            </a:pPr>
+            <a:r>
+              <a:rPr lang="en-US" sz="1200" dirty="0">
+                <a:solidFill>
+                  <a:srgbClr val="EC5F74"/>
+                </a:solidFill>
+                <a:latin typeface="Arial" panose="020B0604020202020204" pitchFamily="34" charset="0"/>
+                <a:ea typeface="Arial" panose="020B0604020202020204" pitchFamily="34" charset="-122"/>
+                <a:cs typeface="Arial" panose="020B0604020202020204" pitchFamily="34" charset="-120"/>
+              </a:rPr>
+              <a:t>仅覆盖单工具层面，未解决跨工具参数级约束</a:t>
+            </a:r>
+            <a:endParaRPr lang="en-US" sz="1200" dirty="0"/>
+          </a:p>
+        </p:txBody>
+      </p:sp>
+      <p:sp>
+        <p:nvSpPr>
+          <p:cNvPr id="46" name="Text 43"/>
+          <p:cNvSpPr/>
+          <p:nvPr/>
+        </p:nvSpPr>
+        <p:spPr>
+          <a:xfrm>
+            <a:off x="639315" y="4905068"/>
+            <a:ext cx="2095091" cy="523773"/>
+          </a:xfrm>
+          <a:prstGeom prst="rect">
+            <a:avLst/>
+          </a:prstGeom>
+          <a:noFill/>
+        </p:spPr>
+        <p:txBody>
+          <a:bodyPr wrap="none" lIns="0" tIns="0" rIns="0" bIns="0" rtlCol="0" anchor="ctr"/>
+          <a:lstStyle/>
+          <a:p>
+            <a:pPr algn="l">
+              <a:lnSpc>
+                <a:spcPct val="120000"/>
+              </a:lnSpc>
+            </a:pPr>
+            <a:r>
+              <a:rPr lang="en-US" sz="1350" b="1" dirty="0">
+                <a:solidFill>
+                  <a:srgbClr val="04579A"/>
+                </a:solidFill>
+                <a:latin typeface="Arial" panose="020B0604020202020204" pitchFamily="34" charset="0"/>
+                <a:ea typeface="Arial" panose="020B0604020202020204" pitchFamily="34" charset="-122"/>
+                <a:cs typeface="Arial" panose="020B0604020202020204" pitchFamily="34" charset="-120"/>
+                <a:sym typeface="+mn-ea"/>
+              </a:rPr>
+              <a:t>Deterministic Pre-Action Auth [37]</a:t>
+            </a:r>
+            <a:endParaRPr lang="en-US" sz="1350" dirty="0"/>
+          </a:p>
+        </p:txBody>
+      </p:sp>
+      <p:sp>
+        <p:nvSpPr>
+          <p:cNvPr id="47" name="Text 44"/>
+          <p:cNvSpPr/>
+          <p:nvPr/>
+        </p:nvSpPr>
+        <p:spPr>
+          <a:xfrm>
+            <a:off x="4257675" y="4286250"/>
+            <a:ext cx="3393440" cy="523875"/>
+          </a:xfrm>
+          <a:prstGeom prst="rect">
+            <a:avLst/>
+          </a:prstGeom>
+          <a:noFill/>
+        </p:spPr>
+        <p:txBody>
+          <a:bodyPr wrap="square" lIns="0" tIns="0" rIns="0" bIns="0" rtlCol="0" anchor="ctr"/>
+          <a:lstStyle/>
+          <a:p>
+            <a:pPr algn="l">
+              <a:lnSpc>
+                <a:spcPct val="130000"/>
+              </a:lnSpc>
+            </a:pPr>
+            <a:r>
+              <a:rPr lang="en-US" sz="1200" dirty="0">
+                <a:solidFill>
+                  <a:srgbClr val="333333"/>
+                </a:solidFill>
+                <a:latin typeface="Arial" panose="020B0604020202020204" pitchFamily="34" charset="0"/>
+                <a:ea typeface="Arial" panose="020B0604020202020204" pitchFamily="34" charset="-122"/>
+                <a:cs typeface="Arial" panose="020B0604020202020204" pitchFamily="34" charset="-120"/>
+              </a:rPr>
+              <a:t>自动化权限预测：LLM+CF混合模型，85.1%准确率</a:t>
+            </a:r>
+            <a:endParaRPr lang="en-US" sz="1200" dirty="0"/>
+          </a:p>
+        </p:txBody>
+      </p:sp>
+      <p:sp>
+        <p:nvSpPr>
+          <p:cNvPr id="48" name="Text 45"/>
+          <p:cNvSpPr/>
+          <p:nvPr/>
+        </p:nvSpPr>
+        <p:spPr>
+          <a:xfrm>
+            <a:off x="7876901" y="4905068"/>
+            <a:ext cx="4761570" cy="523773"/>
+          </a:xfrm>
+          <a:prstGeom prst="rect">
+            <a:avLst/>
+          </a:prstGeom>
+          <a:noFill/>
+        </p:spPr>
+        <p:txBody>
+          <a:bodyPr wrap="square" lIns="0" tIns="0" rIns="0" bIns="0" rtlCol="0" anchor="ctr"/>
+          <a:lstStyle/>
+          <a:p>
+            <a:pPr algn="l">
+              <a:lnSpc>
+                <a:spcPct val="130000"/>
+              </a:lnSpc>
+            </a:pPr>
+            <a:r>
+              <a:rPr lang="en-US" sz="1200" dirty="0">
+                <a:solidFill>
+                  <a:srgbClr val="EC5F74"/>
+                </a:solidFill>
+                <a:latin typeface="Arial" panose="020B0604020202020204" pitchFamily="34" charset="0"/>
+                <a:ea typeface="Arial" panose="020B0604020202020204" pitchFamily="34" charset="-122"/>
+                <a:cs typeface="Arial" panose="020B0604020202020204" pitchFamily="34" charset="-120"/>
+              </a:rPr>
+              <a:t>预测模型而非确定性策略，低置信度需人工介入</a:t>
+            </a:r>
+            <a:endParaRPr lang="en-US" sz="1200" dirty="0"/>
+          </a:p>
+        </p:txBody>
+      </p:sp>
+      <p:sp>
+        <p:nvSpPr>
+          <p:cNvPr id="49" name="Shape 46"/>
+          <p:cNvSpPr/>
+          <p:nvPr/>
+        </p:nvSpPr>
+        <p:spPr>
+          <a:xfrm>
+            <a:off x="544083" y="5476457"/>
+            <a:ext cx="15113223" cy="619004"/>
+          </a:xfrm>
+          <a:prstGeom prst="rect">
+            <a:avLst/>
+          </a:prstGeom>
+          <a:solidFill>
+            <a:srgbClr val="FFFFFF"/>
+          </a:solidFill>
+        </p:spPr>
+      </p:sp>
+      <p:sp>
+        <p:nvSpPr>
+          <p:cNvPr id="50" name="Text 47"/>
+          <p:cNvSpPr/>
+          <p:nvPr/>
+        </p:nvSpPr>
+        <p:spPr>
+          <a:xfrm>
+            <a:off x="639315" y="5524072"/>
+            <a:ext cx="2095091" cy="523773"/>
+          </a:xfrm>
+          <a:prstGeom prst="rect">
+            <a:avLst/>
+          </a:prstGeom>
+          <a:noFill/>
+        </p:spPr>
+        <p:txBody>
+          <a:bodyPr wrap="none" lIns="0" tIns="0" rIns="0" bIns="0" rtlCol="0" anchor="ctr"/>
+          <a:lstStyle/>
+          <a:p>
+            <a:pPr algn="l">
+              <a:lnSpc>
+                <a:spcPct val="120000"/>
+              </a:lnSpc>
+            </a:pPr>
+            <a:r>
+              <a:rPr lang="en-US" sz="1350" b="1" dirty="0">
+                <a:solidFill>
+                  <a:srgbClr val="04579A"/>
+                </a:solidFill>
+                <a:latin typeface="Arial" panose="020B0604020202020204" pitchFamily="34" charset="0"/>
+                <a:ea typeface="Arial" panose="020B0604020202020204" pitchFamily="34" charset="-122"/>
+                <a:cs typeface="Arial" panose="020B0604020202020204" pitchFamily="34" charset="-120"/>
+                <a:sym typeface="+mn-ea"/>
+              </a:rPr>
+              <a:t>Authorization Propagation [40]</a:t>
+            </a:r>
+            <a:endParaRPr lang="en-US" sz="1350" dirty="0"/>
+          </a:p>
+        </p:txBody>
+      </p:sp>
+      <p:sp>
+        <p:nvSpPr>
+          <p:cNvPr id="51" name="Text 48"/>
+          <p:cNvSpPr/>
+          <p:nvPr/>
+        </p:nvSpPr>
+        <p:spPr>
+          <a:xfrm>
+            <a:off x="4257675" y="5523865"/>
+            <a:ext cx="3466465" cy="523875"/>
+          </a:xfrm>
+          <a:prstGeom prst="rect">
+            <a:avLst/>
+          </a:prstGeom>
+          <a:noFill/>
+        </p:spPr>
+        <p:txBody>
+          <a:bodyPr wrap="square" lIns="0" tIns="0" rIns="0" bIns="0" rtlCol="0" anchor="ctr"/>
+          <a:lstStyle/>
+          <a:p>
+            <a:pPr algn="l">
+              <a:lnSpc>
+                <a:spcPct val="130000"/>
+              </a:lnSpc>
+            </a:pPr>
+            <a:r>
+              <a:rPr lang="en-US" sz="1200" dirty="0">
+                <a:solidFill>
+                  <a:srgbClr val="333333"/>
+                </a:solidFill>
+                <a:latin typeface="Arial" panose="020B0604020202020204" pitchFamily="34" charset="0"/>
+                <a:ea typeface="Arial" panose="020B0604020202020204" pitchFamily="34" charset="-122"/>
+                <a:cs typeface="Arial" panose="020B0604020202020204" pitchFamily="34" charset="-120"/>
+              </a:rPr>
+              <a:t>授权传播形式化分析，七项结构要求</a:t>
+            </a:r>
+            <a:endParaRPr lang="en-US" sz="1200" dirty="0"/>
+          </a:p>
+        </p:txBody>
+      </p:sp>
+      <p:sp>
+        <p:nvSpPr>
+          <p:cNvPr id="52" name="Text 49"/>
+          <p:cNvSpPr/>
+          <p:nvPr/>
+        </p:nvSpPr>
+        <p:spPr>
+          <a:xfrm>
+            <a:off x="7876901" y="5524072"/>
+            <a:ext cx="4761570" cy="523773"/>
+          </a:xfrm>
+          <a:prstGeom prst="rect">
+            <a:avLst/>
+          </a:prstGeom>
+          <a:noFill/>
+        </p:spPr>
+        <p:txBody>
+          <a:bodyPr wrap="square" lIns="0" tIns="0" rIns="0" bIns="0" rtlCol="0" anchor="ctr"/>
+          <a:lstStyle/>
+          <a:p>
+            <a:pPr algn="l">
+              <a:lnSpc>
+                <a:spcPct val="130000"/>
+              </a:lnSpc>
+            </a:pPr>
+            <a:r>
+              <a:rPr lang="en-US" sz="1200" dirty="0">
+                <a:solidFill>
+                  <a:srgbClr val="EC5F74"/>
+                </a:solidFill>
+                <a:latin typeface="Arial" panose="020B0604020202020204" pitchFamily="34" charset="0"/>
+                <a:ea typeface="Arial" panose="020B0604020202020204" pitchFamily="34" charset="-122"/>
+                <a:cs typeface="Arial" panose="020B0604020202020204" pitchFamily="34" charset="-120"/>
+              </a:rPr>
+              <a:t>仅提出框架性要求，未给出具体协议设计</a:t>
+            </a:r>
+            <a:endParaRPr lang="en-US" sz="1200" dirty="0"/>
+          </a:p>
+        </p:txBody>
+      </p:sp>
+      <p:sp>
+        <p:nvSpPr>
+          <p:cNvPr id="53" name="Shape 50"/>
+          <p:cNvSpPr/>
+          <p:nvPr/>
+        </p:nvSpPr>
+        <p:spPr>
+          <a:xfrm>
+            <a:off x="544343" y="7524173"/>
+            <a:ext cx="15113223" cy="1333240"/>
+          </a:xfrm>
+          <a:prstGeom prst="roundRect">
+            <a:avLst>
+              <a:gd name="adj" fmla="val 2000"/>
+            </a:avLst>
+          </a:prstGeom>
+          <a:solidFill>
+            <a:srgbClr val="FFF3E0"/>
+          </a:solidFill>
+        </p:spPr>
+      </p:sp>
+      <p:sp>
+        <p:nvSpPr>
+          <p:cNvPr id="54" name="Text 51"/>
+          <p:cNvSpPr/>
+          <p:nvPr/>
+        </p:nvSpPr>
+        <p:spPr>
+          <a:xfrm>
+            <a:off x="857083" y="7667021"/>
+            <a:ext cx="14541835" cy="1047545"/>
+          </a:xfrm>
+          <a:prstGeom prst="rect">
+            <a:avLst/>
+          </a:prstGeom>
+          <a:noFill/>
+        </p:spPr>
+        <p:txBody>
+          <a:bodyPr wrap="square" lIns="0" tIns="0" rIns="0" bIns="0" rtlCol="0" anchor="t"/>
+          <a:lstStyle/>
+          <a:p>
+            <a:pPr algn="l">
+              <a:lnSpc>
+                <a:spcPct val="160000"/>
+              </a:lnSpc>
+            </a:pPr>
+            <a:r>
+              <a:rPr lang="en-US" b="1" dirty="0">
+                <a:solidFill>
+                  <a:srgbClr val="333333"/>
+                </a:solidFill>
+                <a:latin typeface="Arial" panose="020B0604020202020204" pitchFamily="34" charset="0"/>
+                <a:ea typeface="Arial" panose="020B0604020202020204" pitchFamily="34" charset="-122"/>
+                <a:cs typeface="Arial" panose="020B0604020202020204" pitchFamily="34" charset="-120"/>
+              </a:rPr>
+              <a:t>核心缺口：</a:t>
+            </a:r>
+            <a:r>
+              <a:rPr lang="en-US" dirty="0">
+                <a:solidFill>
+                  <a:srgbClr val="333333"/>
+                </a:solidFill>
+                <a:latin typeface="Arial" panose="020B0604020202020204" pitchFamily="34" charset="0"/>
+                <a:ea typeface="Arial" panose="020B0604020202020204" pitchFamily="34" charset="-122"/>
+                <a:cs typeface="Arial" panose="020B0604020202020204" pitchFamily="34" charset="-120"/>
+              </a:rPr>
+              <a:t>现有工作均未同时满足 (1) 操作参数级精确授权  (2) 任务上下文条件感知  (3) 多智能体顺序授权约束</a:t>
+            </a:r>
+            <a:endParaRPr lang="en-US" dirty="0"/>
+          </a:p>
+          <a:p>
+            <a:pPr algn="l">
+              <a:lnSpc>
+                <a:spcPct val="160000"/>
+              </a:lnSpc>
+            </a:pPr>
+            <a:r>
+              <a:rPr lang="en-US" dirty="0">
+                <a:solidFill>
+                  <a:srgbClr val="333333"/>
+                </a:solidFill>
+                <a:latin typeface="Arial" panose="020B0604020202020204" pitchFamily="34" charset="0"/>
+                <a:ea typeface="Arial" panose="020B0604020202020204" pitchFamily="34" charset="-122"/>
+                <a:cs typeface="Arial" panose="020B0604020202020204" pitchFamily="34" charset="-120"/>
+              </a:rPr>
+              <a:t>本课题旨在设计面向复杂任务的智能体授权协议，填补上述三项不足</a:t>
+            </a:r>
+            <a:endParaRPr lang="en-US" dirty="0"/>
+          </a:p>
+        </p:txBody>
+      </p:sp>
+      <p:sp>
+        <p:nvSpPr>
+          <p:cNvPr id="55" name="Text 52"/>
+          <p:cNvSpPr/>
+          <p:nvPr/>
+        </p:nvSpPr>
+        <p:spPr>
+          <a:xfrm>
+            <a:off x="15237024" y="8666950"/>
+            <a:ext cx="761851" cy="380926"/>
+          </a:xfrm>
+          <a:prstGeom prst="rect">
+            <a:avLst/>
+          </a:prstGeom>
+          <a:noFill/>
+        </p:spPr>
+        <p:txBody>
+          <a:bodyPr wrap="none" lIns="0" tIns="0" rIns="0" bIns="0" rtlCol="0" anchor="ctr"/>
+          <a:lstStyle/>
+          <a:p>
+            <a:pPr algn="r">
+              <a:lnSpc>
+                <a:spcPct val="120000"/>
+              </a:lnSpc>
+            </a:pPr>
+            <a:r>
+              <a:rPr lang="en-US" sz="2100" dirty="0">
+                <a:solidFill>
+                  <a:srgbClr val="666666"/>
+                </a:solidFill>
+                <a:latin typeface="Arial" panose="020B0604020202020204" pitchFamily="34" charset="0"/>
+                <a:ea typeface="Arial" panose="020B0604020202020204" pitchFamily="34" charset="-122"/>
+                <a:cs typeface="Arial" panose="020B0604020202020204" pitchFamily="34" charset="-120"/>
+              </a:rPr>
+              <a:t>13</a:t>
+            </a:r>
+            <a:endParaRPr lang="en-US" sz="2100" dirty="0"/>
+          </a:p>
+        </p:txBody>
+      </p:sp>
+    </p:spTree>
+  </p:cSld>
+  <p:clrMapOvr>
+    <a:masterClrMapping/>
+  </p:clrMapOvr>
+  <p:transition>
+    <p:fade/>
+  </p:transition>
+</p:sld>
+</file>
+
+<file path=ppt/slides/slide7.xml><?xml version="1.0" encoding="utf-8"?>
+<p:sld xmlns:a="http://schemas.openxmlformats.org/drawingml/2006/main" xmlns:r="http://schemas.openxmlformats.org/officeDocument/2006/relationships" xmlns:p="http://schemas.openxmlformats.org/presentationml/2006/main">
+  <p:cSld>
+    <p:spTree>
+      <p:nvGrpSpPr>
+        <p:cNvPr id="1" name=""/>
+        <p:cNvGrpSpPr/>
+        <p:nvPr/>
+      </p:nvGrpSpPr>
+      <p:grpSpPr>
+        <a:xfrm>
+          <a:off x="0" y="0"/>
+          <a:ext cx="0" cy="0"/>
+          <a:chOff x="0" y="0"/>
+          <a:chExt cx="0" cy="0"/>
+        </a:xfrm>
+      </p:grpSpPr>
+      <p:sp>
+        <p:nvSpPr>
+          <p:cNvPr id="3" name="Shape 0"/>
+          <p:cNvSpPr/>
+          <p:nvPr/>
+        </p:nvSpPr>
+        <p:spPr>
+          <a:xfrm>
+            <a:off x="2219960" y="0"/>
+            <a:ext cx="2895600" cy="965200"/>
+          </a:xfrm>
+          <a:prstGeom prst="rect">
+            <a:avLst/>
+          </a:prstGeom>
+          <a:solidFill>
+            <a:srgbClr val="F2F2F2"/>
+          </a:solidFill>
+        </p:spPr>
+      </p:sp>
+      <p:sp>
+        <p:nvSpPr>
+          <p:cNvPr id="4" name="Shape 1"/>
+          <p:cNvSpPr/>
+          <p:nvPr/>
+        </p:nvSpPr>
+        <p:spPr>
+          <a:xfrm>
+            <a:off x="5162169" y="0"/>
+            <a:ext cx="2590800" cy="965200"/>
+          </a:xfrm>
+          <a:prstGeom prst="rect">
+            <a:avLst/>
+          </a:prstGeom>
+          <a:solidFill>
+            <a:srgbClr val="F2F2F2"/>
+          </a:solidFill>
+        </p:spPr>
+      </p:sp>
+      <p:sp>
+        <p:nvSpPr>
+          <p:cNvPr id="5" name="Shape 2"/>
+          <p:cNvSpPr/>
+          <p:nvPr/>
+        </p:nvSpPr>
+        <p:spPr>
+          <a:xfrm>
+            <a:off x="11971020" y="0"/>
+            <a:ext cx="4284980" cy="965200"/>
+          </a:xfrm>
+          <a:prstGeom prst="rect">
+            <a:avLst/>
+          </a:prstGeom>
+          <a:solidFill>
+            <a:srgbClr val="F2F2F2"/>
+          </a:solidFill>
+        </p:spPr>
+      </p:sp>
+      <p:sp>
+        <p:nvSpPr>
+          <p:cNvPr id="6" name="Shape 3"/>
+          <p:cNvSpPr/>
+          <p:nvPr/>
+        </p:nvSpPr>
+        <p:spPr>
+          <a:xfrm>
+            <a:off x="7816469" y="0"/>
+            <a:ext cx="4114800" cy="965200"/>
+          </a:xfrm>
+          <a:prstGeom prst="rect">
+            <a:avLst/>
+          </a:prstGeom>
+          <a:solidFill>
+            <a:srgbClr val="04579A"/>
+          </a:solidFill>
+        </p:spPr>
+      </p:sp>
+      <p:sp>
+        <p:nvSpPr>
+          <p:cNvPr id="7" name="Text 4"/>
+          <p:cNvSpPr/>
+          <p:nvPr/>
+        </p:nvSpPr>
+        <p:spPr>
+          <a:xfrm>
+            <a:off x="2283460" y="203200"/>
+            <a:ext cx="2768600" cy="508000"/>
+          </a:xfrm>
+          <a:prstGeom prst="rect">
+            <a:avLst/>
+          </a:prstGeom>
+          <a:noFill/>
+        </p:spPr>
+        <p:txBody>
+          <a:bodyPr wrap="none" lIns="0" tIns="0" rIns="0" bIns="0" rtlCol="0" anchor="ctr"/>
+          <a:lstStyle/>
+          <a:p>
+            <a:pPr algn="ctr">
+              <a:lnSpc>
+                <a:spcPct val="120000"/>
+              </a:lnSpc>
+            </a:pPr>
+            <a:r>
+              <a:rPr lang="en-US" sz="2000" dirty="0">
+                <a:solidFill>
+                  <a:srgbClr val="333333"/>
+                </a:solidFill>
+                <a:latin typeface="Arial" panose="020B0604020202020204" pitchFamily="34" charset="0"/>
+                <a:ea typeface="Arial" panose="020B0604020202020204" pitchFamily="34" charset="-122"/>
+                <a:cs typeface="Arial" panose="020B0604020202020204" pitchFamily="34" charset="-120"/>
+              </a:rPr>
+              <a:t>选题背景及意义</a:t>
+            </a:r>
+            <a:endParaRPr lang="en-US" sz="2000" dirty="0"/>
+          </a:p>
+        </p:txBody>
+      </p:sp>
+      <p:sp>
+        <p:nvSpPr>
+          <p:cNvPr id="8" name="Text 5"/>
+          <p:cNvSpPr/>
+          <p:nvPr/>
+        </p:nvSpPr>
+        <p:spPr>
+          <a:xfrm>
+            <a:off x="5225669" y="203200"/>
+            <a:ext cx="2463800" cy="508000"/>
+          </a:xfrm>
+          <a:prstGeom prst="rect">
+            <a:avLst/>
+          </a:prstGeom>
+          <a:noFill/>
+        </p:spPr>
+        <p:txBody>
+          <a:bodyPr wrap="none" lIns="0" tIns="0" rIns="0" bIns="0" rtlCol="0" anchor="ctr"/>
+          <a:lstStyle/>
+          <a:p>
+            <a:pPr algn="ctr">
+              <a:lnSpc>
+                <a:spcPct val="120000"/>
+              </a:lnSpc>
+            </a:pPr>
+            <a:r>
+              <a:rPr lang="en-US" sz="2000" dirty="0">
+                <a:solidFill>
+                  <a:srgbClr val="333333"/>
+                </a:solidFill>
+                <a:latin typeface="Arial" panose="020B0604020202020204" pitchFamily="34" charset="0"/>
+                <a:ea typeface="Arial" panose="020B0604020202020204" pitchFamily="34" charset="-122"/>
+                <a:cs typeface="Arial" panose="020B0604020202020204" pitchFamily="34" charset="-120"/>
+              </a:rPr>
+              <a:t>国内外研究现状</a:t>
+            </a:r>
+            <a:endParaRPr lang="en-US" sz="2000" dirty="0"/>
+          </a:p>
+        </p:txBody>
+      </p:sp>
+      <p:sp>
+        <p:nvSpPr>
+          <p:cNvPr id="9" name="Text 6"/>
+          <p:cNvSpPr/>
+          <p:nvPr/>
+        </p:nvSpPr>
+        <p:spPr>
+          <a:xfrm>
+            <a:off x="7879969" y="203200"/>
+            <a:ext cx="3987800" cy="508000"/>
+          </a:xfrm>
+          <a:prstGeom prst="rect">
+            <a:avLst/>
+          </a:prstGeom>
+          <a:noFill/>
+        </p:spPr>
+        <p:txBody>
+          <a:bodyPr wrap="none" lIns="0" tIns="0" rIns="0" bIns="0" rtlCol="0" anchor="ctr"/>
+          <a:lstStyle/>
+          <a:p>
+            <a:pPr algn="ctr">
+              <a:lnSpc>
+                <a:spcPct val="120000"/>
+              </a:lnSpc>
+            </a:pPr>
+            <a:r>
+              <a:rPr lang="en-US" sz="2000" dirty="0">
+                <a:solidFill>
+                  <a:srgbClr val="FFFFFF"/>
+                </a:solidFill>
+                <a:latin typeface="Arial" panose="020B0604020202020204" pitchFamily="34" charset="0"/>
+                <a:ea typeface="Arial" panose="020B0604020202020204" pitchFamily="34" charset="-122"/>
+                <a:cs typeface="Arial" panose="020B0604020202020204" pitchFamily="34" charset="-120"/>
+              </a:rPr>
+              <a:t>主要研究内容及预期目标</a:t>
+            </a:r>
+            <a:endParaRPr lang="en-US" sz="2000" dirty="0"/>
+          </a:p>
+        </p:txBody>
+      </p:sp>
+      <p:sp>
+        <p:nvSpPr>
+          <p:cNvPr id="10" name="Text 7"/>
+          <p:cNvSpPr/>
+          <p:nvPr/>
+        </p:nvSpPr>
+        <p:spPr>
+          <a:xfrm>
+            <a:off x="12034520" y="203200"/>
+            <a:ext cx="4157980" cy="508000"/>
+          </a:xfrm>
+          <a:prstGeom prst="rect">
+            <a:avLst/>
+          </a:prstGeom>
+          <a:noFill/>
+        </p:spPr>
+        <p:txBody>
+          <a:bodyPr wrap="none" lIns="0" tIns="0" rIns="0" bIns="0" rtlCol="0" anchor="ctr"/>
+          <a:lstStyle/>
+          <a:p>
+            <a:pPr algn="ctr">
+              <a:lnSpc>
+                <a:spcPct val="120000"/>
+              </a:lnSpc>
+            </a:pPr>
+            <a:r>
+              <a:rPr lang="en-US" sz="2000" dirty="0">
+                <a:solidFill>
+                  <a:srgbClr val="333333"/>
+                </a:solidFill>
+                <a:latin typeface="Arial" panose="020B0604020202020204" pitchFamily="34" charset="0"/>
+                <a:ea typeface="Arial" panose="020B0604020202020204" pitchFamily="34" charset="-122"/>
+                <a:cs typeface="Arial" panose="020B0604020202020204" pitchFamily="34" charset="-120"/>
+              </a:rPr>
+              <a:t>工作计划与进度安排</a:t>
+            </a:r>
+            <a:endParaRPr lang="en-US" sz="2000" dirty="0"/>
+          </a:p>
+        </p:txBody>
+      </p:sp>
+      <p:sp>
+        <p:nvSpPr>
+          <p:cNvPr id="11" name="Shape 8"/>
+          <p:cNvSpPr/>
+          <p:nvPr/>
+        </p:nvSpPr>
+        <p:spPr>
+          <a:xfrm rot="10800000">
+            <a:off x="9683369" y="965200"/>
+            <a:ext cx="381000" cy="304800"/>
+          </a:xfrm>
+          <a:prstGeom prst="triangle">
+            <a:avLst>
+              <a:gd name="adj" fmla="val 50000"/>
+            </a:avLst>
+          </a:prstGeom>
+          <a:solidFill>
+            <a:srgbClr val="04579A"/>
+          </a:solidFill>
+        </p:spPr>
+      </p:sp>
+      <p:pic>
+        <p:nvPicPr>
+          <p:cNvPr id="12" name="Image 0" descr="https://kimi-img.moonshot.cn/pub/slides/okc/flfuysioo4gzm/mnt/agents/output/new_pptd/images/image_2.jpg"/>
+          <p:cNvPicPr>
+            <a:picLocks noChangeAspect="1"/>
+          </p:cNvPicPr>
+          <p:nvPr/>
+        </p:nvPicPr>
+        <p:blipFill>
+          <a:blip r:embed="rId1"/>
+          <a:srcRect l="5060" r="29000"/>
+          <a:stretch>
+            <a:fillRect/>
+          </a:stretch>
+        </p:blipFill>
+        <p:spPr>
+          <a:xfrm>
+            <a:off x="544449" y="140589"/>
+            <a:ext cx="1273429" cy="745871"/>
+          </a:xfrm>
+          <a:prstGeom prst="rect">
+            <a:avLst/>
+          </a:prstGeom>
+        </p:spPr>
+      </p:pic>
+      <p:sp>
+        <p:nvSpPr>
+          <p:cNvPr id="13" name="Shape 9"/>
+          <p:cNvSpPr/>
+          <p:nvPr>
+            <p:custDataLst>
+              <p:tags r:id="rId2"/>
+            </p:custDataLst>
+          </p:nvPr>
+        </p:nvSpPr>
+        <p:spPr>
+          <a:xfrm>
+            <a:off x="5586730" y="2680970"/>
+            <a:ext cx="474091" cy="694309"/>
+          </a:xfrm>
+          <a:prstGeom prst="rightArrow">
+            <a:avLst>
+              <a:gd name="adj1" fmla="val 50000"/>
+              <a:gd name="adj2" fmla="val 50000"/>
+            </a:avLst>
+          </a:prstGeom>
+          <a:solidFill>
+            <a:srgbClr val="FFFFFF"/>
+          </a:solidFill>
+          <a:ln w="12700">
+            <a:solidFill>
+              <a:srgbClr val="04579A"/>
+            </a:solidFill>
+            <a:prstDash val="solid"/>
+          </a:ln>
+        </p:spPr>
+      </p:sp>
+      <p:sp>
+        <p:nvSpPr>
+          <p:cNvPr id="14" name="Shape 10"/>
+          <p:cNvSpPr/>
+          <p:nvPr>
+            <p:custDataLst>
+              <p:tags r:id="rId3"/>
+            </p:custDataLst>
+          </p:nvPr>
+        </p:nvSpPr>
+        <p:spPr>
+          <a:xfrm>
+            <a:off x="5586730" y="4102481"/>
+            <a:ext cx="474091" cy="694309"/>
+          </a:xfrm>
+          <a:prstGeom prst="rightArrow">
+            <a:avLst>
+              <a:gd name="adj1" fmla="val 50000"/>
+              <a:gd name="adj2" fmla="val 50000"/>
+            </a:avLst>
+          </a:prstGeom>
+          <a:solidFill>
+            <a:srgbClr val="FFFFFF"/>
+          </a:solidFill>
+          <a:ln w="12700">
+            <a:solidFill>
+              <a:srgbClr val="04579A"/>
+            </a:solidFill>
+            <a:prstDash val="solid"/>
+          </a:ln>
+        </p:spPr>
+      </p:sp>
+      <p:sp>
+        <p:nvSpPr>
+          <p:cNvPr id="15" name="Shape 11"/>
+          <p:cNvSpPr/>
+          <p:nvPr>
+            <p:custDataLst>
+              <p:tags r:id="rId4"/>
+            </p:custDataLst>
+          </p:nvPr>
+        </p:nvSpPr>
+        <p:spPr>
+          <a:xfrm>
+            <a:off x="5586730" y="5412359"/>
+            <a:ext cx="474091" cy="694309"/>
+          </a:xfrm>
+          <a:prstGeom prst="rightArrow">
+            <a:avLst>
+              <a:gd name="adj1" fmla="val 50000"/>
+              <a:gd name="adj2" fmla="val 50000"/>
+            </a:avLst>
+          </a:prstGeom>
+          <a:solidFill>
+            <a:srgbClr val="FFFFFF"/>
+          </a:solidFill>
+          <a:ln w="12700">
+            <a:solidFill>
+              <a:srgbClr val="04579A"/>
+            </a:solidFill>
+            <a:prstDash val="solid"/>
+          </a:ln>
+        </p:spPr>
+      </p:sp>
+      <p:sp>
+        <p:nvSpPr>
+          <p:cNvPr id="16" name="Text 12"/>
+          <p:cNvSpPr/>
+          <p:nvPr>
+            <p:custDataLst>
+              <p:tags r:id="rId5"/>
+            </p:custDataLst>
+          </p:nvPr>
+        </p:nvSpPr>
+        <p:spPr>
+          <a:xfrm>
+            <a:off x="6592570" y="2761361"/>
+            <a:ext cx="8409559" cy="531749"/>
+          </a:xfrm>
+          <a:prstGeom prst="rect">
+            <a:avLst/>
+          </a:prstGeom>
+          <a:noFill/>
+        </p:spPr>
+        <p:txBody>
+          <a:bodyPr wrap="square" lIns="0" tIns="0" rIns="0" bIns="0" rtlCol="0" anchor="t"/>
+          <a:lstStyle/>
+          <a:p>
+            <a:pPr algn="l">
+              <a:lnSpc>
+                <a:spcPct val="120000"/>
+              </a:lnSpc>
+            </a:pPr>
+            <a:r>
+              <a:rPr lang="en-US" sz="2670" b="1" dirty="0">
+                <a:solidFill>
+                  <a:srgbClr val="04579A"/>
+                </a:solidFill>
+                <a:latin typeface="Arial" panose="020B0604020202020204" pitchFamily="34" charset="0"/>
+                <a:ea typeface="Arial" panose="020B0604020202020204" pitchFamily="34" charset="-122"/>
+                <a:cs typeface="Arial" panose="020B0604020202020204" pitchFamily="34" charset="-120"/>
+              </a:rPr>
+              <a:t>基于操作参数约束需求的智能体授权协议设计</a:t>
+            </a:r>
+            <a:r>
+              <a:rPr lang="en-US" sz="2670" b="1" dirty="0">
+                <a:solidFill>
+                  <a:srgbClr val="04579A"/>
+                </a:solidFill>
+                <a:latin typeface="MiSans" pitchFamily="34" charset="0"/>
+                <a:ea typeface="MiSans" pitchFamily="34" charset="-122"/>
+                <a:cs typeface="MiSans" pitchFamily="34" charset="-120"/>
+              </a:rPr>
+              <a:t>	</a:t>
+            </a:r>
+            <a:endParaRPr lang="en-US" sz="2670" dirty="0"/>
+          </a:p>
+        </p:txBody>
+      </p:sp>
+      <p:sp>
+        <p:nvSpPr>
+          <p:cNvPr id="17" name="Text 13"/>
+          <p:cNvSpPr/>
+          <p:nvPr>
+            <p:custDataLst>
+              <p:tags r:id="rId6"/>
+            </p:custDataLst>
+          </p:nvPr>
+        </p:nvSpPr>
+        <p:spPr>
+          <a:xfrm>
+            <a:off x="6592570" y="4217670"/>
+            <a:ext cx="8741791" cy="531749"/>
+          </a:xfrm>
+          <a:prstGeom prst="rect">
+            <a:avLst/>
+          </a:prstGeom>
+          <a:noFill/>
+        </p:spPr>
+        <p:txBody>
+          <a:bodyPr wrap="square" lIns="0" tIns="0" rIns="0" bIns="0" rtlCol="0" anchor="t"/>
+          <a:lstStyle/>
+          <a:p>
+            <a:pPr algn="l">
+              <a:lnSpc>
+                <a:spcPct val="120000"/>
+              </a:lnSpc>
+            </a:pPr>
+            <a:r>
+              <a:rPr lang="en-US" sz="2670" b="1" dirty="0">
+                <a:solidFill>
+                  <a:srgbClr val="04579A"/>
+                </a:solidFill>
+                <a:latin typeface="Arial" panose="020B0604020202020204" pitchFamily="34" charset="0"/>
+                <a:ea typeface="Arial" panose="020B0604020202020204" pitchFamily="34" charset="-122"/>
+                <a:cs typeface="Arial" panose="020B0604020202020204" pitchFamily="34" charset="-120"/>
+              </a:rPr>
+              <a:t>基于顺序执行约束需求的智能体授权协议设计</a:t>
+            </a:r>
+            <a:r>
+              <a:rPr lang="en-US" sz="2670" b="1" dirty="0">
+                <a:solidFill>
+                  <a:srgbClr val="04579A"/>
+                </a:solidFill>
+                <a:latin typeface="MiSans" pitchFamily="34" charset="0"/>
+                <a:ea typeface="MiSans" pitchFamily="34" charset="-122"/>
+                <a:cs typeface="MiSans" pitchFamily="34" charset="-120"/>
+              </a:rPr>
+              <a:t>	</a:t>
+            </a:r>
+            <a:endParaRPr lang="en-US" sz="2670" dirty="0"/>
+          </a:p>
+        </p:txBody>
+      </p:sp>
+      <p:sp>
+        <p:nvSpPr>
+          <p:cNvPr id="18" name="Text 14"/>
+          <p:cNvSpPr/>
+          <p:nvPr>
+            <p:custDataLst>
+              <p:tags r:id="rId7"/>
+            </p:custDataLst>
+          </p:nvPr>
+        </p:nvSpPr>
+        <p:spPr>
+          <a:xfrm>
+            <a:off x="6592570" y="5513832"/>
+            <a:ext cx="8921369" cy="531749"/>
+          </a:xfrm>
+          <a:prstGeom prst="rect">
+            <a:avLst/>
+          </a:prstGeom>
+          <a:noFill/>
+        </p:spPr>
+        <p:txBody>
+          <a:bodyPr wrap="square" lIns="0" tIns="0" rIns="0" bIns="0" rtlCol="0" anchor="t"/>
+          <a:lstStyle/>
+          <a:p>
+            <a:pPr algn="l">
+              <a:lnSpc>
+                <a:spcPct val="120000"/>
+              </a:lnSpc>
+            </a:pPr>
+            <a:r>
+              <a:rPr lang="en-US" sz="2670" b="1" dirty="0">
+                <a:solidFill>
+                  <a:srgbClr val="04579A"/>
+                </a:solidFill>
+                <a:latin typeface="Arial" panose="020B0604020202020204" pitchFamily="34" charset="0"/>
+                <a:ea typeface="Arial" panose="020B0604020202020204" pitchFamily="34" charset="-122"/>
+                <a:cs typeface="Arial" panose="020B0604020202020204" pitchFamily="34" charset="-120"/>
+              </a:rPr>
+              <a:t>基于复杂任务授权需求的智能体授权协议应用实现</a:t>
+            </a:r>
+            <a:endParaRPr lang="en-US" sz="2670" dirty="0"/>
+          </a:p>
+        </p:txBody>
+      </p:sp>
+      <p:sp>
+        <p:nvSpPr>
+          <p:cNvPr id="19" name="Text 15"/>
+          <p:cNvSpPr/>
+          <p:nvPr>
+            <p:custDataLst>
+              <p:tags r:id="rId8"/>
+            </p:custDataLst>
+          </p:nvPr>
+        </p:nvSpPr>
+        <p:spPr>
+          <a:xfrm>
+            <a:off x="743839" y="2556129"/>
+            <a:ext cx="4312920" cy="942340"/>
+          </a:xfrm>
+          <a:prstGeom prst="rect">
+            <a:avLst/>
+          </a:prstGeom>
+          <a:noFill/>
+        </p:spPr>
+        <p:txBody>
+          <a:bodyPr wrap="square" lIns="0" tIns="0" rIns="0" bIns="0" rtlCol="0" anchor="t"/>
+          <a:lstStyle/>
+          <a:p>
+            <a:pPr marL="424180" indent="-424180" algn="ctr">
+              <a:lnSpc>
+                <a:spcPct val="120000"/>
+              </a:lnSpc>
+              <a:spcBef>
+                <a:spcPts val="10"/>
+              </a:spcBef>
+              <a:buSzPct val="100000"/>
+              <a:buFont typeface="+mj-lt"/>
+              <a:buAutoNum type="arabicPeriod"/>
+            </a:pPr>
+            <a:r>
+              <a:rPr lang="en-US" sz="2670" b="1" dirty="0">
+                <a:solidFill>
+                  <a:srgbClr val="262626"/>
+                </a:solidFill>
+                <a:latin typeface="MiSans" pitchFamily="34" charset="0"/>
+                <a:ea typeface="MiSans" pitchFamily="34" charset="-122"/>
+                <a:cs typeface="MiSans" pitchFamily="34" charset="-120"/>
+              </a:rPr>
+              <a:t>复杂任务场景下的智能体授权</a:t>
+            </a:r>
+            <a:r>
+              <a:rPr lang="en-US" sz="2670" b="1" dirty="0">
+                <a:solidFill>
+                  <a:srgbClr val="262626"/>
+                </a:solidFill>
+                <a:latin typeface="MiSans" pitchFamily="34" charset="0"/>
+                <a:ea typeface="MiSans" pitchFamily="34" charset="-122"/>
+                <a:cs typeface="MiSans" pitchFamily="34" charset="-120"/>
+              </a:rPr>
+              <a:t>粒度</a:t>
+            </a:r>
+            <a:endParaRPr lang="en-US" sz="2670" dirty="0"/>
+          </a:p>
+        </p:txBody>
+      </p:sp>
+      <p:sp>
+        <p:nvSpPr>
+          <p:cNvPr id="20" name="Text 16"/>
+          <p:cNvSpPr/>
+          <p:nvPr>
+            <p:custDataLst>
+              <p:tags r:id="rId9"/>
+            </p:custDataLst>
+          </p:nvPr>
+        </p:nvSpPr>
+        <p:spPr>
+          <a:xfrm>
+            <a:off x="742061" y="3940937"/>
+            <a:ext cx="4314571" cy="942340"/>
+          </a:xfrm>
+          <a:prstGeom prst="rect">
+            <a:avLst/>
+          </a:prstGeom>
+          <a:noFill/>
+        </p:spPr>
+        <p:txBody>
+          <a:bodyPr wrap="square" lIns="0" tIns="0" rIns="0" bIns="0" rtlCol="0" anchor="t"/>
+          <a:lstStyle/>
+          <a:p>
+            <a:pPr algn="ctr">
+              <a:lnSpc>
+                <a:spcPct val="120000"/>
+              </a:lnSpc>
+            </a:pPr>
+            <a:r>
+              <a:rPr lang="en-US" sz="2670" b="1" dirty="0">
+                <a:solidFill>
+                  <a:srgbClr val="262626"/>
+                </a:solidFill>
+                <a:latin typeface="MiSans" pitchFamily="34" charset="0"/>
+                <a:ea typeface="MiSans" pitchFamily="34" charset="-122"/>
+                <a:cs typeface="MiSans" pitchFamily="34" charset="-120"/>
+              </a:rPr>
+              <a:t>2. 复杂任务场景下的智能体上下文感知</a:t>
+            </a:r>
+            <a:endParaRPr lang="en-US" sz="2670" dirty="0"/>
+          </a:p>
+        </p:txBody>
+      </p:sp>
+      <p:sp>
+        <p:nvSpPr>
+          <p:cNvPr id="21" name="Text 17"/>
+          <p:cNvSpPr/>
+          <p:nvPr>
+            <p:custDataLst>
+              <p:tags r:id="rId10"/>
+            </p:custDataLst>
+          </p:nvPr>
+        </p:nvSpPr>
+        <p:spPr>
+          <a:xfrm>
+            <a:off x="742061" y="5364861"/>
+            <a:ext cx="4316349" cy="942340"/>
+          </a:xfrm>
+          <a:prstGeom prst="rect">
+            <a:avLst/>
+          </a:prstGeom>
+          <a:noFill/>
+        </p:spPr>
+        <p:txBody>
+          <a:bodyPr wrap="square" lIns="0" tIns="0" rIns="0" bIns="0" rtlCol="0" anchor="t"/>
+          <a:lstStyle/>
+          <a:p>
+            <a:pPr algn="ctr">
+              <a:lnSpc>
+                <a:spcPct val="120000"/>
+              </a:lnSpc>
+            </a:pPr>
+            <a:r>
+              <a:rPr lang="en-US" sz="2670" b="1" dirty="0">
+                <a:solidFill>
+                  <a:srgbClr val="262626"/>
+                </a:solidFill>
+                <a:latin typeface="Arial" panose="020B0604020202020204" pitchFamily="34" charset="0"/>
+                <a:ea typeface="Arial" panose="020B0604020202020204" pitchFamily="34" charset="-122"/>
+                <a:cs typeface="Arial" panose="020B0604020202020204" pitchFamily="34" charset="-120"/>
+              </a:rPr>
+              <a:t>3.  复杂任务场景下</a:t>
+            </a:r>
+            <a:r>
+              <a:rPr lang="zh-CN" altLang="en-US" sz="2670" b="1" dirty="0">
+                <a:solidFill>
+                  <a:srgbClr val="262626"/>
+                </a:solidFill>
+                <a:latin typeface="Arial" panose="020B0604020202020204" pitchFamily="34" charset="0"/>
+                <a:ea typeface="Arial" panose="020B0604020202020204" pitchFamily="34" charset="-122"/>
+                <a:cs typeface="Arial" panose="020B0604020202020204" pitchFamily="34" charset="-120"/>
+              </a:rPr>
+              <a:t>的</a:t>
+            </a:r>
+            <a:r>
+              <a:rPr lang="en-US" sz="2670" b="1" dirty="0">
+                <a:solidFill>
+                  <a:srgbClr val="262626"/>
+                </a:solidFill>
+                <a:latin typeface="Arial" panose="020B0604020202020204" pitchFamily="34" charset="0"/>
+                <a:ea typeface="Arial" panose="020B0604020202020204" pitchFamily="34" charset="-122"/>
+                <a:cs typeface="Arial" panose="020B0604020202020204" pitchFamily="34" charset="-120"/>
+              </a:rPr>
+              <a:t>智能体授权协议</a:t>
+            </a:r>
+            <a:endParaRPr lang="en-US" sz="2670" dirty="0"/>
+          </a:p>
+        </p:txBody>
+      </p:sp>
+      <p:sp>
+        <p:nvSpPr>
+          <p:cNvPr id="22" name="Text 18"/>
+          <p:cNvSpPr/>
+          <p:nvPr/>
+        </p:nvSpPr>
+        <p:spPr>
+          <a:xfrm>
+            <a:off x="15649067" y="8666353"/>
+            <a:ext cx="606933" cy="492506"/>
+          </a:xfrm>
+          <a:prstGeom prst="rect">
+            <a:avLst/>
+          </a:prstGeom>
+          <a:noFill/>
+        </p:spPr>
+        <p:txBody>
+          <a:bodyPr wrap="square" lIns="0" tIns="0" rIns="0" bIns="0" rtlCol="0" anchor="t"/>
+          <a:lstStyle/>
+          <a:p>
+            <a:pPr algn="ctr">
+              <a:lnSpc>
+                <a:spcPct val="120000"/>
+              </a:lnSpc>
+            </a:pPr>
+            <a:r>
+              <a:rPr lang="en-US" sz="2400" dirty="0">
+                <a:solidFill>
+                  <a:srgbClr val="000000"/>
+                </a:solidFill>
+                <a:latin typeface="Arial" panose="020B0604020202020204" pitchFamily="34" charset="0"/>
+                <a:ea typeface="Arial" panose="020B0604020202020204" pitchFamily="34" charset="-122"/>
+                <a:cs typeface="Arial" panose="020B0604020202020204" pitchFamily="34" charset="-120"/>
+              </a:rPr>
+              <a:t>22</a:t>
+            </a:r>
+            <a:endParaRPr lang="en-US" sz="2400" dirty="0"/>
+          </a:p>
+        </p:txBody>
+      </p:sp>
+    </p:spTree>
+  </p:cSld>
+  <p:clrMapOvr>
+    <a:masterClrMapping/>
+  </p:clrMapOvr>
+  <p:transition>
+    <p:fade/>
+  </p:transition>
+</p:sld>
+</file>
+
 <file path=ppt/tags/tag1.xml><?xml version="1.0" encoding="utf-8"?>
 <p:tagLst xmlns:p="http://schemas.openxmlformats.org/presentationml/2006/main">
   <p:tag name="KSO_WM_UNIT_HIGHLIGHT" val="0"/>
@@ -3453,6 +10828,66 @@
 </p:tagLst>
 </file>
 
+<file path=ppt/tags/tag30.xml><?xml version="1.0" encoding="utf-8"?>
+<p:tagLst xmlns:p="http://schemas.openxmlformats.org/presentationml/2006/main">
+  <p:tag name="KSO_WM_DIAGRAM_VIRTUALLY_FRAME" val="{&quot;height&quot;:509.8,&quot;left&quot;:20.2,&quot;top&quot;:155.2,&quot;width&quot;:665.8}"/>
+</p:tagLst>
+</file>
+
+<file path=ppt/tags/tag31.xml><?xml version="1.0" encoding="utf-8"?>
+<p:tagLst xmlns:p="http://schemas.openxmlformats.org/presentationml/2006/main">
+  <p:tag name="KSO_WM_DIAGRAM_VIRTUALLY_FRAME" val="{&quot;height&quot;:509.8,&quot;left&quot;:20.2,&quot;top&quot;:155.2,&quot;width&quot;:665.8}"/>
+</p:tagLst>
+</file>
+
+<file path=ppt/tags/tag32.xml><?xml version="1.0" encoding="utf-8"?>
+<p:tagLst xmlns:p="http://schemas.openxmlformats.org/presentationml/2006/main">
+  <p:tag name="KSO_WM_DIAGRAM_VIRTUALLY_FRAME" val="{&quot;height&quot;:509.8,&quot;left&quot;:20.2,&quot;top&quot;:155.2,&quot;width&quot;:665.8}"/>
+</p:tagLst>
+</file>
+
+<file path=ppt/tags/tag33.xml><?xml version="1.0" encoding="utf-8"?>
+<p:tagLst xmlns:p="http://schemas.openxmlformats.org/presentationml/2006/main">
+  <p:tag name="KSO_WM_DIAGRAM_VIRTUALLY_FRAME" val="{&quot;height&quot;:509.8,&quot;left&quot;:20.2,&quot;top&quot;:155.2,&quot;width&quot;:665.8}"/>
+</p:tagLst>
+</file>
+
+<file path=ppt/tags/tag34.xml><?xml version="1.0" encoding="utf-8"?>
+<p:tagLst xmlns:p="http://schemas.openxmlformats.org/presentationml/2006/main">
+  <p:tag name="KSO_WM_DIAGRAM_VIRTUALLY_FRAME" val="{&quot;height&quot;:509.8,&quot;left&quot;:20.2,&quot;top&quot;:155.2,&quot;width&quot;:665.8}"/>
+</p:tagLst>
+</file>
+
+<file path=ppt/tags/tag35.xml><?xml version="1.0" encoding="utf-8"?>
+<p:tagLst xmlns:p="http://schemas.openxmlformats.org/presentationml/2006/main">
+  <p:tag name="KSO_WM_DIAGRAM_VIRTUALLY_FRAME" val="{&quot;height&quot;:509.8,&quot;left&quot;:20.2,&quot;top&quot;:155.2,&quot;width&quot;:665.8}"/>
+</p:tagLst>
+</file>
+
+<file path=ppt/tags/tag36.xml><?xml version="1.0" encoding="utf-8"?>
+<p:tagLst xmlns:p="http://schemas.openxmlformats.org/presentationml/2006/main">
+  <p:tag name="KSO_WM_DIAGRAM_VIRTUALLY_FRAME" val="{&quot;height&quot;:509.8,&quot;left&quot;:20.2,&quot;top&quot;:155.2,&quot;width&quot;:665.8}"/>
+</p:tagLst>
+</file>
+
+<file path=ppt/tags/tag37.xml><?xml version="1.0" encoding="utf-8"?>
+<p:tagLst xmlns:p="http://schemas.openxmlformats.org/presentationml/2006/main">
+  <p:tag name="KSO_WM_DIAGRAM_VIRTUALLY_FRAME" val="{&quot;height&quot;:509.8,&quot;left&quot;:20.2,&quot;top&quot;:155.2,&quot;width&quot;:665.8}"/>
+</p:tagLst>
+</file>
+
+<file path=ppt/tags/tag38.xml><?xml version="1.0" encoding="utf-8"?>
+<p:tagLst xmlns:p="http://schemas.openxmlformats.org/presentationml/2006/main">
+  <p:tag name="KSO_WM_DIAGRAM_VIRTUALLY_FRAME" val="{&quot;height&quot;:509.8,&quot;left&quot;:20.2,&quot;top&quot;:155.2,&quot;width&quot;:665.8}"/>
+</p:tagLst>
+</file>
+
+<file path=ppt/tags/tag39.xml><?xml version="1.0" encoding="utf-8"?>
+<p:tagLst xmlns:p="http://schemas.openxmlformats.org/presentationml/2006/main">
+  <p:tag name="KSO_WM_DIAGRAM_VIRTUALLY_FRAME" val="{&quot;height&quot;:509.8,&quot;left&quot;:20.2,&quot;top&quot;:155.2,&quot;width&quot;:665.8}"/>
+</p:tagLst>
+</file>
+
 <file path=ppt/tags/tag4.xml><?xml version="1.0" encoding="utf-8"?>
 <p:tagLst xmlns:p="http://schemas.openxmlformats.org/presentationml/2006/main">
   <p:tag name="KSO_WM_UNIT_HIGHLIGHT" val="0"/>
@@ -3463,6 +10898,66 @@
   <p:tag name="KSO_WM_UNIT_LAYERLEVEL" val="1"/>
   <p:tag name="KSO_WM_TAG_VERSION" val="1.0"/>
   <p:tag name="KSO_WM_BEAUTIFY_FLAG" val="#wm#"/>
+</p:tagLst>
+</file>
+
+<file path=ppt/tags/tag40.xml><?xml version="1.0" encoding="utf-8"?>
+<p:tagLst xmlns:p="http://schemas.openxmlformats.org/presentationml/2006/main">
+  <p:tag name="KSO_WM_DIAGRAM_VIRTUALLY_FRAME" val="{&quot;height&quot;:509.8,&quot;left&quot;:20.2,&quot;top&quot;:155.2,&quot;width&quot;:665.8}"/>
+</p:tagLst>
+</file>
+
+<file path=ppt/tags/tag41.xml><?xml version="1.0" encoding="utf-8"?>
+<p:tagLst xmlns:p="http://schemas.openxmlformats.org/presentationml/2006/main">
+  <p:tag name="KSO_WM_DIAGRAM_VIRTUALLY_FRAME" val="{&quot;height&quot;:509.8,&quot;left&quot;:20.2,&quot;top&quot;:155.2,&quot;width&quot;:665.8}"/>
+</p:tagLst>
+</file>
+
+<file path=ppt/tags/tag42.xml><?xml version="1.0" encoding="utf-8"?>
+<p:tagLst xmlns:p="http://schemas.openxmlformats.org/presentationml/2006/main">
+  <p:tag name="KSO_WM_DIAGRAM_VIRTUALLY_FRAME" val="{&quot;height&quot;:509.8,&quot;left&quot;:20.2,&quot;top&quot;:155.2,&quot;width&quot;:665.8}"/>
+</p:tagLst>
+</file>
+
+<file path=ppt/tags/tag43.xml><?xml version="1.0" encoding="utf-8"?>
+<p:tagLst xmlns:p="http://schemas.openxmlformats.org/presentationml/2006/main">
+  <p:tag name="KSO_WM_DIAGRAM_VIRTUALLY_FRAME" val="{&quot;height&quot;:509.8,&quot;left&quot;:20.2,&quot;top&quot;:155.2,&quot;width&quot;:665.8}"/>
+</p:tagLst>
+</file>
+
+<file path=ppt/tags/tag44.xml><?xml version="1.0" encoding="utf-8"?>
+<p:tagLst xmlns:p="http://schemas.openxmlformats.org/presentationml/2006/main">
+  <p:tag name="KSO_WM_DIAGRAM_VIRTUALLY_FRAME" val="{&quot;height&quot;:509.8,&quot;left&quot;:20.2,&quot;top&quot;:155.2,&quot;width&quot;:665.8}"/>
+</p:tagLst>
+</file>
+
+<file path=ppt/tags/tag45.xml><?xml version="1.0" encoding="utf-8"?>
+<p:tagLst xmlns:p="http://schemas.openxmlformats.org/presentationml/2006/main">
+  <p:tag name="KSO_WM_DIAGRAM_VIRTUALLY_FRAME" val="{&quot;height&quot;:509.8,&quot;left&quot;:20.2,&quot;top&quot;:155.2,&quot;width&quot;:665.8}"/>
+</p:tagLst>
+</file>
+
+<file path=ppt/tags/tag46.xml><?xml version="1.0" encoding="utf-8"?>
+<p:tagLst xmlns:p="http://schemas.openxmlformats.org/presentationml/2006/main">
+  <p:tag name="KSO_WM_DIAGRAM_VIRTUALLY_FRAME" val="{&quot;height&quot;:509.8,&quot;left&quot;:20.2,&quot;top&quot;:155.2,&quot;width&quot;:665.8}"/>
+</p:tagLst>
+</file>
+
+<file path=ppt/tags/tag47.xml><?xml version="1.0" encoding="utf-8"?>
+<p:tagLst xmlns:p="http://schemas.openxmlformats.org/presentationml/2006/main">
+  <p:tag name="KSO_WM_DIAGRAM_VIRTUALLY_FRAME" val="{&quot;height&quot;:509.8,&quot;left&quot;:20.2,&quot;top&quot;:155.2,&quot;width&quot;:665.8}"/>
+</p:tagLst>
+</file>
+
+<file path=ppt/tags/tag48.xml><?xml version="1.0" encoding="utf-8"?>
+<p:tagLst xmlns:p="http://schemas.openxmlformats.org/presentationml/2006/main">
+  <p:tag name="KSO_WM_DIAGRAM_VIRTUALLY_FRAME" val="{&quot;height&quot;:509.8,&quot;left&quot;:20.2,&quot;top&quot;:155.2,&quot;width&quot;:665.8}"/>
+</p:tagLst>
+</file>
+
+<file path=ppt/tags/tag49.xml><?xml version="1.0" encoding="utf-8"?>
+<p:tagLst xmlns:p="http://schemas.openxmlformats.org/presentationml/2006/main">
+  <p:tag name="KSO_WM_DIAGRAM_VIRTUALLY_FRAME" val="{&quot;height&quot;:562,&quot;left&quot;:60,&quot;top&quot;:158,&quot;width&quot;:1160}"/>
 </p:tagLst>
 </file>
 
@@ -3479,15 +10974,159 @@
 </p:tagLst>
 </file>
 
+<file path=ppt/tags/tag50.xml><?xml version="1.0" encoding="utf-8"?>
+<p:tagLst xmlns:p="http://schemas.openxmlformats.org/presentationml/2006/main">
+  <p:tag name="KSO_WM_DIAGRAM_VIRTUALLY_FRAME" val="{&quot;height&quot;:562,&quot;left&quot;:60,&quot;top&quot;:158,&quot;width&quot;:1160}"/>
+</p:tagLst>
+</file>
+
+<file path=ppt/tags/tag51.xml><?xml version="1.0" encoding="utf-8"?>
+<p:tagLst xmlns:p="http://schemas.openxmlformats.org/presentationml/2006/main">
+  <p:tag name="KSO_WM_DIAGRAM_VIRTUALLY_FRAME" val="{&quot;height&quot;:562,&quot;left&quot;:60,&quot;top&quot;:158,&quot;width&quot;:1160}"/>
+</p:tagLst>
+</file>
+
+<file path=ppt/tags/tag52.xml><?xml version="1.0" encoding="utf-8"?>
+<p:tagLst xmlns:p="http://schemas.openxmlformats.org/presentationml/2006/main">
+  <p:tag name="KSO_WM_DIAGRAM_VIRTUALLY_FRAME" val="{&quot;height&quot;:562,&quot;left&quot;:60,&quot;top&quot;:158,&quot;width&quot;:1160}"/>
+</p:tagLst>
+</file>
+
+<file path=ppt/tags/tag53.xml><?xml version="1.0" encoding="utf-8"?>
+<p:tagLst xmlns:p="http://schemas.openxmlformats.org/presentationml/2006/main">
+  <p:tag name="KSO_WM_DIAGRAM_VIRTUALLY_FRAME" val="{&quot;height&quot;:562,&quot;left&quot;:60,&quot;top&quot;:158,&quot;width&quot;:1160}"/>
+</p:tagLst>
+</file>
+
+<file path=ppt/tags/tag54.xml><?xml version="1.0" encoding="utf-8"?>
+<p:tagLst xmlns:p="http://schemas.openxmlformats.org/presentationml/2006/main">
+  <p:tag name="KSO_WM_DIAGRAM_VIRTUALLY_FRAME" val="{&quot;height&quot;:562,&quot;left&quot;:60,&quot;top&quot;:158,&quot;width&quot;:1160}"/>
+</p:tagLst>
+</file>
+
+<file path=ppt/tags/tag55.xml><?xml version="1.0" encoding="utf-8"?>
+<p:tagLst xmlns:p="http://schemas.openxmlformats.org/presentationml/2006/main">
+  <p:tag name="KSO_WM_DIAGRAM_VIRTUALLY_FRAME" val="{&quot;height&quot;:562,&quot;left&quot;:60,&quot;top&quot;:158,&quot;width&quot;:1160}"/>
+</p:tagLst>
+</file>
+
+<file path=ppt/tags/tag56.xml><?xml version="1.0" encoding="utf-8"?>
+<p:tagLst xmlns:p="http://schemas.openxmlformats.org/presentationml/2006/main">
+  <p:tag name="KSO_WM_DIAGRAM_VIRTUALLY_FRAME" val="{&quot;height&quot;:562,&quot;left&quot;:60,&quot;top&quot;:158,&quot;width&quot;:1160}"/>
+</p:tagLst>
+</file>
+
+<file path=ppt/tags/tag57.xml><?xml version="1.0" encoding="utf-8"?>
+<p:tagLst xmlns:p="http://schemas.openxmlformats.org/presentationml/2006/main">
+  <p:tag name="KSO_WM_DIAGRAM_VIRTUALLY_FRAME" val="{&quot;height&quot;:562,&quot;left&quot;:60,&quot;top&quot;:158,&quot;width&quot;:1160}"/>
+</p:tagLst>
+</file>
+
+<file path=ppt/tags/tag58.xml><?xml version="1.0" encoding="utf-8"?>
+<p:tagLst xmlns:p="http://schemas.openxmlformats.org/presentationml/2006/main">
+  <p:tag name="KSO_WM_DIAGRAM_VIRTUALLY_FRAME" val="{&quot;height&quot;:562,&quot;left&quot;:60,&quot;top&quot;:158,&quot;width&quot;:1160}"/>
+</p:tagLst>
+</file>
+
+<file path=ppt/tags/tag59.xml><?xml version="1.0" encoding="utf-8"?>
+<p:tagLst xmlns:p="http://schemas.openxmlformats.org/presentationml/2006/main">
+  <p:tag name="KSO_WM_DIAGRAM_VIRTUALLY_FRAME" val="{&quot;height&quot;:562,&quot;left&quot;:60,&quot;top&quot;:158,&quot;width&quot;:1160}"/>
+</p:tagLst>
+</file>
+
 <file path=ppt/tags/tag6.xml><?xml version="1.0" encoding="utf-8"?>
 <p:tagLst xmlns:p="http://schemas.openxmlformats.org/presentationml/2006/main">
   <p:tag name="KSO_WM_BEAUTIFY_FLAG" val=""/>
 </p:tagLst>
 </file>
 
+<file path=ppt/tags/tag60.xml><?xml version="1.0" encoding="utf-8"?>
+<p:tagLst xmlns:p="http://schemas.openxmlformats.org/presentationml/2006/main">
+  <p:tag name="KSO_WM_DIAGRAM_VIRTUALLY_FRAME" val="{&quot;height&quot;:562,&quot;left&quot;:60,&quot;top&quot;:158,&quot;width&quot;:1160}"/>
+</p:tagLst>
+</file>
+
+<file path=ppt/tags/tag61.xml><?xml version="1.0" encoding="utf-8"?>
+<p:tagLst xmlns:p="http://schemas.openxmlformats.org/presentationml/2006/main">
+  <p:tag name="KSO_WM_DIAGRAM_VIRTUALLY_FRAME" val="{&quot;height&quot;:562,&quot;left&quot;:60,&quot;top&quot;:158,&quot;width&quot;:1160}"/>
+</p:tagLst>
+</file>
+
+<file path=ppt/tags/tag62.xml><?xml version="1.0" encoding="utf-8"?>
+<p:tagLst xmlns:p="http://schemas.openxmlformats.org/presentationml/2006/main">
+  <p:tag name="KSO_WM_DIAGRAM_VIRTUALLY_FRAME" val="{&quot;height&quot;:562,&quot;left&quot;:60,&quot;top&quot;:158,&quot;width&quot;:1160}"/>
+</p:tagLst>
+</file>
+
+<file path=ppt/tags/tag63.xml><?xml version="1.0" encoding="utf-8"?>
+<p:tagLst xmlns:p="http://schemas.openxmlformats.org/presentationml/2006/main">
+  <p:tag name="KSO_WM_DIAGRAM_VIRTUALLY_FRAME" val="{&quot;height&quot;:562,&quot;left&quot;:60,&quot;top&quot;:158,&quot;width&quot;:1160}"/>
+</p:tagLst>
+</file>
+
+<file path=ppt/tags/tag64.xml><?xml version="1.0" encoding="utf-8"?>
+<p:tagLst xmlns:p="http://schemas.openxmlformats.org/presentationml/2006/main">
+  <p:tag name="KSO_WM_DIAGRAM_VIRTUALLY_FRAME" val="{&quot;height&quot;:562,&quot;left&quot;:60,&quot;top&quot;:158,&quot;width&quot;:1160}"/>
+</p:tagLst>
+</file>
+
+<file path=ppt/tags/tag65.xml><?xml version="1.0" encoding="utf-8"?>
+<p:tagLst xmlns:p="http://schemas.openxmlformats.org/presentationml/2006/main">
+  <p:tag name="KSO_WM_DIAGRAM_VIRTUALLY_FRAME" val="{&quot;height&quot;:295.36,&quot;left&quot;:58.42999999999999,&quot;top&quot;:201.27,&quot;width&quot;:1163.14}"/>
+</p:tagLst>
+</file>
+
+<file path=ppt/tags/tag66.xml><?xml version="1.0" encoding="utf-8"?>
+<p:tagLst xmlns:p="http://schemas.openxmlformats.org/presentationml/2006/main">
+  <p:tag name="KSO_WM_DIAGRAM_VIRTUALLY_FRAME" val="{&quot;height&quot;:295.36,&quot;left&quot;:58.42999999999999,&quot;top&quot;:201.27,&quot;width&quot;:1163.14}"/>
+</p:tagLst>
+</file>
+
+<file path=ppt/tags/tag67.xml><?xml version="1.0" encoding="utf-8"?>
+<p:tagLst xmlns:p="http://schemas.openxmlformats.org/presentationml/2006/main">
+  <p:tag name="KSO_WM_DIAGRAM_VIRTUALLY_FRAME" val="{&quot;height&quot;:295.36,&quot;left&quot;:58.42999999999999,&quot;top&quot;:201.27,&quot;width&quot;:1163.14}"/>
+</p:tagLst>
+</file>
+
+<file path=ppt/tags/tag68.xml><?xml version="1.0" encoding="utf-8"?>
+<p:tagLst xmlns:p="http://schemas.openxmlformats.org/presentationml/2006/main">
+  <p:tag name="KSO_WM_DIAGRAM_VIRTUALLY_FRAME" val="{&quot;height&quot;:295.36,&quot;left&quot;:58.42999999999999,&quot;top&quot;:201.27,&quot;width&quot;:1163.14}"/>
+</p:tagLst>
+</file>
+
+<file path=ppt/tags/tag69.xml><?xml version="1.0" encoding="utf-8"?>
+<p:tagLst xmlns:p="http://schemas.openxmlformats.org/presentationml/2006/main">
+  <p:tag name="KSO_WM_DIAGRAM_VIRTUALLY_FRAME" val="{&quot;height&quot;:295.36,&quot;left&quot;:58.42999999999999,&quot;top&quot;:201.27,&quot;width&quot;:1163.14}"/>
+</p:tagLst>
+</file>
+
 <file path=ppt/tags/tag7.xml><?xml version="1.0" encoding="utf-8"?>
 <p:tagLst xmlns:p="http://schemas.openxmlformats.org/presentationml/2006/main">
   <p:tag name="KSO_WM_BEAUTIFY_FLAG" val=""/>
+</p:tagLst>
+</file>
+
+<file path=ppt/tags/tag70.xml><?xml version="1.0" encoding="utf-8"?>
+<p:tagLst xmlns:p="http://schemas.openxmlformats.org/presentationml/2006/main">
+  <p:tag name="KSO_WM_DIAGRAM_VIRTUALLY_FRAME" val="{&quot;height&quot;:295.36,&quot;left&quot;:58.42999999999999,&quot;top&quot;:201.27,&quot;width&quot;:1163.14}"/>
+</p:tagLst>
+</file>
+
+<file path=ppt/tags/tag71.xml><?xml version="1.0" encoding="utf-8"?>
+<p:tagLst xmlns:p="http://schemas.openxmlformats.org/presentationml/2006/main">
+  <p:tag name="KSO_WM_DIAGRAM_VIRTUALLY_FRAME" val="{&quot;height&quot;:295.36,&quot;left&quot;:58.42999999999999,&quot;top&quot;:201.27,&quot;width&quot;:1163.14}"/>
+</p:tagLst>
+</file>
+
+<file path=ppt/tags/tag72.xml><?xml version="1.0" encoding="utf-8"?>
+<p:tagLst xmlns:p="http://schemas.openxmlformats.org/presentationml/2006/main">
+  <p:tag name="KSO_WM_DIAGRAM_VIRTUALLY_FRAME" val="{&quot;height&quot;:295.36,&quot;left&quot;:58.42999999999999,&quot;top&quot;:201.27,&quot;width&quot;:1163.14}"/>
+</p:tagLst>
+</file>
+
+<file path=ppt/tags/tag73.xml><?xml version="1.0" encoding="utf-8"?>
+<p:tagLst xmlns:p="http://schemas.openxmlformats.org/presentationml/2006/main">
+  <p:tag name="KSO_WM_DIAGRAM_VIRTUALLY_FRAME" val="{&quot;height&quot;:295.36,&quot;left&quot;:58.42999999999999,&quot;top&quot;:201.27,&quot;width&quot;:1163.14}"/>
 </p:tagLst>
 </file>
 
